--- a/Orena/Brand/Orena Solutions - Brand Playbook.pptx
+++ b/Orena/Brand/Orena Solutions - Brand Playbook.pptx
@@ -2489,7 +2489,7 @@
         <a:spcBef>
           <a:spcPct val="20000"/>
         </a:spcBef>
-        <a:buFont typeface="Arial" pitchFamily="34" charset="0"/>
+        <a:buFont typeface="Inter" pitchFamily="34" charset="0"/>
         <a:buChar char="•"/>
         <a:defRPr sz="3200" kern="1200">
           <a:solidFill>
@@ -2504,7 +2504,7 @@
         <a:spcBef>
           <a:spcPct val="20000"/>
         </a:spcBef>
-        <a:buFont typeface="Arial" pitchFamily="34" charset="0"/>
+        <a:buFont typeface="Inter" pitchFamily="34" charset="0"/>
         <a:buChar char="–"/>
         <a:defRPr sz="2800" kern="1200">
           <a:solidFill>
@@ -2519,7 +2519,7 @@
         <a:spcBef>
           <a:spcPct val="20000"/>
         </a:spcBef>
-        <a:buFont typeface="Arial" pitchFamily="34" charset="0"/>
+        <a:buFont typeface="Inter" pitchFamily="34" charset="0"/>
         <a:buChar char="•"/>
         <a:defRPr sz="2400" kern="1200">
           <a:solidFill>
@@ -2534,7 +2534,7 @@
         <a:spcBef>
           <a:spcPct val="20000"/>
         </a:spcBef>
-        <a:buFont typeface="Arial" pitchFamily="34" charset="0"/>
+        <a:buFont typeface="Inter" pitchFamily="34" charset="0"/>
         <a:buChar char="–"/>
         <a:defRPr sz="2000" kern="1200">
           <a:solidFill>
@@ -2549,7 +2549,7 @@
         <a:spcBef>
           <a:spcPct val="20000"/>
         </a:spcBef>
-        <a:buFont typeface="Arial" pitchFamily="34" charset="0"/>
+        <a:buFont typeface="Inter" pitchFamily="34" charset="0"/>
         <a:buChar char="»"/>
         <a:defRPr sz="2000" kern="1200">
           <a:solidFill>
@@ -2564,7 +2564,7 @@
         <a:spcBef>
           <a:spcPct val="20000"/>
         </a:spcBef>
-        <a:buFont typeface="Arial" pitchFamily="34" charset="0"/>
+        <a:buFont typeface="Inter" pitchFamily="34" charset="0"/>
         <a:buChar char="•"/>
         <a:defRPr sz="2000" kern="1200">
           <a:solidFill>
@@ -2579,7 +2579,7 @@
         <a:spcBef>
           <a:spcPct val="20000"/>
         </a:spcBef>
-        <a:buFont typeface="Arial" pitchFamily="34" charset="0"/>
+        <a:buFont typeface="Inter" pitchFamily="34" charset="0"/>
         <a:buChar char="•"/>
         <a:defRPr sz="2000" kern="1200">
           <a:solidFill>
@@ -2594,7 +2594,7 @@
         <a:spcBef>
           <a:spcPct val="20000"/>
         </a:spcBef>
-        <a:buFont typeface="Arial" pitchFamily="34" charset="0"/>
+        <a:buFont typeface="Inter" pitchFamily="34" charset="0"/>
         <a:buChar char="•"/>
         <a:defRPr sz="2000" kern="1200">
           <a:solidFill>
@@ -2609,7 +2609,7 @@
         <a:spcBef>
           <a:spcPct val="20000"/>
         </a:spcBef>
-        <a:buFont typeface="Arial" pitchFamily="34" charset="0"/>
+        <a:buFont typeface="Inter" pitchFamily="34" charset="0"/>
         <a:buChar char="•"/>
         <a:defRPr sz="2000" kern="1200">
           <a:solidFill>
@@ -2726,7 +2726,7 @@
     <p:bg>
       <p:bgPr>
         <a:solidFill>
-          <a:srgbClr val="2F6B4F"/>
+          <a:srgbClr val="0D7043"/>
         </a:solidFill>
       </p:bgPr>
     </p:bg>
@@ -2759,7 +2759,7 @@
             <a:avLst/>
           </a:prstGeom>
           <a:solidFill>
-            <a:srgbClr val="A8C9C0">
+            <a:srgbClr val="48B855">
               <a:alpha val="60000"/>
             </a:srgbClr>
           </a:solidFill>
@@ -2781,7 +2781,7 @@
             <a:avLst/>
           </a:prstGeom>
           <a:solidFill>
-            <a:srgbClr val="A8C9C0">
+            <a:srgbClr val="48B855">
               <a:alpha val="60000"/>
             </a:srgbClr>
           </a:solidFill>
@@ -2803,7 +2803,7 @@
             <a:avLst/>
           </a:prstGeom>
           <a:solidFill>
-            <a:srgbClr val="A8C9C0">
+            <a:srgbClr val="48B855">
               <a:alpha val="60000"/>
             </a:srgbClr>
           </a:solidFill>
@@ -2825,7 +2825,7 @@
             <a:avLst/>
           </a:prstGeom>
           <a:solidFill>
-            <a:srgbClr val="A8C9C0">
+            <a:srgbClr val="48B855">
               <a:alpha val="60000"/>
             </a:srgbClr>
           </a:solidFill>
@@ -2847,7 +2847,7 @@
             <a:avLst/>
           </a:prstGeom>
           <a:solidFill>
-            <a:srgbClr val="A8C9C0">
+            <a:srgbClr val="48B855">
               <a:alpha val="60000"/>
             </a:srgbClr>
           </a:solidFill>
@@ -2869,7 +2869,7 @@
             <a:avLst/>
           </a:prstGeom>
           <a:solidFill>
-            <a:srgbClr val="A8C9C0">
+            <a:srgbClr val="48B855">
               <a:alpha val="60000"/>
             </a:srgbClr>
           </a:solidFill>
@@ -2891,7 +2891,7 @@
             <a:avLst/>
           </a:prstGeom>
           <a:solidFill>
-            <a:srgbClr val="A8C9C0">
+            <a:srgbClr val="48B855">
               <a:alpha val="60000"/>
             </a:srgbClr>
           </a:solidFill>
@@ -2913,7 +2913,7 @@
             <a:avLst/>
           </a:prstGeom>
           <a:solidFill>
-            <a:srgbClr val="A8C9C0">
+            <a:srgbClr val="48B855">
               <a:alpha val="60000"/>
             </a:srgbClr>
           </a:solidFill>
@@ -2936,8 +2936,8 @@
         </p:blipFill>
         <p:spPr>
           <a:xfrm>
-            <a:off x="3931920" y="2148840"/>
-            <a:ext cx="4325112" cy="2359152"/>
+            <a:off x="4610566" y="2148840"/>
+            <a:ext cx="2967819" cy="2359152"/>
           </a:xfrm>
           <a:prstGeom prst="rect">
             <a:avLst/>
@@ -2973,9 +2973,9 @@
                 <a:solidFill>
                   <a:srgbClr val="FFFFFF"/>
                 </a:solidFill>
-                <a:latin typeface="Georgia" pitchFamily="34" charset="0"/>
-                <a:ea typeface="Georgia" pitchFamily="34" charset="-122"/>
-                <a:cs typeface="Georgia" pitchFamily="34" charset="-120"/>
+                <a:latin typeface="Poppins" pitchFamily="34" charset="0"/>
+                <a:ea typeface="Poppins" pitchFamily="34" charset="-122"/>
+                <a:cs typeface="Poppins" pitchFamily="34" charset="-120"/>
               </a:rPr>
               <a:t>Brand Playbook</a:t>
             </a:r>
@@ -3010,11 +3010,11 @@
             <a:r>
               <a:rPr lang="en-US" sz="1400" i="1" dirty="0">
                 <a:solidFill>
-                  <a:srgbClr val="A8C9C0"/>
-                </a:solidFill>
-                <a:latin typeface="Arial" pitchFamily="34" charset="0"/>
-                <a:ea typeface="Arial" pitchFamily="34" charset="-122"/>
-                <a:cs typeface="Arial" pitchFamily="34" charset="-120"/>
+                  <a:srgbClr val="48B855"/>
+                </a:solidFill>
+                <a:latin typeface="Inter" pitchFamily="34" charset="0"/>
+                <a:ea typeface="Inter" pitchFamily="34" charset="-122"/>
+                <a:cs typeface="Inter" pitchFamily="34" charset="-120"/>
               </a:rPr>
               <a:t>Crafting Preferred Engineers</a:t>
             </a:r>
@@ -3049,11 +3049,11 @@
             <a:r>
               <a:rPr lang="en-US" sz="1000" dirty="0">
                 <a:solidFill>
-                  <a:srgbClr val="7FA391"/>
-                </a:solidFill>
-                <a:latin typeface="Arial" pitchFamily="34" charset="0"/>
-                <a:ea typeface="Arial" pitchFamily="34" charset="-122"/>
-                <a:cs typeface="Arial" pitchFamily="34" charset="-120"/>
+                  <a:srgbClr val="00AF63"/>
+                </a:solidFill>
+                <a:latin typeface="Inter" pitchFamily="34" charset="0"/>
+                <a:ea typeface="Inter" pitchFamily="34" charset="-122"/>
+                <a:cs typeface="Inter" pitchFamily="34" charset="-120"/>
               </a:rPr>
               <a:t>Last updated: August 2026</a:t>
             </a:r>
@@ -3075,7 +3075,7 @@
     <p:bg>
       <p:bgPr>
         <a:solidFill>
-          <a:srgbClr val="FAFAF8"/>
+          <a:srgbClr val="FAFCF9"/>
         </a:solidFill>
       </p:bgPr>
     </p:bg>
@@ -3120,11 +3120,11 @@
             <a:r>
               <a:rPr lang="en-US" sz="1100" b="1" spc="100" kern="0" dirty="0">
                 <a:solidFill>
-                  <a:srgbClr val="6E7A70"/>
-                </a:solidFill>
-                <a:latin typeface="Arial" pitchFamily="34" charset="0"/>
-                <a:ea typeface="Arial" pitchFamily="34" charset="-122"/>
-                <a:cs typeface="Arial" pitchFamily="34" charset="-120"/>
+                  <a:srgbClr val="66756D"/>
+                </a:solidFill>
+                <a:latin typeface="Inter" pitchFamily="34" charset="0"/>
+                <a:ea typeface="Inter" pitchFamily="34" charset="-122"/>
+                <a:cs typeface="Inter" pitchFamily="34" charset="-120"/>
               </a:rPr>
               <a:t>Colors</a:t>
             </a:r>
@@ -3159,11 +3159,11 @@
             <a:r>
               <a:rPr lang="en-US" sz="1100" spc="100" kern="0" dirty="0">
                 <a:solidFill>
-                  <a:srgbClr val="6E7A70"/>
-                </a:solidFill>
-                <a:latin typeface="Arial" pitchFamily="34" charset="0"/>
-                <a:ea typeface="Arial" pitchFamily="34" charset="-122"/>
-                <a:cs typeface="Arial" pitchFamily="34" charset="-120"/>
+                  <a:srgbClr val="66756D"/>
+                </a:solidFill>
+                <a:latin typeface="Inter" pitchFamily="34" charset="0"/>
+                <a:ea typeface="Inter" pitchFamily="34" charset="-122"/>
+                <a:cs typeface="Inter" pitchFamily="34" charset="-120"/>
               </a:rPr>
               <a:t>Proportions &amp; Usage</a:t>
             </a:r>
@@ -3201,13 +3201,13 @@
             <a:r>
               <a:rPr lang="en-US" sz="1250" dirty="0">
                 <a:solidFill>
-                  <a:srgbClr val="333333"/>
-                </a:solidFill>
-                <a:latin typeface="Arial" pitchFamily="34" charset="0"/>
-                <a:ea typeface="Arial" pitchFamily="34" charset="-122"/>
-                <a:cs typeface="Arial" pitchFamily="34" charset="-120"/>
-              </a:rPr>
-              <a:t>We use a lot of negative space and soft neutrals to keep layouts calm and legible. Deep Forest Green is used sparingly to draw attention to headlines and core actions. Gold marks only the most important highlights.</a:t>
+                  <a:srgbClr val="18231E"/>
+                </a:solidFill>
+                <a:latin typeface="Inter" pitchFamily="34" charset="0"/>
+                <a:ea typeface="Inter" pitchFamily="34" charset="-122"/>
+                <a:cs typeface="Inter" pitchFamily="34" charset="-120"/>
+              </a:rPr>
+              <a:t>We use a lot of negative space and soft neutrals to keep layouts calm and legible. Orena Green is used sparingly to draw attention to headlines and core actions. Lime marks only the most important highlights.</a:t>
             </a:r>
             <a:endParaRPr lang="en-US" sz="1250" dirty="0"/>
           </a:p>
@@ -3234,7 +3234,7 @@
           </a:solidFill>
           <a:ln w="12700">
             <a:solidFill>
-              <a:srgbClr val="E4E1D9"/>
+              <a:srgbClr val="E8F4EE"/>
             </a:solidFill>
             <a:prstDash val="solid"/>
           </a:ln>
@@ -3267,13 +3267,13 @@
             <a:r>
               <a:rPr lang="en-US" sz="1300" b="1" dirty="0">
                 <a:solidFill>
-                  <a:srgbClr val="333333"/>
-                </a:solidFill>
-                <a:latin typeface="Arial" pitchFamily="34" charset="0"/>
-                <a:ea typeface="Arial" pitchFamily="34" charset="-122"/>
-                <a:cs typeface="Arial" pitchFamily="34" charset="-120"/>
-              </a:rPr>
-              <a:t>Off-White</a:t>
+                  <a:srgbClr val="18231E"/>
+                </a:solidFill>
+                <a:latin typeface="Inter" pitchFamily="34" charset="0"/>
+                <a:ea typeface="Inter" pitchFamily="34" charset="-122"/>
+                <a:cs typeface="Inter" pitchFamily="34" charset="-120"/>
+              </a:rPr>
+              <a:t>Warm White</a:t>
             </a:r>
             <a:endParaRPr lang="en-US" sz="1300" dirty="0"/>
           </a:p>
@@ -3306,11 +3306,11 @@
             <a:r>
               <a:rPr lang="en-US" sz="950" i="1" dirty="0">
                 <a:solidFill>
-                  <a:srgbClr val="8C9188"/>
-                </a:solidFill>
-                <a:latin typeface="Arial" pitchFamily="34" charset="0"/>
-                <a:ea typeface="Arial" pitchFamily="34" charset="-122"/>
-                <a:cs typeface="Arial" pitchFamily="34" charset="-120"/>
+                  <a:srgbClr val="66756D"/>
+                </a:solidFill>
+                <a:latin typeface="Inter" pitchFamily="34" charset="0"/>
+                <a:ea typeface="Inter" pitchFamily="34" charset="-122"/>
+                <a:cs typeface="Inter" pitchFamily="34" charset="-120"/>
               </a:rPr>
               <a:t>Base canvas for pages and documents</a:t>
             </a:r>
@@ -3335,7 +3335,7 @@
             </a:avLst>
           </a:prstGeom>
           <a:solidFill>
-            <a:srgbClr val="DDE3DC"/>
+            <a:srgbClr val="E8F4EE"/>
           </a:solidFill>
           <a:ln/>
         </p:spPr>
@@ -3367,13 +3367,13 @@
             <a:r>
               <a:rPr lang="en-US" sz="1300" b="1" dirty="0">
                 <a:solidFill>
-                  <a:srgbClr val="333333"/>
-                </a:solidFill>
-                <a:latin typeface="Arial" pitchFamily="34" charset="0"/>
-                <a:ea typeface="Arial" pitchFamily="34" charset="-122"/>
-                <a:cs typeface="Arial" pitchFamily="34" charset="-120"/>
-              </a:rPr>
-              <a:t>Soft Sage Grey</a:t>
+                  <a:srgbClr val="18231E"/>
+                </a:solidFill>
+                <a:latin typeface="Inter" pitchFamily="34" charset="0"/>
+                <a:ea typeface="Inter" pitchFamily="34" charset="-122"/>
+                <a:cs typeface="Inter" pitchFamily="34" charset="-120"/>
+              </a:rPr>
+              <a:t>Pale Mint</a:t>
             </a:r>
             <a:endParaRPr lang="en-US" sz="1300" dirty="0"/>
           </a:p>
@@ -3406,11 +3406,11 @@
             <a:r>
               <a:rPr lang="en-US" sz="950" i="1" dirty="0">
                 <a:solidFill>
-                  <a:srgbClr val="5F6B60"/>
-                </a:solidFill>
-                <a:latin typeface="Arial" pitchFamily="34" charset="0"/>
-                <a:ea typeface="Arial" pitchFamily="34" charset="-122"/>
-                <a:cs typeface="Arial" pitchFamily="34" charset="-120"/>
+                  <a:srgbClr val="66756D"/>
+                </a:solidFill>
+                <a:latin typeface="Inter" pitchFamily="34" charset="0"/>
+                <a:ea typeface="Inter" pitchFamily="34" charset="-122"/>
+                <a:cs typeface="Inter" pitchFamily="34" charset="-120"/>
               </a:rPr>
               <a:t>Frames content and breaks up sections</a:t>
             </a:r>
@@ -3435,7 +3435,7 @@
             </a:avLst>
           </a:prstGeom>
           <a:solidFill>
-            <a:srgbClr val="2F6B4F"/>
+            <a:srgbClr val="0D7043"/>
           </a:solidFill>
           <a:ln/>
         </p:spPr>
@@ -3469,11 +3469,11 @@
                 <a:solidFill>
                   <a:srgbClr val="FFFFFF"/>
                 </a:solidFill>
-                <a:latin typeface="Arial" pitchFamily="34" charset="0"/>
-                <a:ea typeface="Arial" pitchFamily="34" charset="-122"/>
-                <a:cs typeface="Arial" pitchFamily="34" charset="-120"/>
-              </a:rPr>
-              <a:t>Deep Forest Green</a:t>
+                <a:latin typeface="Inter" pitchFamily="34" charset="0"/>
+                <a:ea typeface="Inter" pitchFamily="34" charset="-122"/>
+                <a:cs typeface="Inter" pitchFamily="34" charset="-120"/>
+              </a:rPr>
+              <a:t>Orena Green</a:t>
             </a:r>
             <a:endParaRPr lang="en-US" sz="1300" dirty="0"/>
           </a:p>
@@ -3506,11 +3506,11 @@
             <a:r>
               <a:rPr lang="en-US" sz="950" i="1" dirty="0">
                 <a:solidFill>
-                  <a:srgbClr val="B9CBC0"/>
-                </a:solidFill>
-                <a:latin typeface="Arial" pitchFamily="34" charset="0"/>
-                <a:ea typeface="Arial" pitchFamily="34" charset="-122"/>
-                <a:cs typeface="Arial" pitchFamily="34" charset="-120"/>
+                  <a:srgbClr val="D7E9DF"/>
+                </a:solidFill>
+                <a:latin typeface="Inter" pitchFamily="34" charset="0"/>
+                <a:ea typeface="Inter" pitchFamily="34" charset="-122"/>
+                <a:cs typeface="Inter" pitchFamily="34" charset="-120"/>
               </a:rPr>
               <a:t>Headlines, typography and icons</a:t>
             </a:r>
@@ -3535,7 +3535,7 @@
             </a:avLst>
           </a:prstGeom>
           <a:solidFill>
-            <a:srgbClr val="C9A227"/>
+            <a:srgbClr val="B5D60C"/>
           </a:solidFill>
           <a:ln/>
         </p:spPr>
@@ -3569,11 +3569,11 @@
                 <a:solidFill>
                   <a:srgbClr val="FFFFFF"/>
                 </a:solidFill>
-                <a:latin typeface="Arial" pitchFamily="34" charset="0"/>
-                <a:ea typeface="Arial" pitchFamily="34" charset="-122"/>
-                <a:cs typeface="Arial" pitchFamily="34" charset="-120"/>
-              </a:rPr>
-              <a:t>Warm Gold</a:t>
+                <a:latin typeface="Inter" pitchFamily="34" charset="0"/>
+                <a:ea typeface="Inter" pitchFamily="34" charset="-122"/>
+                <a:cs typeface="Inter" pitchFamily="34" charset="-120"/>
+              </a:rPr>
+              <a:t>Lime Spark</a:t>
             </a:r>
             <a:endParaRPr lang="en-US" sz="1250" dirty="0"/>
           </a:p>
@@ -3609,11 +3609,11 @@
             <a:r>
               <a:rPr lang="en-US" sz="900" i="1" dirty="0">
                 <a:solidFill>
-                  <a:srgbClr val="FBEFC9"/>
-                </a:solidFill>
-                <a:latin typeface="Arial" pitchFamily="34" charset="0"/>
-                <a:ea typeface="Arial" pitchFamily="34" charset="-122"/>
-                <a:cs typeface="Arial" pitchFamily="34" charset="-120"/>
+                  <a:srgbClr val="18231E"/>
+                </a:solidFill>
+                <a:latin typeface="Inter" pitchFamily="34" charset="0"/>
+                <a:ea typeface="Inter" pitchFamily="34" charset="-122"/>
+                <a:cs typeface="Inter" pitchFamily="34" charset="-120"/>
               </a:rPr>
               <a:t>Buttons &amp; highlights</a:t>
             </a:r>
@@ -3648,11 +3648,11 @@
             <a:r>
               <a:rPr lang="en-US" sz="850" spc="120" kern="0" dirty="0">
                 <a:solidFill>
-                  <a:srgbClr val="B7BEB6"/>
-                </a:solidFill>
-                <a:latin typeface="Arial" pitchFamily="34" charset="0"/>
-                <a:ea typeface="Arial" pitchFamily="34" charset="-122"/>
-                <a:cs typeface="Arial" pitchFamily="34" charset="-120"/>
+                  <a:srgbClr val="66756D"/>
+                </a:solidFill>
+                <a:latin typeface="Inter" pitchFamily="34" charset="0"/>
+                <a:ea typeface="Inter" pitchFamily="34" charset="-122"/>
+                <a:cs typeface="Inter" pitchFamily="34" charset="-120"/>
               </a:rPr>
               <a:t>ORENA SOLUTIONS — BRAND PLAYBOOK</a:t>
             </a:r>
@@ -3674,7 +3674,7 @@
     <p:bg>
       <p:bgPr>
         <a:solidFill>
-          <a:srgbClr val="2F6B4F"/>
+          <a:srgbClr val="0D7043"/>
         </a:solidFill>
       </p:bgPr>
     </p:bg>
@@ -3719,11 +3719,11 @@
             <a:r>
               <a:rPr lang="en-US" sz="1100" b="1" spc="100" kern="0" dirty="0">
                 <a:solidFill>
-                  <a:srgbClr val="C9D6CE"/>
-                </a:solidFill>
-                <a:latin typeface="Arial" pitchFamily="34" charset="0"/>
-                <a:ea typeface="Arial" pitchFamily="34" charset="-122"/>
-                <a:cs typeface="Arial" pitchFamily="34" charset="-120"/>
+                  <a:srgbClr val="E8F4EE"/>
+                </a:solidFill>
+                <a:latin typeface="Inter" pitchFamily="34" charset="0"/>
+                <a:ea typeface="Inter" pitchFamily="34" charset="-122"/>
+                <a:cs typeface="Inter" pitchFamily="34" charset="-120"/>
               </a:rPr>
               <a:t>Orena Solutions</a:t>
             </a:r>
@@ -3758,11 +3758,11 @@
             <a:r>
               <a:rPr lang="en-US" sz="1100" spc="100" kern="0" dirty="0">
                 <a:solidFill>
-                  <a:srgbClr val="C9D6CE"/>
-                </a:solidFill>
-                <a:latin typeface="Arial" pitchFamily="34" charset="0"/>
-                <a:ea typeface="Arial" pitchFamily="34" charset="-122"/>
-                <a:cs typeface="Arial" pitchFamily="34" charset="-120"/>
+                  <a:srgbClr val="E8F4EE"/>
+                </a:solidFill>
+                <a:latin typeface="Inter" pitchFamily="34" charset="0"/>
+                <a:ea typeface="Inter" pitchFamily="34" charset="-122"/>
+                <a:cs typeface="Inter" pitchFamily="34" charset="-120"/>
               </a:rPr>
               <a:t>Brand Playbook</a:t>
             </a:r>
@@ -3799,9 +3799,9 @@
                 <a:solidFill>
                   <a:srgbClr val="FFFFFF"/>
                 </a:solidFill>
-                <a:latin typeface="Georgia" pitchFamily="34" charset="0"/>
-                <a:ea typeface="Georgia" pitchFamily="34" charset="-122"/>
-                <a:cs typeface="Georgia" pitchFamily="34" charset="-120"/>
+                <a:latin typeface="Poppins" pitchFamily="34" charset="0"/>
+                <a:ea typeface="Poppins" pitchFamily="34" charset="-122"/>
+                <a:cs typeface="Poppins" pitchFamily="34" charset="-120"/>
               </a:rPr>
               <a:t>Logo &amp; Symbol</a:t>
             </a:r>
@@ -3836,11 +3836,11 @@
             <a:r>
               <a:rPr lang="en-US" sz="1400" i="1" dirty="0">
                 <a:solidFill>
-                  <a:srgbClr val="A8C9C0"/>
-                </a:solidFill>
-                <a:latin typeface="Arial" pitchFamily="34" charset="0"/>
-                <a:ea typeface="Arial" pitchFamily="34" charset="-122"/>
-                <a:cs typeface="Arial" pitchFamily="34" charset="-120"/>
+                  <a:srgbClr val="48B855"/>
+                </a:solidFill>
+                <a:latin typeface="Inter" pitchFamily="34" charset="0"/>
+                <a:ea typeface="Inter" pitchFamily="34" charset="-122"/>
+                <a:cs typeface="Inter" pitchFamily="34" charset="-120"/>
               </a:rPr>
               <a:t>Variations, do's and don'ts.</a:t>
             </a:r>
@@ -3875,11 +3875,11 @@
             <a:r>
               <a:rPr lang="en-US" sz="850" spc="120" kern="0" dirty="0">
                 <a:solidFill>
-                  <a:srgbClr val="6E8577"/>
-                </a:solidFill>
-                <a:latin typeface="Arial" pitchFamily="34" charset="0"/>
-                <a:ea typeface="Arial" pitchFamily="34" charset="-122"/>
-                <a:cs typeface="Arial" pitchFamily="34" charset="-120"/>
+                  <a:srgbClr val="48B855"/>
+                </a:solidFill>
+                <a:latin typeface="Inter" pitchFamily="34" charset="0"/>
+                <a:ea typeface="Inter" pitchFamily="34" charset="-122"/>
+                <a:cs typeface="Inter" pitchFamily="34" charset="-120"/>
               </a:rPr>
               <a:t>ORENA SOLUTIONS — BRAND PLAYBOOK</a:t>
             </a:r>
@@ -3901,7 +3901,7 @@
     <p:bg>
       <p:bgPr>
         <a:solidFill>
-          <a:srgbClr val="FAFAF8"/>
+          <a:srgbClr val="FAFCF9"/>
         </a:solidFill>
       </p:bgPr>
     </p:bg>
@@ -3946,11 +3946,11 @@
             <a:r>
               <a:rPr lang="en-US" sz="1100" b="1" spc="100" kern="0" dirty="0">
                 <a:solidFill>
-                  <a:srgbClr val="6E7A70"/>
-                </a:solidFill>
-                <a:latin typeface="Arial" pitchFamily="34" charset="0"/>
-                <a:ea typeface="Arial" pitchFamily="34" charset="-122"/>
-                <a:cs typeface="Arial" pitchFamily="34" charset="-120"/>
+                  <a:srgbClr val="66756D"/>
+                </a:solidFill>
+                <a:latin typeface="Inter" pitchFamily="34" charset="0"/>
+                <a:ea typeface="Inter" pitchFamily="34" charset="-122"/>
+                <a:cs typeface="Inter" pitchFamily="34" charset="-120"/>
               </a:rPr>
               <a:t>Logo &amp; Symbol</a:t>
             </a:r>
@@ -3985,11 +3985,11 @@
             <a:r>
               <a:rPr lang="en-US" sz="1100" spc="100" kern="0" dirty="0">
                 <a:solidFill>
-                  <a:srgbClr val="6E7A70"/>
-                </a:solidFill>
-                <a:latin typeface="Arial" pitchFamily="34" charset="0"/>
-                <a:ea typeface="Arial" pitchFamily="34" charset="-122"/>
-                <a:cs typeface="Arial" pitchFamily="34" charset="-120"/>
+                  <a:srgbClr val="66756D"/>
+                </a:solidFill>
+                <a:latin typeface="Inter" pitchFamily="34" charset="0"/>
+                <a:ea typeface="Inter" pitchFamily="34" charset="-122"/>
+                <a:cs typeface="Inter" pitchFamily="34" charset="-120"/>
               </a:rPr>
               <a:t>Logo</a:t>
             </a:r>
@@ -4027,11 +4027,11 @@
             <a:r>
               <a:rPr lang="en-US" sz="1250" dirty="0">
                 <a:solidFill>
-                  <a:srgbClr val="333333"/>
-                </a:solidFill>
-                <a:latin typeface="Arial" pitchFamily="34" charset="0"/>
-                <a:ea typeface="Arial" pitchFamily="34" charset="-122"/>
-                <a:cs typeface="Arial" pitchFamily="34" charset="-120"/>
+                  <a:srgbClr val="18231E"/>
+                </a:solidFill>
+                <a:latin typeface="Inter" pitchFamily="34" charset="0"/>
+                <a:ea typeface="Inter" pitchFamily="34" charset="-122"/>
+                <a:cs typeface="Inter" pitchFamily="34" charset="-120"/>
               </a:rPr>
               <a:t>The primary visual of the Orena identity.</a:t>
             </a:r>
@@ -4069,11 +4069,11 @@
             <a:r>
               <a:rPr lang="en-US" sz="1250" dirty="0">
                 <a:solidFill>
-                  <a:srgbClr val="333333"/>
-                </a:solidFill>
-                <a:latin typeface="Arial" pitchFamily="34" charset="0"/>
-                <a:ea typeface="Arial" pitchFamily="34" charset="-122"/>
-                <a:cs typeface="Arial" pitchFamily="34" charset="-120"/>
+                  <a:srgbClr val="18231E"/>
+                </a:solidFill>
+                <a:latin typeface="Inter" pitchFamily="34" charset="0"/>
+                <a:ea typeface="Inter" pitchFamily="34" charset="-122"/>
+                <a:cs typeface="Inter" pitchFamily="34" charset="-120"/>
               </a:rPr>
               <a:t>Always use with adequate white space around the mark, as indicated by the guides.</a:t>
             </a:r>
@@ -4098,7 +4098,7 @@
             </a:avLst>
           </a:prstGeom>
           <a:solidFill>
-            <a:srgbClr val="2F6B4F"/>
+            <a:srgbClr val="0D7043"/>
           </a:solidFill>
           <a:ln/>
         </p:spPr>
@@ -4120,7 +4120,7 @@
           <a:noFill/>
           <a:ln w="9525">
             <a:solidFill>
-              <a:srgbClr val="3C7259"/>
+              <a:srgbClr val="00AF63"/>
             </a:solidFill>
             <a:prstDash val="dash"/>
           </a:ln>
@@ -4143,7 +4143,7 @@
           <a:noFill/>
           <a:ln w="9525">
             <a:solidFill>
-              <a:srgbClr val="3C7259"/>
+              <a:srgbClr val="00AF63"/>
             </a:solidFill>
             <a:prstDash val="dash"/>
           </a:ln>
@@ -4166,7 +4166,7 @@
           <a:noFill/>
           <a:ln w="9525">
             <a:solidFill>
-              <a:srgbClr val="3C7259"/>
+              <a:srgbClr val="00AF63"/>
             </a:solidFill>
             <a:prstDash val="dash"/>
           </a:ln>
@@ -4189,7 +4189,7 @@
           <a:noFill/>
           <a:ln w="9525">
             <a:solidFill>
-              <a:srgbClr val="3C7259"/>
+              <a:srgbClr val="00AF63"/>
             </a:solidFill>
             <a:prstDash val="dash"/>
           </a:ln>
@@ -4211,8 +4211,8 @@
         </p:blipFill>
         <p:spPr>
           <a:xfrm>
-            <a:off x="5394960" y="2880360"/>
-            <a:ext cx="3063240" cy="1673352"/>
+            <a:off x="5874040" y="2880360"/>
+            <a:ext cx="2105081" cy="1673352"/>
           </a:xfrm>
           <a:prstGeom prst="rect">
             <a:avLst/>
@@ -4246,11 +4246,11 @@
             <a:r>
               <a:rPr lang="en-US" sz="850" spc="120" kern="0" dirty="0">
                 <a:solidFill>
-                  <a:srgbClr val="B7BEB6"/>
-                </a:solidFill>
-                <a:latin typeface="Arial" pitchFamily="34" charset="0"/>
-                <a:ea typeface="Arial" pitchFamily="34" charset="-122"/>
-                <a:cs typeface="Arial" pitchFamily="34" charset="-120"/>
+                  <a:srgbClr val="66756D"/>
+                </a:solidFill>
+                <a:latin typeface="Inter" pitchFamily="34" charset="0"/>
+                <a:ea typeface="Inter" pitchFamily="34" charset="-122"/>
+                <a:cs typeface="Inter" pitchFamily="34" charset="-120"/>
               </a:rPr>
               <a:t>ORENA SOLUTIONS — BRAND PLAYBOOK</a:t>
             </a:r>
@@ -4272,7 +4272,7 @@
     <p:bg>
       <p:bgPr>
         <a:solidFill>
-          <a:srgbClr val="FAFAF8"/>
+          <a:srgbClr val="FAFCF9"/>
         </a:solidFill>
       </p:bgPr>
     </p:bg>
@@ -4317,11 +4317,11 @@
             <a:r>
               <a:rPr lang="en-US" sz="1100" b="1" spc="100" kern="0" dirty="0">
                 <a:solidFill>
-                  <a:srgbClr val="6E7A70"/>
-                </a:solidFill>
-                <a:latin typeface="Arial" pitchFamily="34" charset="0"/>
-                <a:ea typeface="Arial" pitchFamily="34" charset="-122"/>
-                <a:cs typeface="Arial" pitchFamily="34" charset="-120"/>
+                  <a:srgbClr val="66756D"/>
+                </a:solidFill>
+                <a:latin typeface="Inter" pitchFamily="34" charset="0"/>
+                <a:ea typeface="Inter" pitchFamily="34" charset="-122"/>
+                <a:cs typeface="Inter" pitchFamily="34" charset="-120"/>
               </a:rPr>
               <a:t>Logo &amp; Symbol</a:t>
             </a:r>
@@ -4356,11 +4356,11 @@
             <a:r>
               <a:rPr lang="en-US" sz="1100" spc="100" kern="0" dirty="0">
                 <a:solidFill>
-                  <a:srgbClr val="6E7A70"/>
-                </a:solidFill>
-                <a:latin typeface="Arial" pitchFamily="34" charset="0"/>
-                <a:ea typeface="Arial" pitchFamily="34" charset="-122"/>
-                <a:cs typeface="Arial" pitchFamily="34" charset="-120"/>
+                  <a:srgbClr val="66756D"/>
+                </a:solidFill>
+                <a:latin typeface="Inter" pitchFamily="34" charset="0"/>
+                <a:ea typeface="Inter" pitchFamily="34" charset="-122"/>
+                <a:cs typeface="Inter" pitchFamily="34" charset="-120"/>
               </a:rPr>
               <a:t>Symbol</a:t>
             </a:r>
@@ -4398,11 +4398,11 @@
             <a:r>
               <a:rPr lang="en-US" sz="1250" dirty="0">
                 <a:solidFill>
-                  <a:srgbClr val="333333"/>
-                </a:solidFill>
-                <a:latin typeface="Arial" pitchFamily="34" charset="0"/>
-                <a:ea typeface="Arial" pitchFamily="34" charset="-122"/>
-                <a:cs typeface="Arial" pitchFamily="34" charset="-120"/>
+                  <a:srgbClr val="18231E"/>
+                </a:solidFill>
+                <a:latin typeface="Inter" pitchFamily="34" charset="0"/>
+                <a:ea typeface="Inter" pitchFamily="34" charset="-122"/>
+                <a:cs typeface="Inter" pitchFamily="34" charset="-120"/>
               </a:rPr>
               <a:t>For compact use — avatars, favicons, or where space is limited.</a:t>
             </a:r>
@@ -4440,11 +4440,11 @@
             <a:r>
               <a:rPr lang="en-US" sz="1250" dirty="0">
                 <a:solidFill>
-                  <a:srgbClr val="333333"/>
-                </a:solidFill>
-                <a:latin typeface="Arial" pitchFamily="34" charset="0"/>
-                <a:ea typeface="Arial" pitchFamily="34" charset="-122"/>
-                <a:cs typeface="Arial" pitchFamily="34" charset="-120"/>
+                  <a:srgbClr val="18231E"/>
+                </a:solidFill>
+                <a:latin typeface="Inter" pitchFamily="34" charset="0"/>
+                <a:ea typeface="Inter" pitchFamily="34" charset="-122"/>
+                <a:cs typeface="Inter" pitchFamily="34" charset="-120"/>
               </a:rPr>
               <a:t>Provide sufficient white space. Always shown within an app-icon shape.</a:t>
             </a:r>
@@ -4469,7 +4469,7 @@
             </a:avLst>
           </a:prstGeom>
           <a:solidFill>
-            <a:srgbClr val="DDE3DC"/>
+            <a:srgbClr val="E8F4EE"/>
           </a:solidFill>
           <a:ln/>
         </p:spPr>
@@ -4491,7 +4491,7 @@
             </a:avLst>
           </a:prstGeom>
           <a:solidFill>
-            <a:srgbClr val="2F6B4F"/>
+            <a:srgbClr val="0D7043"/>
           </a:solidFill>
           <a:ln/>
         </p:spPr>
@@ -4512,8 +4512,8 @@
         </p:blipFill>
         <p:spPr>
           <a:xfrm>
-            <a:off x="7178040" y="2697480"/>
-            <a:ext cx="658368" cy="1133856"/>
+            <a:off x="7309030" y="2697480"/>
+            <a:ext cx="396389" cy="1133856"/>
           </a:xfrm>
           <a:prstGeom prst="rect">
             <a:avLst/>
@@ -4547,11 +4547,11 @@
             <a:r>
               <a:rPr lang="en-US" sz="850" spc="120" kern="0" dirty="0">
                 <a:solidFill>
-                  <a:srgbClr val="B7BEB6"/>
-                </a:solidFill>
-                <a:latin typeface="Arial" pitchFamily="34" charset="0"/>
-                <a:ea typeface="Arial" pitchFamily="34" charset="-122"/>
-                <a:cs typeface="Arial" pitchFamily="34" charset="-120"/>
+                  <a:srgbClr val="66756D"/>
+                </a:solidFill>
+                <a:latin typeface="Inter" pitchFamily="34" charset="0"/>
+                <a:ea typeface="Inter" pitchFamily="34" charset="-122"/>
+                <a:cs typeface="Inter" pitchFamily="34" charset="-120"/>
               </a:rPr>
               <a:t>ORENA SOLUTIONS — BRAND PLAYBOOK</a:t>
             </a:r>
@@ -4573,7 +4573,7 @@
     <p:bg>
       <p:bgPr>
         <a:solidFill>
-          <a:srgbClr val="FAFAF8"/>
+          <a:srgbClr val="FAFCF9"/>
         </a:solidFill>
       </p:bgPr>
     </p:bg>
@@ -4618,11 +4618,11 @@
             <a:r>
               <a:rPr lang="en-US" sz="1100" b="1" spc="100" kern="0" dirty="0">
                 <a:solidFill>
-                  <a:srgbClr val="6E7A70"/>
-                </a:solidFill>
-                <a:latin typeface="Arial" pitchFamily="34" charset="0"/>
-                <a:ea typeface="Arial" pitchFamily="34" charset="-122"/>
-                <a:cs typeface="Arial" pitchFamily="34" charset="-120"/>
+                  <a:srgbClr val="66756D"/>
+                </a:solidFill>
+                <a:latin typeface="Inter" pitchFamily="34" charset="0"/>
+                <a:ea typeface="Inter" pitchFamily="34" charset="-122"/>
+                <a:cs typeface="Inter" pitchFamily="34" charset="-120"/>
               </a:rPr>
               <a:t>Logo &amp; Symbol</a:t>
             </a:r>
@@ -4657,11 +4657,11 @@
             <a:r>
               <a:rPr lang="en-US" sz="1100" spc="100" kern="0" dirty="0">
                 <a:solidFill>
-                  <a:srgbClr val="6E7A70"/>
-                </a:solidFill>
-                <a:latin typeface="Arial" pitchFamily="34" charset="0"/>
-                <a:ea typeface="Arial" pitchFamily="34" charset="-122"/>
-                <a:cs typeface="Arial" pitchFamily="34" charset="-120"/>
+                  <a:srgbClr val="66756D"/>
+                </a:solidFill>
+                <a:latin typeface="Inter" pitchFamily="34" charset="0"/>
+                <a:ea typeface="Inter" pitchFamily="34" charset="-122"/>
+                <a:cs typeface="Inter" pitchFamily="34" charset="-120"/>
               </a:rPr>
               <a:t>General Guidelines</a:t>
             </a:r>
@@ -4699,11 +4699,11 @@
             <a:r>
               <a:rPr lang="en-US" sz="1200" dirty="0">
                 <a:solidFill>
-                  <a:srgbClr val="333333"/>
-                </a:solidFill>
-                <a:latin typeface="Arial" pitchFamily="34" charset="0"/>
-                <a:ea typeface="Arial" pitchFamily="34" charset="-122"/>
-                <a:cs typeface="Arial" pitchFamily="34" charset="-120"/>
+                  <a:srgbClr val="18231E"/>
+                </a:solidFill>
+                <a:latin typeface="Inter" pitchFamily="34" charset="0"/>
+                <a:ea typeface="Inter" pitchFamily="34" charset="-122"/>
+                <a:cs typeface="Inter" pitchFamily="34" charset="-120"/>
               </a:rPr>
               <a:t>Our logo is our identity and should be treated with respect. It can be used in Orena Green or white.</a:t>
             </a:r>
@@ -4728,11 +4728,11 @@
             <a:r>
               <a:rPr lang="en-US" sz="1200" dirty="0">
                 <a:solidFill>
-                  <a:srgbClr val="333333"/>
-                </a:solidFill>
-                <a:latin typeface="Arial" pitchFamily="34" charset="0"/>
-                <a:ea typeface="Arial" pitchFamily="34" charset="-122"/>
-                <a:cs typeface="Arial" pitchFamily="34" charset="-120"/>
+                  <a:srgbClr val="18231E"/>
+                </a:solidFill>
+                <a:latin typeface="Inter" pitchFamily="34" charset="0"/>
+                <a:ea typeface="Inter" pitchFamily="34" charset="-122"/>
+                <a:cs typeface="Inter" pitchFamily="34" charset="-120"/>
               </a:rPr>
               <a:t>If the background is light, use the full-color mark. If the background is dark, use the logo in white.</a:t>
             </a:r>
@@ -4767,11 +4767,11 @@
             <a:r>
               <a:rPr lang="en-US" sz="1250" b="1" dirty="0">
                 <a:solidFill>
-                  <a:srgbClr val="333333"/>
-                </a:solidFill>
-                <a:latin typeface="Arial" pitchFamily="34" charset="0"/>
-                <a:ea typeface="Arial" pitchFamily="34" charset="-122"/>
-                <a:cs typeface="Arial" pitchFamily="34" charset="-120"/>
+                  <a:srgbClr val="18231E"/>
+                </a:solidFill>
+                <a:latin typeface="Inter" pitchFamily="34" charset="0"/>
+                <a:ea typeface="Inter" pitchFamily="34" charset="-122"/>
+                <a:cs typeface="Inter" pitchFamily="34" charset="-120"/>
               </a:rPr>
               <a:t>The don'ts</a:t>
             </a:r>
@@ -4809,11 +4809,11 @@
             <a:r>
               <a:rPr lang="en-US" sz="1100" dirty="0">
                 <a:solidFill>
-                  <a:srgbClr val="8C9188"/>
-                </a:solidFill>
-                <a:latin typeface="Arial" pitchFamily="34" charset="0"/>
-                <a:ea typeface="Arial" pitchFamily="34" charset="-122"/>
-                <a:cs typeface="Arial" pitchFamily="34" charset="-120"/>
+                  <a:srgbClr val="66756D"/>
+                </a:solidFill>
+                <a:latin typeface="Inter" pitchFamily="34" charset="0"/>
+                <a:ea typeface="Inter" pitchFamily="34" charset="-122"/>
+                <a:cs typeface="Inter" pitchFamily="34" charset="-120"/>
               </a:rPr>
               <a:t>Don't recolor it. Don't add a gradient.</a:t>
             </a:r>
@@ -4829,11 +4829,11 @@
             <a:r>
               <a:rPr lang="en-US" sz="1100" dirty="0">
                 <a:solidFill>
-                  <a:srgbClr val="8C9188"/>
-                </a:solidFill>
-                <a:latin typeface="Arial" pitchFamily="34" charset="0"/>
-                <a:ea typeface="Arial" pitchFamily="34" charset="-122"/>
-                <a:cs typeface="Arial" pitchFamily="34" charset="-120"/>
+                  <a:srgbClr val="66756D"/>
+                </a:solidFill>
+                <a:latin typeface="Inter" pitchFamily="34" charset="0"/>
+                <a:ea typeface="Inter" pitchFamily="34" charset="-122"/>
+                <a:cs typeface="Inter" pitchFamily="34" charset="-120"/>
               </a:rPr>
               <a:t>Don't stretch it. Don't add a stroke.</a:t>
             </a:r>
@@ -4849,11 +4849,11 @@
             <a:r>
               <a:rPr lang="en-US" sz="1100" dirty="0">
                 <a:solidFill>
-                  <a:srgbClr val="8C9188"/>
-                </a:solidFill>
-                <a:latin typeface="Arial" pitchFamily="34" charset="0"/>
-                <a:ea typeface="Arial" pitchFamily="34" charset="-122"/>
-                <a:cs typeface="Arial" pitchFamily="34" charset="-120"/>
+                  <a:srgbClr val="66756D"/>
+                </a:solidFill>
+                <a:latin typeface="Inter" pitchFamily="34" charset="0"/>
+                <a:ea typeface="Inter" pitchFamily="34" charset="-122"/>
+                <a:cs typeface="Inter" pitchFamily="34" charset="-120"/>
               </a:rPr>
               <a:t>Don't place it on low-contrast backgrounds.</a:t>
             </a:r>
@@ -4878,7 +4878,7 @@
             </a:avLst>
           </a:prstGeom>
           <a:solidFill>
-            <a:srgbClr val="2F6B4F"/>
+            <a:srgbClr val="0D7043"/>
           </a:solidFill>
           <a:ln/>
         </p:spPr>
@@ -4899,8 +4899,8 @@
         </p:blipFill>
         <p:spPr>
           <a:xfrm>
-            <a:off x="4594860" y="1879092"/>
-            <a:ext cx="2011680" cy="768096"/>
+            <a:off x="5117566" y="1879092"/>
+            <a:ext cx="966267" cy="768096"/>
           </a:xfrm>
           <a:prstGeom prst="rect">
             <a:avLst/>
@@ -4924,7 +4924,7 @@
             </a:avLst>
           </a:prstGeom>
           <a:solidFill>
-            <a:srgbClr val="DDE3DC"/>
+            <a:srgbClr val="E8F4EE"/>
           </a:solidFill>
           <a:ln/>
         </p:spPr>
@@ -4945,8 +4945,8 @@
         </p:blipFill>
         <p:spPr>
           <a:xfrm>
-            <a:off x="8755380" y="1879092"/>
-            <a:ext cx="2011680" cy="768096"/>
+            <a:off x="9278086" y="1879092"/>
+            <a:ext cx="966267" cy="768096"/>
           </a:xfrm>
           <a:prstGeom prst="rect">
             <a:avLst/>
@@ -4974,7 +4974,7 @@
           </a:solidFill>
           <a:ln w="12700">
             <a:solidFill>
-              <a:srgbClr val="E4E1D9"/>
+              <a:srgbClr val="E8F4EE"/>
             </a:solidFill>
             <a:prstDash val="solid"/>
           </a:ln>
@@ -4996,8 +4996,8 @@
         </p:blipFill>
         <p:spPr>
           <a:xfrm>
-            <a:off x="4594860" y="4668012"/>
-            <a:ext cx="2011680" cy="768096"/>
+            <a:off x="5117566" y="4668012"/>
+            <a:ext cx="966267" cy="768096"/>
           </a:xfrm>
           <a:prstGeom prst="rect">
             <a:avLst/>
@@ -5021,7 +5021,7 @@
             </a:avLst>
           </a:prstGeom>
           <a:solidFill>
-            <a:srgbClr val="C9A227"/>
+            <a:srgbClr val="B5D60C"/>
           </a:solidFill>
           <a:ln/>
         </p:spPr>
@@ -5042,8 +5042,8 @@
         </p:blipFill>
         <p:spPr>
           <a:xfrm>
-            <a:off x="8755380" y="4668012"/>
-            <a:ext cx="2011680" cy="768096"/>
+            <a:off x="9278086" y="4668012"/>
+            <a:ext cx="966267" cy="768096"/>
           </a:xfrm>
           <a:prstGeom prst="rect">
             <a:avLst/>
@@ -5077,11 +5077,11 @@
             <a:r>
               <a:rPr lang="en-US" sz="850" spc="120" kern="0" dirty="0">
                 <a:solidFill>
-                  <a:srgbClr val="B7BEB6"/>
-                </a:solidFill>
-                <a:latin typeface="Arial" pitchFamily="34" charset="0"/>
-                <a:ea typeface="Arial" pitchFamily="34" charset="-122"/>
-                <a:cs typeface="Arial" pitchFamily="34" charset="-120"/>
+                  <a:srgbClr val="66756D"/>
+                </a:solidFill>
+                <a:latin typeface="Inter" pitchFamily="34" charset="0"/>
+                <a:ea typeface="Inter" pitchFamily="34" charset="-122"/>
+                <a:cs typeface="Inter" pitchFamily="34" charset="-120"/>
               </a:rPr>
               <a:t>ORENA SOLUTIONS — BRAND PLAYBOOK</a:t>
             </a:r>
@@ -5103,7 +5103,7 @@
     <p:bg>
       <p:bgPr>
         <a:solidFill>
-          <a:srgbClr val="2F6B4F"/>
+          <a:srgbClr val="0D7043"/>
         </a:solidFill>
       </p:bgPr>
     </p:bg>
@@ -5148,11 +5148,11 @@
             <a:r>
               <a:rPr lang="en-US" sz="1100" b="1" spc="100" kern="0" dirty="0">
                 <a:solidFill>
-                  <a:srgbClr val="C9D6CE"/>
-                </a:solidFill>
-                <a:latin typeface="Arial" pitchFamily="34" charset="0"/>
-                <a:ea typeface="Arial" pitchFamily="34" charset="-122"/>
-                <a:cs typeface="Arial" pitchFamily="34" charset="-120"/>
+                  <a:srgbClr val="E8F4EE"/>
+                </a:solidFill>
+                <a:latin typeface="Inter" pitchFamily="34" charset="0"/>
+                <a:ea typeface="Inter" pitchFamily="34" charset="-122"/>
+                <a:cs typeface="Inter" pitchFamily="34" charset="-120"/>
               </a:rPr>
               <a:t>Orena Solutions</a:t>
             </a:r>
@@ -5187,11 +5187,11 @@
             <a:r>
               <a:rPr lang="en-US" sz="1100" spc="100" kern="0" dirty="0">
                 <a:solidFill>
-                  <a:srgbClr val="C9D6CE"/>
-                </a:solidFill>
-                <a:latin typeface="Arial" pitchFamily="34" charset="0"/>
-                <a:ea typeface="Arial" pitchFamily="34" charset="-122"/>
-                <a:cs typeface="Arial" pitchFamily="34" charset="-120"/>
+                  <a:srgbClr val="E8F4EE"/>
+                </a:solidFill>
+                <a:latin typeface="Inter" pitchFamily="34" charset="0"/>
+                <a:ea typeface="Inter" pitchFamily="34" charset="-122"/>
+                <a:cs typeface="Inter" pitchFamily="34" charset="-120"/>
               </a:rPr>
               <a:t>Brand Playbook</a:t>
             </a:r>
@@ -5228,9 +5228,9 @@
                 <a:solidFill>
                   <a:srgbClr val="FFFFFF"/>
                 </a:solidFill>
-                <a:latin typeface="Georgia" pitchFamily="34" charset="0"/>
-                <a:ea typeface="Georgia" pitchFamily="34" charset="-122"/>
-                <a:cs typeface="Georgia" pitchFamily="34" charset="-120"/>
+                <a:latin typeface="Poppins" pitchFamily="34" charset="0"/>
+                <a:ea typeface="Poppins" pitchFamily="34" charset="-122"/>
+                <a:cs typeface="Poppins" pitchFamily="34" charset="-120"/>
               </a:rPr>
               <a:t>Typography</a:t>
             </a:r>
@@ -5265,11 +5265,11 @@
             <a:r>
               <a:rPr lang="en-US" sz="1400" i="1" dirty="0">
                 <a:solidFill>
-                  <a:srgbClr val="A8C9C0"/>
-                </a:solidFill>
-                <a:latin typeface="Arial" pitchFamily="34" charset="0"/>
-                <a:ea typeface="Arial" pitchFamily="34" charset="-122"/>
-                <a:cs typeface="Arial" pitchFamily="34" charset="-120"/>
+                  <a:srgbClr val="48B855"/>
+                </a:solidFill>
+                <a:latin typeface="Inter" pitchFamily="34" charset="0"/>
+                <a:ea typeface="Inter" pitchFamily="34" charset="-122"/>
+                <a:cs typeface="Inter" pitchFamily="34" charset="-120"/>
               </a:rPr>
               <a:t>The type system that makes our communication feel effortless.</a:t>
             </a:r>
@@ -5304,11 +5304,11 @@
             <a:r>
               <a:rPr lang="en-US" sz="850" spc="120" kern="0" dirty="0">
                 <a:solidFill>
-                  <a:srgbClr val="6E8577"/>
-                </a:solidFill>
-                <a:latin typeface="Arial" pitchFamily="34" charset="0"/>
-                <a:ea typeface="Arial" pitchFamily="34" charset="-122"/>
-                <a:cs typeface="Arial" pitchFamily="34" charset="-120"/>
+                  <a:srgbClr val="48B855"/>
+                </a:solidFill>
+                <a:latin typeface="Inter" pitchFamily="34" charset="0"/>
+                <a:ea typeface="Inter" pitchFamily="34" charset="-122"/>
+                <a:cs typeface="Inter" pitchFamily="34" charset="-120"/>
               </a:rPr>
               <a:t>ORENA SOLUTIONS — BRAND PLAYBOOK</a:t>
             </a:r>
@@ -5330,7 +5330,7 @@
     <p:bg>
       <p:bgPr>
         <a:solidFill>
-          <a:srgbClr val="FAFAF8"/>
+          <a:srgbClr val="FAFCF9"/>
         </a:solidFill>
       </p:bgPr>
     </p:bg>
@@ -5375,11 +5375,11 @@
             <a:r>
               <a:rPr lang="en-US" sz="1100" b="1" spc="100" kern="0" dirty="0">
                 <a:solidFill>
-                  <a:srgbClr val="6E7A70"/>
-                </a:solidFill>
-                <a:latin typeface="Arial" pitchFamily="34" charset="0"/>
-                <a:ea typeface="Arial" pitchFamily="34" charset="-122"/>
-                <a:cs typeface="Arial" pitchFamily="34" charset="-120"/>
+                  <a:srgbClr val="66756D"/>
+                </a:solidFill>
+                <a:latin typeface="Inter" pitchFamily="34" charset="0"/>
+                <a:ea typeface="Inter" pitchFamily="34" charset="-122"/>
+                <a:cs typeface="Inter" pitchFamily="34" charset="-120"/>
               </a:rPr>
               <a:t>Typography</a:t>
             </a:r>
@@ -5414,11 +5414,11 @@
             <a:r>
               <a:rPr lang="en-US" sz="1100" spc="100" kern="0" dirty="0">
                 <a:solidFill>
-                  <a:srgbClr val="6E7A70"/>
-                </a:solidFill>
-                <a:latin typeface="Arial" pitchFamily="34" charset="0"/>
-                <a:ea typeface="Arial" pitchFamily="34" charset="-122"/>
-                <a:cs typeface="Arial" pitchFamily="34" charset="-120"/>
+                  <a:srgbClr val="66756D"/>
+                </a:solidFill>
+                <a:latin typeface="Inter" pitchFamily="34" charset="0"/>
+                <a:ea typeface="Inter" pitchFamily="34" charset="-122"/>
+                <a:cs typeface="Inter" pitchFamily="34" charset="-120"/>
               </a:rPr>
               <a:t>Typefaces</a:t>
             </a:r>
@@ -5456,13 +5456,13 @@
             <a:r>
               <a:rPr lang="en-US" sz="1200" dirty="0">
                 <a:solidFill>
-                  <a:srgbClr val="333333"/>
-                </a:solidFill>
-                <a:latin typeface="Arial" pitchFamily="34" charset="0"/>
-                <a:ea typeface="Arial" pitchFamily="34" charset="-122"/>
-                <a:cs typeface="Arial" pitchFamily="34" charset="-120"/>
-              </a:rPr>
-              <a:t>Our primary typeface is Georgia, a serif that feels established and trustworthy.</a:t>
+                  <a:srgbClr val="18231E"/>
+                </a:solidFill>
+                <a:latin typeface="Inter" pitchFamily="34" charset="0"/>
+                <a:ea typeface="Inter" pitchFamily="34" charset="-122"/>
+                <a:cs typeface="Inter" pitchFamily="34" charset="-120"/>
+              </a:rPr>
+              <a:t>Our primary typeface is Poppins, a geometric sans that feels modern and confident.</a:t>
             </a:r>
             <a:endParaRPr lang="en-US" sz="1200" dirty="0"/>
           </a:p>
@@ -5498,13 +5498,13 @@
             <a:r>
               <a:rPr lang="en-US" sz="1200" dirty="0">
                 <a:solidFill>
-                  <a:srgbClr val="333333"/>
-                </a:solidFill>
-                <a:latin typeface="Arial" pitchFamily="34" charset="0"/>
-                <a:ea typeface="Arial" pitchFamily="34" charset="-122"/>
-                <a:cs typeface="Arial" pitchFamily="34" charset="-120"/>
-              </a:rPr>
-              <a:t>Arial (or Calibri) is our secondary typeface, used for body copy, labels and UI text.</a:t>
+                  <a:srgbClr val="18231E"/>
+                </a:solidFill>
+                <a:latin typeface="Inter" pitchFamily="34" charset="0"/>
+                <a:ea typeface="Inter" pitchFamily="34" charset="-122"/>
+                <a:cs typeface="Inter" pitchFamily="34" charset="-120"/>
+              </a:rPr>
+              <a:t>Inter is our secondary typeface, used for body copy, labels and UI text.</a:t>
             </a:r>
             <a:endParaRPr lang="en-US" sz="1200" dirty="0"/>
           </a:p>
@@ -5531,7 +5531,7 @@
           </a:solidFill>
           <a:ln w="12700">
             <a:solidFill>
-              <a:srgbClr val="E4E1D9"/>
+              <a:srgbClr val="E8F4EE"/>
             </a:solidFill>
             <a:prstDash val="solid"/>
           </a:ln>
@@ -5564,13 +5564,13 @@
             <a:r>
               <a:rPr lang="en-US" sz="5200" b="1" dirty="0">
                 <a:solidFill>
-                  <a:srgbClr val="2F6B4F"/>
-                </a:solidFill>
-                <a:latin typeface="Georgia" pitchFamily="34" charset="0"/>
-                <a:ea typeface="Georgia" pitchFamily="34" charset="-122"/>
-                <a:cs typeface="Georgia" pitchFamily="34" charset="-120"/>
-              </a:rPr>
-              <a:t>Georgia</a:t>
+                  <a:srgbClr val="0D7043"/>
+                </a:solidFill>
+                <a:latin typeface="Poppins" pitchFamily="34" charset="0"/>
+                <a:ea typeface="Poppins" pitchFamily="34" charset="-122"/>
+                <a:cs typeface="Poppins" pitchFamily="34" charset="-120"/>
+              </a:rPr>
+              <a:t>Poppins</a:t>
             </a:r>
             <a:endParaRPr lang="en-US" sz="5200" dirty="0"/>
           </a:p>
@@ -5603,13 +5603,13 @@
             <a:r>
               <a:rPr lang="en-US" sz="1050" i="1" dirty="0">
                 <a:solidFill>
-                  <a:srgbClr val="8C9188"/>
-                </a:solidFill>
-                <a:latin typeface="Arial" pitchFamily="34" charset="0"/>
-                <a:ea typeface="Arial" pitchFamily="34" charset="-122"/>
-                <a:cs typeface="Arial" pitchFamily="34" charset="-120"/>
-              </a:rPr>
-              <a:t>Document titles &amp; section headers — Bold, Deep Forest Green</a:t>
+                  <a:srgbClr val="66756D"/>
+                </a:solidFill>
+                <a:latin typeface="Inter" pitchFamily="34" charset="0"/>
+                <a:ea typeface="Inter" pitchFamily="34" charset="-122"/>
+                <a:cs typeface="Inter" pitchFamily="34" charset="-120"/>
+              </a:rPr>
+              <a:t>Document titles &amp; section headers — Bold / Semi Bold, Orena Green</a:t>
             </a:r>
             <a:endParaRPr lang="en-US" sz="1050" dirty="0"/>
           </a:p>
@@ -5642,11 +5642,11 @@
             <a:r>
               <a:rPr lang="en-US" sz="2200" dirty="0">
                 <a:solidFill>
-                  <a:srgbClr val="333333"/>
-                </a:solidFill>
-                <a:latin typeface="Georgia" pitchFamily="34" charset="0"/>
-                <a:ea typeface="Georgia" pitchFamily="34" charset="-122"/>
-                <a:cs typeface="Georgia" pitchFamily="34" charset="-120"/>
+                  <a:srgbClr val="18231E"/>
+                </a:solidFill>
+                <a:latin typeface="Poppins" pitchFamily="34" charset="0"/>
+                <a:ea typeface="Poppins" pitchFamily="34" charset="-122"/>
+                <a:cs typeface="Poppins" pitchFamily="34" charset="-120"/>
               </a:rPr>
               <a:t>Crafting Preferred Engineers</a:t>
             </a:r>
@@ -5675,7 +5675,7 @@
           </a:solidFill>
           <a:ln w="12700">
             <a:solidFill>
-              <a:srgbClr val="E4E1D9"/>
+              <a:srgbClr val="E8F4EE"/>
             </a:solidFill>
             <a:prstDash val="solid"/>
           </a:ln>
@@ -5708,13 +5708,13 @@
             <a:r>
               <a:rPr lang="en-US" sz="5000" b="1" dirty="0">
                 <a:solidFill>
-                  <a:srgbClr val="2F6B4F"/>
-                </a:solidFill>
-                <a:latin typeface="Arial" pitchFamily="34" charset="0"/>
-                <a:ea typeface="Arial" pitchFamily="34" charset="-122"/>
-                <a:cs typeface="Arial" pitchFamily="34" charset="-120"/>
-              </a:rPr>
-              <a:t>Arial</a:t>
+                  <a:srgbClr val="0D7043"/>
+                </a:solidFill>
+                <a:latin typeface="Inter" pitchFamily="34" charset="0"/>
+                <a:ea typeface="Inter" pitchFamily="34" charset="-122"/>
+                <a:cs typeface="Inter" pitchFamily="34" charset="-120"/>
+              </a:rPr>
+              <a:t>Inter</a:t>
             </a:r>
             <a:endParaRPr lang="en-US" sz="5000" dirty="0"/>
           </a:p>
@@ -5747,13 +5747,13 @@
             <a:r>
               <a:rPr lang="en-US" sz="1050" i="1" dirty="0">
                 <a:solidFill>
-                  <a:srgbClr val="8C9188"/>
-                </a:solidFill>
-                <a:latin typeface="Arial" pitchFamily="34" charset="0"/>
-                <a:ea typeface="Arial" pitchFamily="34" charset="-122"/>
-                <a:cs typeface="Arial" pitchFamily="34" charset="-120"/>
-              </a:rPr>
-              <a:t>Body text &amp; captions — Regular / Italic, Charcoal / Muted Grey</a:t>
+                  <a:srgbClr val="66756D"/>
+                </a:solidFill>
+                <a:latin typeface="Inter" pitchFamily="34" charset="0"/>
+                <a:ea typeface="Inter" pitchFamily="34" charset="-122"/>
+                <a:cs typeface="Inter" pitchFamily="34" charset="-120"/>
+              </a:rPr>
+              <a:t>Body text &amp; captions — Regular, Charcoal / Muted Green Grey</a:t>
             </a:r>
             <a:endParaRPr lang="en-US" sz="1050" dirty="0"/>
           </a:p>
@@ -5786,11 +5786,11 @@
             <a:r>
               <a:rPr lang="en-US" sz="1400" dirty="0">
                 <a:solidFill>
-                  <a:srgbClr val="333333"/>
-                </a:solidFill>
-                <a:latin typeface="Arial" pitchFamily="34" charset="0"/>
-                <a:ea typeface="Arial" pitchFamily="34" charset="-122"/>
-                <a:cs typeface="Arial" pitchFamily="34" charset="-120"/>
+                  <a:srgbClr val="18231E"/>
+                </a:solidFill>
+                <a:latin typeface="Inter" pitchFamily="34" charset="0"/>
+                <a:ea typeface="Inter" pitchFamily="34" charset="-122"/>
+                <a:cs typeface="Inter" pitchFamily="34" charset="-120"/>
               </a:rPr>
               <a:t>Engineering excellence. Building a better tomorrow.</a:t>
             </a:r>
@@ -5825,11 +5825,11 @@
             <a:r>
               <a:rPr lang="en-US" sz="1050" i="1" dirty="0">
                 <a:solidFill>
-                  <a:srgbClr val="8C9188"/>
-                </a:solidFill>
-                <a:latin typeface="Arial" pitchFamily="34" charset="0"/>
-                <a:ea typeface="Arial" pitchFamily="34" charset="-122"/>
-                <a:cs typeface="Arial" pitchFamily="34" charset="-120"/>
+                  <a:srgbClr val="66756D"/>
+                </a:solidFill>
+                <a:latin typeface="Inter" pitchFamily="34" charset="0"/>
+                <a:ea typeface="Inter" pitchFamily="34" charset="-122"/>
+                <a:cs typeface="Inter" pitchFamily="34" charset="-120"/>
               </a:rPr>
               <a:t>Captions &amp; labels</a:t>
             </a:r>
@@ -5864,11 +5864,11 @@
             <a:r>
               <a:rPr lang="en-US" sz="850" spc="120" kern="0" dirty="0">
                 <a:solidFill>
-                  <a:srgbClr val="B7BEB6"/>
-                </a:solidFill>
-                <a:latin typeface="Arial" pitchFamily="34" charset="0"/>
-                <a:ea typeface="Arial" pitchFamily="34" charset="-122"/>
-                <a:cs typeface="Arial" pitchFamily="34" charset="-120"/>
+                  <a:srgbClr val="66756D"/>
+                </a:solidFill>
+                <a:latin typeface="Inter" pitchFamily="34" charset="0"/>
+                <a:ea typeface="Inter" pitchFamily="34" charset="-122"/>
+                <a:cs typeface="Inter" pitchFamily="34" charset="-120"/>
               </a:rPr>
               <a:t>ORENA SOLUTIONS — BRAND PLAYBOOK</a:t>
             </a:r>
@@ -5890,7 +5890,7 @@
     <p:bg>
       <p:bgPr>
         <a:solidFill>
-          <a:srgbClr val="FAFAF8"/>
+          <a:srgbClr val="FAFCF9"/>
         </a:solidFill>
       </p:bgPr>
     </p:bg>
@@ -5935,11 +5935,11 @@
             <a:r>
               <a:rPr lang="en-US" sz="1100" b="1" spc="100" kern="0" dirty="0">
                 <a:solidFill>
-                  <a:srgbClr val="6E7A70"/>
-                </a:solidFill>
-                <a:latin typeface="Arial" pitchFamily="34" charset="0"/>
-                <a:ea typeface="Arial" pitchFamily="34" charset="-122"/>
-                <a:cs typeface="Arial" pitchFamily="34" charset="-120"/>
+                  <a:srgbClr val="66756D"/>
+                </a:solidFill>
+                <a:latin typeface="Inter" pitchFamily="34" charset="0"/>
+                <a:ea typeface="Inter" pitchFamily="34" charset="-122"/>
+                <a:cs typeface="Inter" pitchFamily="34" charset="-120"/>
               </a:rPr>
               <a:t>Typography</a:t>
             </a:r>
@@ -5974,11 +5974,11 @@
             <a:r>
               <a:rPr lang="en-US" sz="1100" spc="100" kern="0" dirty="0">
                 <a:solidFill>
-                  <a:srgbClr val="6E7A70"/>
-                </a:solidFill>
-                <a:latin typeface="Arial" pitchFamily="34" charset="0"/>
-                <a:ea typeface="Arial" pitchFamily="34" charset="-122"/>
-                <a:cs typeface="Arial" pitchFamily="34" charset="-120"/>
+                  <a:srgbClr val="66756D"/>
+                </a:solidFill>
+                <a:latin typeface="Inter" pitchFamily="34" charset="0"/>
+                <a:ea typeface="Inter" pitchFamily="34" charset="-122"/>
+                <a:cs typeface="Inter" pitchFamily="34" charset="-120"/>
               </a:rPr>
               <a:t>Hierarchy</a:t>
             </a:r>
@@ -6016,11 +6016,11 @@
             <a:r>
               <a:rPr lang="en-US" sz="1200" dirty="0">
                 <a:solidFill>
-                  <a:srgbClr val="333333"/>
-                </a:solidFill>
-                <a:latin typeface="Arial" pitchFamily="34" charset="0"/>
-                <a:ea typeface="Arial" pitchFamily="34" charset="-122"/>
-                <a:cs typeface="Arial" pitchFamily="34" charset="-120"/>
+                  <a:srgbClr val="18231E"/>
+                </a:solidFill>
+                <a:latin typeface="Inter" pitchFamily="34" charset="0"/>
+                <a:ea typeface="Inter" pitchFamily="34" charset="-122"/>
+                <a:cs typeface="Inter" pitchFamily="34" charset="-120"/>
               </a:rPr>
               <a:t>Whenever we write and design with copy, please follow these hierarchy principles.</a:t>
             </a:r>
@@ -6055,11 +6055,11 @@
             <a:r>
               <a:rPr lang="en-US" sz="1050" dirty="0">
                 <a:solidFill>
-                  <a:srgbClr val="8C9188"/>
-                </a:solidFill>
-                <a:latin typeface="Arial" pitchFamily="34" charset="0"/>
-                <a:ea typeface="Arial" pitchFamily="34" charset="-122"/>
-                <a:cs typeface="Arial" pitchFamily="34" charset="-120"/>
+                  <a:srgbClr val="66756D"/>
+                </a:solidFill>
+                <a:latin typeface="Inter" pitchFamily="34" charset="0"/>
+                <a:ea typeface="Inter" pitchFamily="34" charset="-122"/>
+                <a:cs typeface="Inter" pitchFamily="34" charset="-120"/>
               </a:rPr>
               <a:t>Document Titles</a:t>
             </a:r>
@@ -6097,13 +6097,13 @@
             <a:r>
               <a:rPr lang="en-US" sz="900" dirty="0">
                 <a:solidFill>
-                  <a:srgbClr val="8C9188"/>
-                </a:solidFill>
-                <a:latin typeface="Arial" pitchFamily="34" charset="0"/>
-                <a:ea typeface="Arial" pitchFamily="34" charset="-122"/>
-                <a:cs typeface="Arial" pitchFamily="34" charset="-120"/>
-              </a:rPr>
-              <a:t>40pt Bold · Georgia · Deep Forest Green</a:t>
+                  <a:srgbClr val="66756D"/>
+                </a:solidFill>
+                <a:latin typeface="Inter" pitchFamily="34" charset="0"/>
+                <a:ea typeface="Inter" pitchFamily="34" charset="-122"/>
+                <a:cs typeface="Inter" pitchFamily="34" charset="-120"/>
+              </a:rPr>
+              <a:t>40pt Bold · Poppins · Orena Green</a:t>
             </a:r>
             <a:endParaRPr lang="en-US" sz="900" dirty="0"/>
           </a:p>
@@ -6139,11 +6139,11 @@
             <a:r>
               <a:rPr lang="en-US" sz="3000" b="1" dirty="0">
                 <a:solidFill>
-                  <a:srgbClr val="2F6B4F"/>
-                </a:solidFill>
-                <a:latin typeface="Georgia" pitchFamily="34" charset="0"/>
-                <a:ea typeface="Georgia" pitchFamily="34" charset="-122"/>
-                <a:cs typeface="Georgia" pitchFamily="34" charset="-120"/>
+                  <a:srgbClr val="0D7043"/>
+                </a:solidFill>
+                <a:latin typeface="Poppins" pitchFamily="34" charset="0"/>
+                <a:ea typeface="Poppins" pitchFamily="34" charset="-122"/>
+                <a:cs typeface="Poppins" pitchFamily="34" charset="-120"/>
               </a:rPr>
               <a:t>Crafting Preferred Engineers</a:t>
             </a:r>
@@ -6168,7 +6168,7 @@
           <a:noFill/>
           <a:ln w="12700">
             <a:solidFill>
-              <a:srgbClr val="E4E1D9"/>
+              <a:srgbClr val="E8F4EE"/>
             </a:solidFill>
             <a:prstDash val="solid"/>
           </a:ln>
@@ -6201,11 +6201,11 @@
             <a:r>
               <a:rPr lang="en-US" sz="1050" dirty="0">
                 <a:solidFill>
-                  <a:srgbClr val="8C9188"/>
-                </a:solidFill>
-                <a:latin typeface="Arial" pitchFamily="34" charset="0"/>
-                <a:ea typeface="Arial" pitchFamily="34" charset="-122"/>
-                <a:cs typeface="Arial" pitchFamily="34" charset="-120"/>
+                  <a:srgbClr val="66756D"/>
+                </a:solidFill>
+                <a:latin typeface="Inter" pitchFamily="34" charset="0"/>
+                <a:ea typeface="Inter" pitchFamily="34" charset="-122"/>
+                <a:cs typeface="Inter" pitchFamily="34" charset="-120"/>
               </a:rPr>
               <a:t>Section Headers</a:t>
             </a:r>
@@ -6243,13 +6243,13 @@
             <a:r>
               <a:rPr lang="en-US" sz="900" dirty="0">
                 <a:solidFill>
-                  <a:srgbClr val="8C9188"/>
-                </a:solidFill>
-                <a:latin typeface="Arial" pitchFamily="34" charset="0"/>
-                <a:ea typeface="Arial" pitchFamily="34" charset="-122"/>
-                <a:cs typeface="Arial" pitchFamily="34" charset="-120"/>
-              </a:rPr>
-              <a:t>24pt Bold · Georgia · Deep Forest Green</a:t>
+                  <a:srgbClr val="66756D"/>
+                </a:solidFill>
+                <a:latin typeface="Inter" pitchFamily="34" charset="0"/>
+                <a:ea typeface="Inter" pitchFamily="34" charset="-122"/>
+                <a:cs typeface="Inter" pitchFamily="34" charset="-120"/>
+              </a:rPr>
+              <a:t>24pt Semi Bold · Poppins · Orena Green</a:t>
             </a:r>
             <a:endParaRPr lang="en-US" sz="900" dirty="0"/>
           </a:p>
@@ -6285,11 +6285,11 @@
             <a:r>
               <a:rPr lang="en-US" sz="2000" b="1" dirty="0">
                 <a:solidFill>
-                  <a:srgbClr val="2F6B4F"/>
-                </a:solidFill>
-                <a:latin typeface="Georgia" pitchFamily="34" charset="0"/>
-                <a:ea typeface="Georgia" pitchFamily="34" charset="-122"/>
-                <a:cs typeface="Georgia" pitchFamily="34" charset="-120"/>
+                  <a:srgbClr val="0D7043"/>
+                </a:solidFill>
+                <a:latin typeface="Poppins" pitchFamily="34" charset="0"/>
+                <a:ea typeface="Poppins" pitchFamily="34" charset="-122"/>
+                <a:cs typeface="Poppins" pitchFamily="34" charset="-120"/>
               </a:rPr>
               <a:t>Purpose &amp; Values</a:t>
             </a:r>
@@ -6314,7 +6314,7 @@
           <a:noFill/>
           <a:ln w="12700">
             <a:solidFill>
-              <a:srgbClr val="E4E1D9"/>
+              <a:srgbClr val="E8F4EE"/>
             </a:solidFill>
             <a:prstDash val="solid"/>
           </a:ln>
@@ -6347,11 +6347,11 @@
             <a:r>
               <a:rPr lang="en-US" sz="1050" dirty="0">
                 <a:solidFill>
-                  <a:srgbClr val="8C9188"/>
-                </a:solidFill>
-                <a:latin typeface="Arial" pitchFamily="34" charset="0"/>
-                <a:ea typeface="Arial" pitchFamily="34" charset="-122"/>
-                <a:cs typeface="Arial" pitchFamily="34" charset="-120"/>
+                  <a:srgbClr val="66756D"/>
+                </a:solidFill>
+                <a:latin typeface="Inter" pitchFamily="34" charset="0"/>
+                <a:ea typeface="Inter" pitchFamily="34" charset="-122"/>
+                <a:cs typeface="Inter" pitchFamily="34" charset="-120"/>
               </a:rPr>
               <a:t>Body Text</a:t>
             </a:r>
@@ -6389,13 +6389,13 @@
             <a:r>
               <a:rPr lang="en-US" sz="900" dirty="0">
                 <a:solidFill>
-                  <a:srgbClr val="8C9188"/>
-                </a:solidFill>
-                <a:latin typeface="Arial" pitchFamily="34" charset="0"/>
-                <a:ea typeface="Arial" pitchFamily="34" charset="-122"/>
-                <a:cs typeface="Arial" pitchFamily="34" charset="-120"/>
-              </a:rPr>
-              <a:t>16pt Regular · Arial/Calibri · Charcoal</a:t>
+                  <a:srgbClr val="66756D"/>
+                </a:solidFill>
+                <a:latin typeface="Inter" pitchFamily="34" charset="0"/>
+                <a:ea typeface="Inter" pitchFamily="34" charset="-122"/>
+                <a:cs typeface="Inter" pitchFamily="34" charset="-120"/>
+              </a:rPr>
+              <a:t>16pt Regular · Inter · Charcoal</a:t>
             </a:r>
             <a:endParaRPr lang="en-US" sz="900" dirty="0"/>
           </a:p>
@@ -6431,11 +6431,11 @@
             <a:r>
               <a:rPr lang="en-US" sz="1300" dirty="0">
                 <a:solidFill>
-                  <a:srgbClr val="333333"/>
-                </a:solidFill>
-                <a:latin typeface="Arial" pitchFamily="34" charset="0"/>
-                <a:ea typeface="Arial" pitchFamily="34" charset="-122"/>
-                <a:cs typeface="Arial" pitchFamily="34" charset="-120"/>
+                  <a:srgbClr val="18231E"/>
+                </a:solidFill>
+                <a:latin typeface="Inter" pitchFamily="34" charset="0"/>
+                <a:ea typeface="Inter" pitchFamily="34" charset="-122"/>
+                <a:cs typeface="Inter" pitchFamily="34" charset="-120"/>
               </a:rPr>
               <a:t>We engineer solutions that create lasting value for people and organizations alike.</a:t>
             </a:r>
@@ -6460,7 +6460,7 @@
           <a:noFill/>
           <a:ln w="12700">
             <a:solidFill>
-              <a:srgbClr val="E4E1D9"/>
+              <a:srgbClr val="E8F4EE"/>
             </a:solidFill>
             <a:prstDash val="solid"/>
           </a:ln>
@@ -6493,11 +6493,11 @@
             <a:r>
               <a:rPr lang="en-US" sz="1050" dirty="0">
                 <a:solidFill>
-                  <a:srgbClr val="8C9188"/>
-                </a:solidFill>
-                <a:latin typeface="Arial" pitchFamily="34" charset="0"/>
-                <a:ea typeface="Arial" pitchFamily="34" charset="-122"/>
-                <a:cs typeface="Arial" pitchFamily="34" charset="-120"/>
+                  <a:srgbClr val="66756D"/>
+                </a:solidFill>
+                <a:latin typeface="Inter" pitchFamily="34" charset="0"/>
+                <a:ea typeface="Inter" pitchFamily="34" charset="-122"/>
+                <a:cs typeface="Inter" pitchFamily="34" charset="-120"/>
               </a:rPr>
               <a:t>Captions &amp; Labels</a:t>
             </a:r>
@@ -6535,13 +6535,13 @@
             <a:r>
               <a:rPr lang="en-US" sz="900" dirty="0">
                 <a:solidFill>
-                  <a:srgbClr val="8C9188"/>
-                </a:solidFill>
-                <a:latin typeface="Arial" pitchFamily="34" charset="0"/>
-                <a:ea typeface="Arial" pitchFamily="34" charset="-122"/>
-                <a:cs typeface="Arial" pitchFamily="34" charset="-120"/>
-              </a:rPr>
-              <a:t>11pt Italic · Arial/Calibri · Muted Grey</a:t>
+                  <a:srgbClr val="66756D"/>
+                </a:solidFill>
+                <a:latin typeface="Inter" pitchFamily="34" charset="0"/>
+                <a:ea typeface="Inter" pitchFamily="34" charset="-122"/>
+                <a:cs typeface="Inter" pitchFamily="34" charset="-120"/>
+              </a:rPr>
+              <a:t>12pt Regular · Inter · Muted Green Grey</a:t>
             </a:r>
             <a:endParaRPr lang="en-US" sz="900" dirty="0"/>
           </a:p>
@@ -6575,13 +6575,13 @@
               <a:buNone/>
             </a:pPr>
             <a:r>
-              <a:rPr lang="en-US" sz="1050" i="1" dirty="0">
-                <a:solidFill>
-                  <a:srgbClr val="8C9188"/>
-                </a:solidFill>
-                <a:latin typeface="Arial" pitchFamily="34" charset="0"/>
-                <a:ea typeface="Arial" pitchFamily="34" charset="-122"/>
-                <a:cs typeface="Arial" pitchFamily="34" charset="-120"/>
+              <a:rPr lang="en-US" sz="1200" dirty="0">
+                <a:solidFill>
+                  <a:srgbClr val="66756D"/>
+                </a:solidFill>
+                <a:latin typeface="Inter" pitchFamily="34" charset="0"/>
+                <a:ea typeface="Inter" pitchFamily="34" charset="-122"/>
+                <a:cs typeface="Inter" pitchFamily="34" charset="-120"/>
               </a:rPr>
               <a:t>Engineering excellence, building a better tomorrow.</a:t>
             </a:r>
@@ -6616,11 +6616,11 @@
             <a:r>
               <a:rPr lang="en-US" sz="850" spc="120" kern="0" dirty="0">
                 <a:solidFill>
-                  <a:srgbClr val="B7BEB6"/>
-                </a:solidFill>
-                <a:latin typeface="Arial" pitchFamily="34" charset="0"/>
-                <a:ea typeface="Arial" pitchFamily="34" charset="-122"/>
-                <a:cs typeface="Arial" pitchFamily="34" charset="-120"/>
+                  <a:srgbClr val="66756D"/>
+                </a:solidFill>
+                <a:latin typeface="Inter" pitchFamily="34" charset="0"/>
+                <a:ea typeface="Inter" pitchFamily="34" charset="-122"/>
+                <a:cs typeface="Inter" pitchFamily="34" charset="-120"/>
               </a:rPr>
               <a:t>ORENA SOLUTIONS — BRAND PLAYBOOK</a:t>
             </a:r>
@@ -6642,7 +6642,7 @@
     <p:bg>
       <p:bgPr>
         <a:solidFill>
-          <a:srgbClr val="2F6B4F"/>
+          <a:srgbClr val="0D7043"/>
         </a:solidFill>
       </p:bgPr>
     </p:bg>
@@ -6687,11 +6687,11 @@
             <a:r>
               <a:rPr lang="en-US" sz="1100" b="1" spc="100" kern="0" dirty="0">
                 <a:solidFill>
-                  <a:srgbClr val="C9D6CE"/>
-                </a:solidFill>
-                <a:latin typeface="Arial" pitchFamily="34" charset="0"/>
-                <a:ea typeface="Arial" pitchFamily="34" charset="-122"/>
-                <a:cs typeface="Arial" pitchFamily="34" charset="-120"/>
+                  <a:srgbClr val="E8F4EE"/>
+                </a:solidFill>
+                <a:latin typeface="Inter" pitchFamily="34" charset="0"/>
+                <a:ea typeface="Inter" pitchFamily="34" charset="-122"/>
+                <a:cs typeface="Inter" pitchFamily="34" charset="-120"/>
               </a:rPr>
               <a:t>Orena Solutions</a:t>
             </a:r>
@@ -6726,11 +6726,11 @@
             <a:r>
               <a:rPr lang="en-US" sz="1100" spc="100" kern="0" dirty="0">
                 <a:solidFill>
-                  <a:srgbClr val="C9D6CE"/>
-                </a:solidFill>
-                <a:latin typeface="Arial" pitchFamily="34" charset="0"/>
-                <a:ea typeface="Arial" pitchFamily="34" charset="-122"/>
-                <a:cs typeface="Arial" pitchFamily="34" charset="-120"/>
+                  <a:srgbClr val="E8F4EE"/>
+                </a:solidFill>
+                <a:latin typeface="Inter" pitchFamily="34" charset="0"/>
+                <a:ea typeface="Inter" pitchFamily="34" charset="-122"/>
+                <a:cs typeface="Inter" pitchFamily="34" charset="-120"/>
               </a:rPr>
               <a:t>Brand Playbook</a:t>
             </a:r>
@@ -6767,9 +6767,9 @@
                 <a:solidFill>
                   <a:srgbClr val="FFFFFF"/>
                 </a:solidFill>
-                <a:latin typeface="Georgia" pitchFamily="34" charset="0"/>
-                <a:ea typeface="Georgia" pitchFamily="34" charset="-122"/>
-                <a:cs typeface="Georgia" pitchFamily="34" charset="-120"/>
+                <a:latin typeface="Poppins" pitchFamily="34" charset="0"/>
+                <a:ea typeface="Poppins" pitchFamily="34" charset="-122"/>
+                <a:cs typeface="Poppins" pitchFamily="34" charset="-120"/>
               </a:rPr>
               <a:t>Visual Devices</a:t>
             </a:r>
@@ -6804,11 +6804,11 @@
             <a:r>
               <a:rPr lang="en-US" sz="1400" i="1" dirty="0">
                 <a:solidFill>
-                  <a:srgbClr val="A8C9C0"/>
-                </a:solidFill>
-                <a:latin typeface="Arial" pitchFamily="34" charset="0"/>
-                <a:ea typeface="Arial" pitchFamily="34" charset="-122"/>
-                <a:cs typeface="Arial" pitchFamily="34" charset="-120"/>
+                  <a:srgbClr val="48B855"/>
+                </a:solidFill>
+                <a:latin typeface="Inter" pitchFamily="34" charset="0"/>
+                <a:ea typeface="Inter" pitchFamily="34" charset="-122"/>
+                <a:cs typeface="Inter" pitchFamily="34" charset="-120"/>
               </a:rPr>
               <a:t>How we add craft and clarity to our brand.</a:t>
             </a:r>
@@ -6843,11 +6843,11 @@
             <a:r>
               <a:rPr lang="en-US" sz="850" spc="120" kern="0" dirty="0">
                 <a:solidFill>
-                  <a:srgbClr val="6E8577"/>
-                </a:solidFill>
-                <a:latin typeface="Arial" pitchFamily="34" charset="0"/>
-                <a:ea typeface="Arial" pitchFamily="34" charset="-122"/>
-                <a:cs typeface="Arial" pitchFamily="34" charset="-120"/>
+                  <a:srgbClr val="48B855"/>
+                </a:solidFill>
+                <a:latin typeface="Inter" pitchFamily="34" charset="0"/>
+                <a:ea typeface="Inter" pitchFamily="34" charset="-122"/>
+                <a:cs typeface="Inter" pitchFamily="34" charset="-120"/>
               </a:rPr>
               <a:t>ORENA SOLUTIONS — BRAND PLAYBOOK</a:t>
             </a:r>
@@ -6869,7 +6869,7 @@
     <p:bg>
       <p:bgPr>
         <a:solidFill>
-          <a:srgbClr val="FAFAF8"/>
+          <a:srgbClr val="FAFCF9"/>
         </a:solidFill>
       </p:bgPr>
     </p:bg>
@@ -6914,11 +6914,11 @@
             <a:r>
               <a:rPr lang="en-US" sz="1100" b="1" spc="100" kern="0" dirty="0">
                 <a:solidFill>
-                  <a:srgbClr val="6E7A70"/>
-                </a:solidFill>
-                <a:latin typeface="Arial" pitchFamily="34" charset="0"/>
-                <a:ea typeface="Arial" pitchFamily="34" charset="-122"/>
-                <a:cs typeface="Arial" pitchFamily="34" charset="-120"/>
+                  <a:srgbClr val="66756D"/>
+                </a:solidFill>
+                <a:latin typeface="Inter" pitchFamily="34" charset="0"/>
+                <a:ea typeface="Inter" pitchFamily="34" charset="-122"/>
+                <a:cs typeface="Inter" pitchFamily="34" charset="-120"/>
               </a:rPr>
               <a:t>Visual Devices</a:t>
             </a:r>
@@ -6953,11 +6953,11 @@
             <a:r>
               <a:rPr lang="en-US" sz="1100" spc="100" kern="0" dirty="0">
                 <a:solidFill>
-                  <a:srgbClr val="6E7A70"/>
-                </a:solidFill>
-                <a:latin typeface="Arial" pitchFamily="34" charset="0"/>
-                <a:ea typeface="Arial" pitchFamily="34" charset="-122"/>
-                <a:cs typeface="Arial" pitchFamily="34" charset="-120"/>
+                  <a:srgbClr val="66756D"/>
+                </a:solidFill>
+                <a:latin typeface="Inter" pitchFamily="34" charset="0"/>
+                <a:ea typeface="Inter" pitchFamily="34" charset="-122"/>
+                <a:cs typeface="Inter" pitchFamily="34" charset="-120"/>
               </a:rPr>
               <a:t>Iconography &amp; Shapes</a:t>
             </a:r>
@@ -6995,11 +6995,11 @@
             <a:r>
               <a:rPr lang="en-US" sz="1200" dirty="0">
                 <a:solidFill>
-                  <a:srgbClr val="333333"/>
-                </a:solidFill>
-                <a:latin typeface="Arial" pitchFamily="34" charset="0"/>
-                <a:ea typeface="Arial" pitchFamily="34" charset="-122"/>
-                <a:cs typeface="Arial" pitchFamily="34" charset="-120"/>
+                  <a:srgbClr val="18231E"/>
+                </a:solidFill>
+                <a:latin typeface="Inter" pitchFamily="34" charset="0"/>
+                <a:ea typeface="Inter" pitchFamily="34" charset="-122"/>
+                <a:cs typeface="Inter" pitchFamily="34" charset="-120"/>
               </a:rPr>
               <a:t>A consistent line-and-form icon set covers our core themes — quality, growth and connection.</a:t>
             </a:r>
@@ -7037,11 +7037,11 @@
             <a:r>
               <a:rPr lang="en-US" sz="1200" dirty="0">
                 <a:solidFill>
-                  <a:srgbClr val="333333"/>
-                </a:solidFill>
-                <a:latin typeface="Arial" pitchFamily="34" charset="0"/>
-                <a:ea typeface="Arial" pitchFamily="34" charset="-122"/>
-                <a:cs typeface="Arial" pitchFamily="34" charset="-120"/>
+                  <a:srgbClr val="18231E"/>
+                </a:solidFill>
+                <a:latin typeface="Inter" pitchFamily="34" charset="0"/>
+                <a:ea typeface="Inter" pitchFamily="34" charset="-122"/>
+                <a:cs typeface="Inter" pitchFamily="34" charset="-120"/>
               </a:rPr>
               <a:t>Half-circle motifs and dot clusters echo the mark across backgrounds and dividers.</a:t>
             </a:r>
@@ -7070,7 +7070,7 @@
           </a:solidFill>
           <a:ln w="12700">
             <a:solidFill>
-              <a:srgbClr val="E4E1D9"/>
+              <a:srgbClr val="E8F4EE"/>
             </a:solidFill>
             <a:prstDash val="solid"/>
           </a:ln>
@@ -7127,11 +7127,11 @@
             <a:r>
               <a:rPr lang="en-US" sz="850" dirty="0">
                 <a:solidFill>
-                  <a:srgbClr val="333333"/>
-                </a:solidFill>
-                <a:latin typeface="Arial" pitchFamily="34" charset="0"/>
-                <a:ea typeface="Arial" pitchFamily="34" charset="-122"/>
-                <a:cs typeface="Arial" pitchFamily="34" charset="-120"/>
+                  <a:srgbClr val="18231E"/>
+                </a:solidFill>
+                <a:latin typeface="Inter" pitchFamily="34" charset="0"/>
+                <a:ea typeface="Inter" pitchFamily="34" charset="-122"/>
+                <a:cs typeface="Inter" pitchFamily="34" charset="-120"/>
               </a:rPr>
               <a:t>Quality</a:t>
             </a:r>
@@ -7160,7 +7160,7 @@
           </a:solidFill>
           <a:ln w="12700">
             <a:solidFill>
-              <a:srgbClr val="E4E1D9"/>
+              <a:srgbClr val="E8F4EE"/>
             </a:solidFill>
             <a:prstDash val="solid"/>
           </a:ln>
@@ -7217,11 +7217,11 @@
             <a:r>
               <a:rPr lang="en-US" sz="850" dirty="0">
                 <a:solidFill>
-                  <a:srgbClr val="333333"/>
-                </a:solidFill>
-                <a:latin typeface="Arial" pitchFamily="34" charset="0"/>
-                <a:ea typeface="Arial" pitchFamily="34" charset="-122"/>
-                <a:cs typeface="Arial" pitchFamily="34" charset="-120"/>
+                  <a:srgbClr val="18231E"/>
+                </a:solidFill>
+                <a:latin typeface="Inter" pitchFamily="34" charset="0"/>
+                <a:ea typeface="Inter" pitchFamily="34" charset="-122"/>
+                <a:cs typeface="Inter" pitchFamily="34" charset="-120"/>
               </a:rPr>
               <a:t>Teamwork</a:t>
             </a:r>
@@ -7250,7 +7250,7 @@
           </a:solidFill>
           <a:ln w="12700">
             <a:solidFill>
-              <a:srgbClr val="E4E1D9"/>
+              <a:srgbClr val="E8F4EE"/>
             </a:solidFill>
             <a:prstDash val="solid"/>
           </a:ln>
@@ -7307,11 +7307,11 @@
             <a:r>
               <a:rPr lang="en-US" sz="850" dirty="0">
                 <a:solidFill>
-                  <a:srgbClr val="333333"/>
-                </a:solidFill>
-                <a:latin typeface="Arial" pitchFamily="34" charset="0"/>
-                <a:ea typeface="Arial" pitchFamily="34" charset="-122"/>
-                <a:cs typeface="Arial" pitchFamily="34" charset="-120"/>
+                  <a:srgbClr val="18231E"/>
+                </a:solidFill>
+                <a:latin typeface="Inter" pitchFamily="34" charset="0"/>
+                <a:ea typeface="Inter" pitchFamily="34" charset="-122"/>
+                <a:cs typeface="Inter" pitchFamily="34" charset="-120"/>
               </a:rPr>
               <a:t>Strategy</a:t>
             </a:r>
@@ -7340,7 +7340,7 @@
           </a:solidFill>
           <a:ln w="12700">
             <a:solidFill>
-              <a:srgbClr val="E4E1D9"/>
+              <a:srgbClr val="E8F4EE"/>
             </a:solidFill>
             <a:prstDash val="solid"/>
           </a:ln>
@@ -7397,11 +7397,11 @@
             <a:r>
               <a:rPr lang="en-US" sz="850" dirty="0">
                 <a:solidFill>
-                  <a:srgbClr val="333333"/>
-                </a:solidFill>
-                <a:latin typeface="Arial" pitchFamily="34" charset="0"/>
-                <a:ea typeface="Arial" pitchFamily="34" charset="-122"/>
-                <a:cs typeface="Arial" pitchFamily="34" charset="-120"/>
+                  <a:srgbClr val="18231E"/>
+                </a:solidFill>
+                <a:latin typeface="Inter" pitchFamily="34" charset="0"/>
+                <a:ea typeface="Inter" pitchFamily="34" charset="-122"/>
+                <a:cs typeface="Inter" pitchFamily="34" charset="-120"/>
               </a:rPr>
               <a:t>Growth</a:t>
             </a:r>
@@ -7430,7 +7430,7 @@
           </a:solidFill>
           <a:ln w="12700">
             <a:solidFill>
-              <a:srgbClr val="E4E1D9"/>
+              <a:srgbClr val="E8F4EE"/>
             </a:solidFill>
             <a:prstDash val="solid"/>
           </a:ln>
@@ -7487,11 +7487,11 @@
             <a:r>
               <a:rPr lang="en-US" sz="850" dirty="0">
                 <a:solidFill>
-                  <a:srgbClr val="333333"/>
-                </a:solidFill>
-                <a:latin typeface="Arial" pitchFamily="34" charset="0"/>
-                <a:ea typeface="Arial" pitchFamily="34" charset="-122"/>
-                <a:cs typeface="Arial" pitchFamily="34" charset="-120"/>
+                  <a:srgbClr val="18231E"/>
+                </a:solidFill>
+                <a:latin typeface="Inter" pitchFamily="34" charset="0"/>
+                <a:ea typeface="Inter" pitchFamily="34" charset="-122"/>
+                <a:cs typeface="Inter" pitchFamily="34" charset="-120"/>
               </a:rPr>
               <a:t>Excellence</a:t>
             </a:r>
@@ -7520,7 +7520,7 @@
           </a:solidFill>
           <a:ln w="12700">
             <a:solidFill>
-              <a:srgbClr val="E4E1D9"/>
+              <a:srgbClr val="E8F4EE"/>
             </a:solidFill>
             <a:prstDash val="solid"/>
           </a:ln>
@@ -7577,11 +7577,11 @@
             <a:r>
               <a:rPr lang="en-US" sz="850" dirty="0">
                 <a:solidFill>
-                  <a:srgbClr val="333333"/>
-                </a:solidFill>
-                <a:latin typeface="Arial" pitchFamily="34" charset="0"/>
-                <a:ea typeface="Arial" pitchFamily="34" charset="-122"/>
-                <a:cs typeface="Arial" pitchFamily="34" charset="-120"/>
+                  <a:srgbClr val="18231E"/>
+                </a:solidFill>
+                <a:latin typeface="Inter" pitchFamily="34" charset="0"/>
+                <a:ea typeface="Inter" pitchFamily="34" charset="-122"/>
+                <a:cs typeface="Inter" pitchFamily="34" charset="-120"/>
               </a:rPr>
               <a:t>Learning</a:t>
             </a:r>
@@ -7610,7 +7610,7 @@
           </a:solidFill>
           <a:ln w="12700">
             <a:solidFill>
-              <a:srgbClr val="E4E1D9"/>
+              <a:srgbClr val="E8F4EE"/>
             </a:solidFill>
             <a:prstDash val="solid"/>
           </a:ln>
@@ -7667,11 +7667,11 @@
             <a:r>
               <a:rPr lang="en-US" sz="850" dirty="0">
                 <a:solidFill>
-                  <a:srgbClr val="333333"/>
-                </a:solidFill>
-                <a:latin typeface="Arial" pitchFamily="34" charset="0"/>
-                <a:ea typeface="Arial" pitchFamily="34" charset="-122"/>
-                <a:cs typeface="Arial" pitchFamily="34" charset="-120"/>
+                  <a:srgbClr val="18231E"/>
+                </a:solidFill>
+                <a:latin typeface="Inter" pitchFamily="34" charset="0"/>
+                <a:ea typeface="Inter" pitchFamily="34" charset="-122"/>
+                <a:cs typeface="Inter" pitchFamily="34" charset="-120"/>
               </a:rPr>
               <a:t>Solutions</a:t>
             </a:r>
@@ -7700,7 +7700,7 @@
           </a:solidFill>
           <a:ln w="12700">
             <a:solidFill>
-              <a:srgbClr val="E4E1D9"/>
+              <a:srgbClr val="E8F4EE"/>
             </a:solidFill>
             <a:prstDash val="solid"/>
           </a:ln>
@@ -7757,11 +7757,11 @@
             <a:r>
               <a:rPr lang="en-US" sz="850" dirty="0">
                 <a:solidFill>
-                  <a:srgbClr val="333333"/>
-                </a:solidFill>
-                <a:latin typeface="Arial" pitchFamily="34" charset="0"/>
-                <a:ea typeface="Arial" pitchFamily="34" charset="-122"/>
-                <a:cs typeface="Arial" pitchFamily="34" charset="-120"/>
+                  <a:srgbClr val="18231E"/>
+                </a:solidFill>
+                <a:latin typeface="Inter" pitchFamily="34" charset="0"/>
+                <a:ea typeface="Inter" pitchFamily="34" charset="-122"/>
+                <a:cs typeface="Inter" pitchFamily="34" charset="-120"/>
               </a:rPr>
               <a:t>Partnership</a:t>
             </a:r>
@@ -7790,7 +7790,7 @@
           </a:solidFill>
           <a:ln w="12700">
             <a:solidFill>
-              <a:srgbClr val="E4E1D9"/>
+              <a:srgbClr val="E8F4EE"/>
             </a:solidFill>
             <a:prstDash val="solid"/>
           </a:ln>
@@ -7847,11 +7847,11 @@
             <a:r>
               <a:rPr lang="en-US" sz="850" dirty="0">
                 <a:solidFill>
-                  <a:srgbClr val="333333"/>
-                </a:solidFill>
-                <a:latin typeface="Arial" pitchFamily="34" charset="0"/>
-                <a:ea typeface="Arial" pitchFamily="34" charset="-122"/>
-                <a:cs typeface="Arial" pitchFamily="34" charset="-120"/>
+                  <a:srgbClr val="18231E"/>
+                </a:solidFill>
+                <a:latin typeface="Inter" pitchFamily="34" charset="0"/>
+                <a:ea typeface="Inter" pitchFamily="34" charset="-122"/>
+                <a:cs typeface="Inter" pitchFamily="34" charset="-120"/>
               </a:rPr>
               <a:t>Global</a:t>
             </a:r>
@@ -7876,7 +7876,7 @@
             </a:avLst>
           </a:prstGeom>
           <a:solidFill>
-            <a:srgbClr val="2F6B4F"/>
+            <a:srgbClr val="0D7043"/>
           </a:solidFill>
           <a:ln/>
         </p:spPr>
@@ -7899,7 +7899,7 @@
             </a:avLst>
           </a:prstGeom>
           <a:solidFill>
-            <a:srgbClr val="A8C9C0"/>
+            <a:srgbClr val="48B855"/>
           </a:solidFill>
           <a:ln/>
         </p:spPr>
@@ -7921,7 +7921,7 @@
             </a:avLst>
           </a:prstGeom>
           <a:solidFill>
-            <a:srgbClr val="DDE3DC"/>
+            <a:srgbClr val="E8F4EE"/>
           </a:solidFill>
           <a:ln/>
         </p:spPr>
@@ -7941,7 +7941,7 @@
             <a:avLst/>
           </a:prstGeom>
           <a:solidFill>
-            <a:srgbClr val="2F6B4F">
+            <a:srgbClr val="0D7043">
               <a:alpha val="70000"/>
             </a:srgbClr>
           </a:solidFill>
@@ -7963,7 +7963,7 @@
             <a:avLst/>
           </a:prstGeom>
           <a:solidFill>
-            <a:srgbClr val="2F6B4F">
+            <a:srgbClr val="0D7043">
               <a:alpha val="70000"/>
             </a:srgbClr>
           </a:solidFill>
@@ -7985,7 +7985,7 @@
             <a:avLst/>
           </a:prstGeom>
           <a:solidFill>
-            <a:srgbClr val="2F6B4F">
+            <a:srgbClr val="0D7043">
               <a:alpha val="70000"/>
             </a:srgbClr>
           </a:solidFill>
@@ -8007,7 +8007,7 @@
             <a:avLst/>
           </a:prstGeom>
           <a:solidFill>
-            <a:srgbClr val="2F6B4F">
+            <a:srgbClr val="0D7043">
               <a:alpha val="70000"/>
             </a:srgbClr>
           </a:solidFill>
@@ -8029,7 +8029,7 @@
             <a:avLst/>
           </a:prstGeom>
           <a:solidFill>
-            <a:srgbClr val="2F6B4F">
+            <a:srgbClr val="0D7043">
               <a:alpha val="70000"/>
             </a:srgbClr>
           </a:solidFill>
@@ -8051,7 +8051,7 @@
             <a:avLst/>
           </a:prstGeom>
           <a:solidFill>
-            <a:srgbClr val="2F6B4F">
+            <a:srgbClr val="0D7043">
               <a:alpha val="70000"/>
             </a:srgbClr>
           </a:solidFill>
@@ -8073,7 +8073,7 @@
             <a:avLst/>
           </a:prstGeom>
           <a:solidFill>
-            <a:srgbClr val="2F6B4F">
+            <a:srgbClr val="0D7043">
               <a:alpha val="70000"/>
             </a:srgbClr>
           </a:solidFill>
@@ -8095,7 +8095,7 @@
             <a:avLst/>
           </a:prstGeom>
           <a:solidFill>
-            <a:srgbClr val="2F6B4F">
+            <a:srgbClr val="0D7043">
               <a:alpha val="70000"/>
             </a:srgbClr>
           </a:solidFill>
@@ -8117,7 +8117,7 @@
             <a:avLst/>
           </a:prstGeom>
           <a:solidFill>
-            <a:srgbClr val="2F6B4F">
+            <a:srgbClr val="0D7043">
               <a:alpha val="70000"/>
             </a:srgbClr>
           </a:solidFill>
@@ -8139,7 +8139,7 @@
             <a:avLst/>
           </a:prstGeom>
           <a:solidFill>
-            <a:srgbClr val="2F6B4F">
+            <a:srgbClr val="0D7043">
               <a:alpha val="70000"/>
             </a:srgbClr>
           </a:solidFill>
@@ -8161,7 +8161,7 @@
             <a:avLst/>
           </a:prstGeom>
           <a:solidFill>
-            <a:srgbClr val="2F6B4F">
+            <a:srgbClr val="0D7043">
               <a:alpha val="70000"/>
             </a:srgbClr>
           </a:solidFill>
@@ -8183,7 +8183,7 @@
             <a:avLst/>
           </a:prstGeom>
           <a:solidFill>
-            <a:srgbClr val="2F6B4F">
+            <a:srgbClr val="0D7043">
               <a:alpha val="70000"/>
             </a:srgbClr>
           </a:solidFill>
@@ -8205,7 +8205,7 @@
             <a:avLst/>
           </a:prstGeom>
           <a:solidFill>
-            <a:srgbClr val="2F6B4F">
+            <a:srgbClr val="0D7043">
               <a:alpha val="70000"/>
             </a:srgbClr>
           </a:solidFill>
@@ -8227,7 +8227,7 @@
             <a:avLst/>
           </a:prstGeom>
           <a:solidFill>
-            <a:srgbClr val="2F6B4F">
+            <a:srgbClr val="0D7043">
               <a:alpha val="70000"/>
             </a:srgbClr>
           </a:solidFill>
@@ -8249,7 +8249,7 @@
             <a:avLst/>
           </a:prstGeom>
           <a:solidFill>
-            <a:srgbClr val="2F6B4F">
+            <a:srgbClr val="0D7043">
               <a:alpha val="70000"/>
             </a:srgbClr>
           </a:solidFill>
@@ -8271,7 +8271,7 @@
             <a:avLst/>
           </a:prstGeom>
           <a:solidFill>
-            <a:srgbClr val="2F6B4F">
+            <a:srgbClr val="0D7043">
               <a:alpha val="70000"/>
             </a:srgbClr>
           </a:solidFill>
@@ -8293,7 +8293,7 @@
             <a:avLst/>
           </a:prstGeom>
           <a:solidFill>
-            <a:srgbClr val="2F6B4F">
+            <a:srgbClr val="0D7043">
               <a:alpha val="70000"/>
             </a:srgbClr>
           </a:solidFill>
@@ -8315,7 +8315,7 @@
             <a:avLst/>
           </a:prstGeom>
           <a:solidFill>
-            <a:srgbClr val="2F6B4F">
+            <a:srgbClr val="0D7043">
               <a:alpha val="70000"/>
             </a:srgbClr>
           </a:solidFill>
@@ -8337,7 +8337,7 @@
             <a:avLst/>
           </a:prstGeom>
           <a:solidFill>
-            <a:srgbClr val="2F6B4F">
+            <a:srgbClr val="0D7043">
               <a:alpha val="70000"/>
             </a:srgbClr>
           </a:solidFill>
@@ -8359,7 +8359,7 @@
             <a:avLst/>
           </a:prstGeom>
           <a:solidFill>
-            <a:srgbClr val="2F6B4F">
+            <a:srgbClr val="0D7043">
               <a:alpha val="70000"/>
             </a:srgbClr>
           </a:solidFill>
@@ -8381,7 +8381,7 @@
             <a:avLst/>
           </a:prstGeom>
           <a:solidFill>
-            <a:srgbClr val="2F6B4F">
+            <a:srgbClr val="0D7043">
               <a:alpha val="70000"/>
             </a:srgbClr>
           </a:solidFill>
@@ -8403,7 +8403,7 @@
             <a:avLst/>
           </a:prstGeom>
           <a:solidFill>
-            <a:srgbClr val="2F6B4F">
+            <a:srgbClr val="0D7043">
               <a:alpha val="70000"/>
             </a:srgbClr>
           </a:solidFill>
@@ -8425,7 +8425,7 @@
             <a:avLst/>
           </a:prstGeom>
           <a:solidFill>
-            <a:srgbClr val="2F6B4F">
+            <a:srgbClr val="0D7043">
               <a:alpha val="70000"/>
             </a:srgbClr>
           </a:solidFill>
@@ -8447,7 +8447,7 @@
             <a:avLst/>
           </a:prstGeom>
           <a:solidFill>
-            <a:srgbClr val="2F6B4F">
+            <a:srgbClr val="0D7043">
               <a:alpha val="70000"/>
             </a:srgbClr>
           </a:solidFill>
@@ -8469,7 +8469,7 @@
             <a:avLst/>
           </a:prstGeom>
           <a:solidFill>
-            <a:srgbClr val="2F6B4F">
+            <a:srgbClr val="0D7043">
               <a:alpha val="70000"/>
             </a:srgbClr>
           </a:solidFill>
@@ -8491,7 +8491,7 @@
             <a:avLst/>
           </a:prstGeom>
           <a:solidFill>
-            <a:srgbClr val="2F6B4F">
+            <a:srgbClr val="0D7043">
               <a:alpha val="70000"/>
             </a:srgbClr>
           </a:solidFill>
@@ -8513,7 +8513,7 @@
             <a:avLst/>
           </a:prstGeom>
           <a:solidFill>
-            <a:srgbClr val="2F6B4F">
+            <a:srgbClr val="0D7043">
               <a:alpha val="70000"/>
             </a:srgbClr>
           </a:solidFill>
@@ -8535,7 +8535,7 @@
             <a:avLst/>
           </a:prstGeom>
           <a:solidFill>
-            <a:srgbClr val="2F6B4F">
+            <a:srgbClr val="0D7043">
               <a:alpha val="70000"/>
             </a:srgbClr>
           </a:solidFill>
@@ -8557,7 +8557,7 @@
             <a:avLst/>
           </a:prstGeom>
           <a:solidFill>
-            <a:srgbClr val="2F6B4F">
+            <a:srgbClr val="0D7043">
               <a:alpha val="70000"/>
             </a:srgbClr>
           </a:solidFill>
@@ -8579,7 +8579,7 @@
             <a:avLst/>
           </a:prstGeom>
           <a:solidFill>
-            <a:srgbClr val="2F6B4F">
+            <a:srgbClr val="0D7043">
               <a:alpha val="70000"/>
             </a:srgbClr>
           </a:solidFill>
@@ -8601,7 +8601,7 @@
             <a:avLst/>
           </a:prstGeom>
           <a:solidFill>
-            <a:srgbClr val="2F6B4F">
+            <a:srgbClr val="0D7043">
               <a:alpha val="70000"/>
             </a:srgbClr>
           </a:solidFill>
@@ -8623,7 +8623,7 @@
             <a:avLst/>
           </a:prstGeom>
           <a:solidFill>
-            <a:srgbClr val="2F6B4F">
+            <a:srgbClr val="0D7043">
               <a:alpha val="70000"/>
             </a:srgbClr>
           </a:solidFill>
@@ -8657,11 +8657,11 @@
             <a:r>
               <a:rPr lang="en-US" sz="850" spc="120" kern="0" dirty="0">
                 <a:solidFill>
-                  <a:srgbClr val="B7BEB6"/>
-                </a:solidFill>
-                <a:latin typeface="Arial" pitchFamily="34" charset="0"/>
-                <a:ea typeface="Arial" pitchFamily="34" charset="-122"/>
-                <a:cs typeface="Arial" pitchFamily="34" charset="-120"/>
+                  <a:srgbClr val="66756D"/>
+                </a:solidFill>
+                <a:latin typeface="Inter" pitchFamily="34" charset="0"/>
+                <a:ea typeface="Inter" pitchFamily="34" charset="-122"/>
+                <a:cs typeface="Inter" pitchFamily="34" charset="-120"/>
               </a:rPr>
               <a:t>ORENA SOLUTIONS — BRAND PLAYBOOK</a:t>
             </a:r>
@@ -8683,7 +8683,7 @@
     <p:bg>
       <p:bgPr>
         <a:solidFill>
-          <a:srgbClr val="2F6B4F"/>
+          <a:srgbClr val="0D7043"/>
         </a:solidFill>
       </p:bgPr>
     </p:bg>
@@ -8728,11 +8728,11 @@
             <a:r>
               <a:rPr lang="en-US" sz="1100" b="1" spc="100" kern="0" dirty="0">
                 <a:solidFill>
-                  <a:srgbClr val="C9D6CE"/>
-                </a:solidFill>
-                <a:latin typeface="Arial" pitchFamily="34" charset="0"/>
-                <a:ea typeface="Arial" pitchFamily="34" charset="-122"/>
-                <a:cs typeface="Arial" pitchFamily="34" charset="-120"/>
+                  <a:srgbClr val="E8F4EE"/>
+                </a:solidFill>
+                <a:latin typeface="Inter" pitchFamily="34" charset="0"/>
+                <a:ea typeface="Inter" pitchFamily="34" charset="-122"/>
+                <a:cs typeface="Inter" pitchFamily="34" charset="-120"/>
               </a:rPr>
               <a:t>Brand Playbook</a:t>
             </a:r>
@@ -8767,11 +8767,11 @@
             <a:r>
               <a:rPr lang="en-US" sz="1100" spc="100" kern="0" dirty="0">
                 <a:solidFill>
-                  <a:srgbClr val="C9D6CE"/>
-                </a:solidFill>
-                <a:latin typeface="Arial" pitchFamily="34" charset="0"/>
-                <a:ea typeface="Arial" pitchFamily="34" charset="-122"/>
-                <a:cs typeface="Arial" pitchFamily="34" charset="-120"/>
+                  <a:srgbClr val="E8F4EE"/>
+                </a:solidFill>
+                <a:latin typeface="Inter" pitchFamily="34" charset="0"/>
+                <a:ea typeface="Inter" pitchFamily="34" charset="-122"/>
+                <a:cs typeface="Inter" pitchFamily="34" charset="-120"/>
               </a:rPr>
               <a:t>Introduction</a:t>
             </a:r>
@@ -8811,9 +8811,9 @@
                 <a:solidFill>
                   <a:srgbClr val="FFFFFF"/>
                 </a:solidFill>
-                <a:latin typeface="Georgia" pitchFamily="34" charset="0"/>
-                <a:ea typeface="Georgia" pitchFamily="34" charset="-122"/>
-                <a:cs typeface="Georgia" pitchFamily="34" charset="-120"/>
+                <a:latin typeface="Poppins" pitchFamily="34" charset="0"/>
+                <a:ea typeface="Poppins" pitchFamily="34" charset="-122"/>
+                <a:cs typeface="Poppins" pitchFamily="34" charset="-120"/>
               </a:rPr>
               <a:t>Engineering excellence.</a:t>
             </a:r>
@@ -8831,9 +8831,9 @@
                 <a:solidFill>
                   <a:srgbClr val="FFFFFF"/>
                 </a:solidFill>
-                <a:latin typeface="Georgia" pitchFamily="34" charset="0"/>
-                <a:ea typeface="Georgia" pitchFamily="34" charset="-122"/>
-                <a:cs typeface="Georgia" pitchFamily="34" charset="-120"/>
+                <a:latin typeface="Poppins" pitchFamily="34" charset="0"/>
+                <a:ea typeface="Poppins" pitchFamily="34" charset="-122"/>
+                <a:cs typeface="Poppins" pitchFamily="34" charset="-120"/>
               </a:rPr>
               <a:t>Building a better tomorrow.</a:t>
             </a:r>
@@ -8871,11 +8871,11 @@
             <a:r>
               <a:rPr lang="en-US" sz="1250" dirty="0">
                 <a:solidFill>
-                  <a:srgbClr val="D7E2DB"/>
-                </a:solidFill>
-                <a:latin typeface="Arial" pitchFamily="34" charset="0"/>
-                <a:ea typeface="Arial" pitchFamily="34" charset="-122"/>
-                <a:cs typeface="Arial" pitchFamily="34" charset="-120"/>
+                  <a:srgbClr val="D7E9DF"/>
+                </a:solidFill>
+                <a:latin typeface="Inter" pitchFamily="34" charset="0"/>
+                <a:ea typeface="Inter" pitchFamily="34" charset="-122"/>
+                <a:cs typeface="Inter" pitchFamily="34" charset="-120"/>
               </a:rPr>
               <a:t>At Orena Solutions, we exist to craft preferred engineers — people and organizations built for a future they helped design. We connect quality, people, and sustainability into every engagement we deliver.</a:t>
             </a:r>
@@ -8900,11 +8900,11 @@
             <a:r>
               <a:rPr lang="en-US" sz="1250" dirty="0">
                 <a:solidFill>
-                  <a:srgbClr val="D7E2DB"/>
-                </a:solidFill>
-                <a:latin typeface="Arial" pitchFamily="34" charset="0"/>
-                <a:ea typeface="Arial" pitchFamily="34" charset="-122"/>
-                <a:cs typeface="Arial" pitchFamily="34" charset="-120"/>
+                  <a:srgbClr val="D7E9DF"/>
+                </a:solidFill>
+                <a:latin typeface="Inter" pitchFamily="34" charset="0"/>
+                <a:ea typeface="Inter" pitchFamily="34" charset="-122"/>
+                <a:cs typeface="Inter" pitchFamily="34" charset="-120"/>
               </a:rPr>
               <a:t>This playbook explains how to give things the Orena touch. Use it to understand our visual identity and voice, so that everything we create feels connected and consistent.</a:t>
             </a:r>
@@ -8939,11 +8939,11 @@
             <a:r>
               <a:rPr lang="en-US" sz="850" spc="120" kern="0" dirty="0">
                 <a:solidFill>
-                  <a:srgbClr val="6E8577"/>
-                </a:solidFill>
-                <a:latin typeface="Arial" pitchFamily="34" charset="0"/>
-                <a:ea typeface="Arial" pitchFamily="34" charset="-122"/>
-                <a:cs typeface="Arial" pitchFamily="34" charset="-120"/>
+                  <a:srgbClr val="48B855"/>
+                </a:solidFill>
+                <a:latin typeface="Inter" pitchFamily="34" charset="0"/>
+                <a:ea typeface="Inter" pitchFamily="34" charset="-122"/>
+                <a:cs typeface="Inter" pitchFamily="34" charset="-120"/>
               </a:rPr>
               <a:t>ORENA SOLUTIONS — BRAND PLAYBOOK</a:t>
             </a:r>
@@ -8965,7 +8965,7 @@
     <p:bg>
       <p:bgPr>
         <a:solidFill>
-          <a:srgbClr val="FAFAF8"/>
+          <a:srgbClr val="FAFCF9"/>
         </a:solidFill>
       </p:bgPr>
     </p:bg>
@@ -9010,11 +9010,11 @@
             <a:r>
               <a:rPr lang="en-US" sz="1100" b="1" spc="100" kern="0" dirty="0">
                 <a:solidFill>
-                  <a:srgbClr val="6E7A70"/>
-                </a:solidFill>
-                <a:latin typeface="Arial" pitchFamily="34" charset="0"/>
-                <a:ea typeface="Arial" pitchFamily="34" charset="-122"/>
-                <a:cs typeface="Arial" pitchFamily="34" charset="-120"/>
+                  <a:srgbClr val="66756D"/>
+                </a:solidFill>
+                <a:latin typeface="Inter" pitchFamily="34" charset="0"/>
+                <a:ea typeface="Inter" pitchFamily="34" charset="-122"/>
+                <a:cs typeface="Inter" pitchFamily="34" charset="-120"/>
               </a:rPr>
               <a:t>Visual Devices</a:t>
             </a:r>
@@ -9049,11 +9049,11 @@
             <a:r>
               <a:rPr lang="en-US" sz="1100" spc="100" kern="0" dirty="0">
                 <a:solidFill>
-                  <a:srgbClr val="6E7A70"/>
-                </a:solidFill>
-                <a:latin typeface="Arial" pitchFamily="34" charset="0"/>
-                <a:ea typeface="Arial" pitchFamily="34" charset="-122"/>
-                <a:cs typeface="Arial" pitchFamily="34" charset="-120"/>
+                  <a:srgbClr val="66756D"/>
+                </a:solidFill>
+                <a:latin typeface="Inter" pitchFamily="34" charset="0"/>
+                <a:ea typeface="Inter" pitchFamily="34" charset="-122"/>
+                <a:cs typeface="Inter" pitchFamily="34" charset="-120"/>
               </a:rPr>
               <a:t>Buttons, UI &amp; Elements</a:t>
             </a:r>
@@ -9088,11 +9088,11 @@
             <a:r>
               <a:rPr lang="en-US" sz="1000" b="1" spc="100" kern="0" dirty="0">
                 <a:solidFill>
-                  <a:srgbClr val="8C9188"/>
-                </a:solidFill>
-                <a:latin typeface="Arial" pitchFamily="34" charset="0"/>
-                <a:ea typeface="Arial" pitchFamily="34" charset="-122"/>
-                <a:cs typeface="Arial" pitchFamily="34" charset="-120"/>
+                  <a:srgbClr val="66756D"/>
+                </a:solidFill>
+                <a:latin typeface="Inter" pitchFamily="34" charset="0"/>
+                <a:ea typeface="Inter" pitchFamily="34" charset="-122"/>
+                <a:cs typeface="Inter" pitchFamily="34" charset="-120"/>
               </a:rPr>
               <a:t>BUTTON STYLES</a:t>
             </a:r>
@@ -9117,7 +9117,7 @@
             </a:avLst>
           </a:prstGeom>
           <a:solidFill>
-            <a:srgbClr val="2F6B4F"/>
+            <a:srgbClr val="0D7043"/>
           </a:solidFill>
           <a:ln/>
         </p:spPr>
@@ -9151,9 +9151,9 @@
                 <a:solidFill>
                   <a:srgbClr val="FFFFFF"/>
                 </a:solidFill>
-                <a:latin typeface="Arial" pitchFamily="34" charset="0"/>
-                <a:ea typeface="Arial" pitchFamily="34" charset="-122"/>
-                <a:cs typeface="Arial" pitchFamily="34" charset="-120"/>
+                <a:latin typeface="Inter" pitchFamily="34" charset="0"/>
+                <a:ea typeface="Inter" pitchFamily="34" charset="-122"/>
+                <a:cs typeface="Inter" pitchFamily="34" charset="-120"/>
               </a:rPr>
               <a:t>Primary Button</a:t>
             </a:r>
@@ -9178,7 +9178,7 @@
             </a:avLst>
           </a:prstGeom>
           <a:solidFill>
-            <a:srgbClr val="A8C9C0"/>
+            <a:srgbClr val="48B855"/>
           </a:solidFill>
           <a:ln/>
         </p:spPr>
@@ -9210,11 +9210,11 @@
             <a:r>
               <a:rPr lang="en-US" sz="1150" dirty="0">
                 <a:solidFill>
-                  <a:srgbClr val="1F4735"/>
-                </a:solidFill>
-                <a:latin typeface="Arial" pitchFamily="34" charset="0"/>
-                <a:ea typeface="Arial" pitchFamily="34" charset="-122"/>
-                <a:cs typeface="Arial" pitchFamily="34" charset="-120"/>
+                  <a:srgbClr val="0F5B37"/>
+                </a:solidFill>
+                <a:latin typeface="Inter" pitchFamily="34" charset="0"/>
+                <a:ea typeface="Inter" pitchFamily="34" charset="-122"/>
+                <a:cs typeface="Inter" pitchFamily="34" charset="-120"/>
               </a:rPr>
               <a:t>Secondary Button</a:t>
             </a:r>
@@ -9243,7 +9243,7 @@
           </a:solidFill>
           <a:ln w="15875">
             <a:solidFill>
-              <a:srgbClr val="2F6B4F"/>
+              <a:srgbClr val="0D7043"/>
             </a:solidFill>
             <a:prstDash val="solid"/>
           </a:ln>
@@ -9276,11 +9276,11 @@
             <a:r>
               <a:rPr lang="en-US" sz="1150" dirty="0">
                 <a:solidFill>
-                  <a:srgbClr val="2F6B4F"/>
-                </a:solidFill>
-                <a:latin typeface="Arial" pitchFamily="34" charset="0"/>
-                <a:ea typeface="Arial" pitchFamily="34" charset="-122"/>
-                <a:cs typeface="Arial" pitchFamily="34" charset="-120"/>
+                  <a:srgbClr val="0D7043"/>
+                </a:solidFill>
+                <a:latin typeface="Inter" pitchFamily="34" charset="0"/>
+                <a:ea typeface="Inter" pitchFamily="34" charset="-122"/>
+                <a:cs typeface="Inter" pitchFamily="34" charset="-120"/>
               </a:rPr>
               <a:t>Tertiary Button</a:t>
             </a:r>
@@ -9315,11 +9315,11 @@
             <a:r>
               <a:rPr lang="en-US" sz="1000" b="1" spc="100" kern="0" dirty="0">
                 <a:solidFill>
-                  <a:srgbClr val="8C9188"/>
-                </a:solidFill>
-                <a:latin typeface="Arial" pitchFamily="34" charset="0"/>
-                <a:ea typeface="Arial" pitchFamily="34" charset="-122"/>
-                <a:cs typeface="Arial" pitchFamily="34" charset="-120"/>
+                  <a:srgbClr val="66756D"/>
+                </a:solidFill>
+                <a:latin typeface="Inter" pitchFamily="34" charset="0"/>
+                <a:ea typeface="Inter" pitchFamily="34" charset="-122"/>
+                <a:cs typeface="Inter" pitchFamily="34" charset="-120"/>
               </a:rPr>
               <a:t>BADGES &amp; TAGS</a:t>
             </a:r>
@@ -9346,7 +9346,7 @@
           </a:solidFill>
           <a:ln w="19050">
             <a:solidFill>
-              <a:srgbClr val="2F6B4F"/>
+              <a:srgbClr val="0D7043"/>
             </a:solidFill>
             <a:prstDash val="solid"/>
           </a:ln>
@@ -9395,7 +9395,7 @@
           </a:solidFill>
           <a:ln w="19050">
             <a:solidFill>
-              <a:srgbClr val="C9A227"/>
+              <a:srgbClr val="B5D60C"/>
             </a:solidFill>
             <a:prstDash val="solid"/>
           </a:ln>
@@ -9444,7 +9444,7 @@
           </a:solidFill>
           <a:ln w="19050">
             <a:solidFill>
-              <a:srgbClr val="A8C9C0"/>
+              <a:srgbClr val="48B855"/>
             </a:solidFill>
             <a:prstDash val="solid"/>
           </a:ln>
@@ -9491,7 +9491,7 @@
             </a:avLst>
           </a:prstGeom>
           <a:solidFill>
-            <a:srgbClr val="2F6B4F"/>
+            <a:srgbClr val="0D7043"/>
           </a:solidFill>
           <a:ln/>
         </p:spPr>
@@ -9525,9 +9525,9 @@
                 <a:solidFill>
                   <a:srgbClr val="FFFFFF"/>
                 </a:solidFill>
-                <a:latin typeface="Arial" pitchFamily="34" charset="0"/>
-                <a:ea typeface="Arial" pitchFamily="34" charset="-122"/>
-                <a:cs typeface="Arial" pitchFamily="34" charset="-120"/>
+                <a:latin typeface="Inter" pitchFamily="34" charset="0"/>
+                <a:ea typeface="Inter" pitchFamily="34" charset="-122"/>
+                <a:cs typeface="Inter" pitchFamily="34" charset="-120"/>
               </a:rPr>
               <a:t>Engineering</a:t>
             </a:r>
@@ -9552,7 +9552,7 @@
             </a:avLst>
           </a:prstGeom>
           <a:solidFill>
-            <a:srgbClr val="A8C9C0"/>
+            <a:srgbClr val="48B855"/>
           </a:solidFill>
           <a:ln/>
         </p:spPr>
@@ -9584,11 +9584,11 @@
             <a:r>
               <a:rPr lang="en-US" sz="950" dirty="0">
                 <a:solidFill>
-                  <a:srgbClr val="1F4735"/>
-                </a:solidFill>
-                <a:latin typeface="Arial" pitchFamily="34" charset="0"/>
-                <a:ea typeface="Arial" pitchFamily="34" charset="-122"/>
-                <a:cs typeface="Arial" pitchFamily="34" charset="-120"/>
+                  <a:srgbClr val="0F5B37"/>
+                </a:solidFill>
+                <a:latin typeface="Inter" pitchFamily="34" charset="0"/>
+                <a:ea typeface="Inter" pitchFamily="34" charset="-122"/>
+                <a:cs typeface="Inter" pitchFamily="34" charset="-120"/>
               </a:rPr>
               <a:t>Innovation</a:t>
             </a:r>
@@ -9613,7 +9613,7 @@
             </a:avLst>
           </a:prstGeom>
           <a:solidFill>
-            <a:srgbClr val="DDE3DC"/>
+            <a:srgbClr val="E8F4EE"/>
           </a:solidFill>
           <a:ln/>
         </p:spPr>
@@ -9645,11 +9645,11 @@
             <a:r>
               <a:rPr lang="en-US" sz="950" dirty="0">
                 <a:solidFill>
-                  <a:srgbClr val="333333"/>
-                </a:solidFill>
-                <a:latin typeface="Arial" pitchFamily="34" charset="0"/>
-                <a:ea typeface="Arial" pitchFamily="34" charset="-122"/>
-                <a:cs typeface="Arial" pitchFamily="34" charset="-120"/>
+                  <a:srgbClr val="18231E"/>
+                </a:solidFill>
+                <a:latin typeface="Inter" pitchFamily="34" charset="0"/>
+                <a:ea typeface="Inter" pitchFamily="34" charset="-122"/>
+                <a:cs typeface="Inter" pitchFamily="34" charset="-120"/>
               </a:rPr>
               <a:t>Sustainability</a:t>
             </a:r>
@@ -9684,11 +9684,11 @@
             <a:r>
               <a:rPr lang="en-US" sz="1000" b="1" spc="100" kern="0" dirty="0">
                 <a:solidFill>
-                  <a:srgbClr val="8C9188"/>
-                </a:solidFill>
-                <a:latin typeface="Arial" pitchFamily="34" charset="0"/>
-                <a:ea typeface="Arial" pitchFamily="34" charset="-122"/>
-                <a:cs typeface="Arial" pitchFamily="34" charset="-120"/>
+                  <a:srgbClr val="66756D"/>
+                </a:solidFill>
+                <a:latin typeface="Inter" pitchFamily="34" charset="0"/>
+                <a:ea typeface="Inter" pitchFamily="34" charset="-122"/>
+                <a:cs typeface="Inter" pitchFamily="34" charset="-120"/>
               </a:rPr>
               <a:t>UI ELEMENTS</a:t>
             </a:r>
@@ -9713,7 +9713,7 @@
             </a:avLst>
           </a:prstGeom>
           <a:solidFill>
-            <a:srgbClr val="2F6B4F"/>
+            <a:srgbClr val="0D7043"/>
           </a:solidFill>
           <a:ln/>
         </p:spPr>
@@ -9769,11 +9769,11 @@
             <a:r>
               <a:rPr lang="en-US" sz="1100" dirty="0">
                 <a:solidFill>
-                  <a:srgbClr val="333333"/>
-                </a:solidFill>
-                <a:latin typeface="Arial" pitchFamily="34" charset="0"/>
-                <a:ea typeface="Arial" pitchFamily="34" charset="-122"/>
-                <a:cs typeface="Arial" pitchFamily="34" charset="-120"/>
+                  <a:srgbClr val="18231E"/>
+                </a:solidFill>
+                <a:latin typeface="Inter" pitchFamily="34" charset="0"/>
+                <a:ea typeface="Inter" pitchFamily="34" charset="-122"/>
+                <a:cs typeface="Inter" pitchFamily="34" charset="-120"/>
               </a:rPr>
               <a:t>Checkbox</a:t>
             </a:r>
@@ -9800,7 +9800,7 @@
           </a:solidFill>
           <a:ln w="19050">
             <a:solidFill>
-              <a:srgbClr val="2F6B4F"/>
+              <a:srgbClr val="0D7043"/>
             </a:solidFill>
             <a:prstDash val="solid"/>
           </a:ln>
@@ -9833,11 +9833,11 @@
             <a:r>
               <a:rPr lang="en-US" sz="1100" dirty="0">
                 <a:solidFill>
-                  <a:srgbClr val="333333"/>
-                </a:solidFill>
-                <a:latin typeface="Arial" pitchFamily="34" charset="0"/>
-                <a:ea typeface="Arial" pitchFamily="34" charset="-122"/>
-                <a:cs typeface="Arial" pitchFamily="34" charset="-120"/>
+                  <a:srgbClr val="18231E"/>
+                </a:solidFill>
+                <a:latin typeface="Inter" pitchFamily="34" charset="0"/>
+                <a:ea typeface="Inter" pitchFamily="34" charset="-122"/>
+                <a:cs typeface="Inter" pitchFamily="34" charset="-120"/>
               </a:rPr>
               <a:t>Radio Button</a:t>
             </a:r>
@@ -9862,7 +9862,7 @@
             </a:avLst>
           </a:prstGeom>
           <a:solidFill>
-            <a:srgbClr val="2F6B4F"/>
+            <a:srgbClr val="0D7043"/>
           </a:solidFill>
           <a:ln/>
         </p:spPr>
@@ -9914,11 +9914,11 @@
             <a:r>
               <a:rPr lang="en-US" sz="1100" dirty="0">
                 <a:solidFill>
-                  <a:srgbClr val="333333"/>
-                </a:solidFill>
-                <a:latin typeface="Arial" pitchFamily="34" charset="0"/>
-                <a:ea typeface="Arial" pitchFamily="34" charset="-122"/>
-                <a:cs typeface="Arial" pitchFamily="34" charset="-120"/>
+                  <a:srgbClr val="18231E"/>
+                </a:solidFill>
+                <a:latin typeface="Inter" pitchFamily="34" charset="0"/>
+                <a:ea typeface="Inter" pitchFamily="34" charset="-122"/>
+                <a:cs typeface="Inter" pitchFamily="34" charset="-120"/>
               </a:rPr>
               <a:t>Toggle</a:t>
             </a:r>
@@ -9947,7 +9947,7 @@
           </a:solidFill>
           <a:ln w="15875">
             <a:solidFill>
-              <a:srgbClr val="DDE3DC"/>
+              <a:srgbClr val="E8F4EE"/>
             </a:solidFill>
             <a:prstDash val="solid"/>
           </a:ln>
@@ -9980,11 +9980,11 @@
             <a:r>
               <a:rPr lang="en-US" sz="1000" dirty="0">
                 <a:solidFill>
-                  <a:srgbClr val="8C9188"/>
-                </a:solidFill>
-                <a:latin typeface="Arial" pitchFamily="34" charset="0"/>
-                <a:ea typeface="Arial" pitchFamily="34" charset="-122"/>
-                <a:cs typeface="Arial" pitchFamily="34" charset="-120"/>
+                  <a:srgbClr val="66756D"/>
+                </a:solidFill>
+                <a:latin typeface="Inter" pitchFamily="34" charset="0"/>
+                <a:ea typeface="Inter" pitchFamily="34" charset="-122"/>
+                <a:cs typeface="Inter" pitchFamily="34" charset="-120"/>
               </a:rPr>
               <a:t>Text Input</a:t>
             </a:r>
@@ -10013,7 +10013,7 @@
           </a:solidFill>
           <a:ln w="15875">
             <a:solidFill>
-              <a:srgbClr val="DDE3DC"/>
+              <a:srgbClr val="E8F4EE"/>
             </a:solidFill>
             <a:prstDash val="solid"/>
           </a:ln>
@@ -10046,11 +10046,11 @@
             <a:r>
               <a:rPr lang="en-US" sz="1000" dirty="0">
                 <a:solidFill>
-                  <a:srgbClr val="8C9188"/>
-                </a:solidFill>
-                <a:latin typeface="Arial" pitchFamily="34" charset="0"/>
-                <a:ea typeface="Arial" pitchFamily="34" charset="-122"/>
-                <a:cs typeface="Arial" pitchFamily="34" charset="-120"/>
+                  <a:srgbClr val="66756D"/>
+                </a:solidFill>
+                <a:latin typeface="Inter" pitchFamily="34" charset="0"/>
+                <a:ea typeface="Inter" pitchFamily="34" charset="-122"/>
+                <a:cs typeface="Inter" pitchFamily="34" charset="-120"/>
               </a:rPr>
               <a:t>Dropdown  ▾</a:t>
             </a:r>
@@ -10075,7 +10075,7 @@
             </a:avLst>
           </a:prstGeom>
           <a:solidFill>
-            <a:srgbClr val="DDE3DC"/>
+            <a:srgbClr val="E8F4EE"/>
           </a:solidFill>
           <a:ln/>
         </p:spPr>
@@ -10097,7 +10097,7 @@
             </a:avLst>
           </a:prstGeom>
           <a:solidFill>
-            <a:srgbClr val="2F6B4F"/>
+            <a:srgbClr val="0D7043"/>
           </a:solidFill>
           <a:ln/>
         </p:spPr>
@@ -10129,11 +10129,11 @@
             <a:r>
               <a:rPr lang="en-US" sz="900" i="1" dirty="0">
                 <a:solidFill>
-                  <a:srgbClr val="8C9188"/>
-                </a:solidFill>
-                <a:latin typeface="Arial" pitchFamily="34" charset="0"/>
-                <a:ea typeface="Arial" pitchFamily="34" charset="-122"/>
-                <a:cs typeface="Arial" pitchFamily="34" charset="-120"/>
+                  <a:srgbClr val="66756D"/>
+                </a:solidFill>
+                <a:latin typeface="Inter" pitchFamily="34" charset="0"/>
+                <a:ea typeface="Inter" pitchFamily="34" charset="-122"/>
+                <a:cs typeface="Inter" pitchFamily="34" charset="-120"/>
               </a:rPr>
               <a:t>Progress — 60%</a:t>
             </a:r>
@@ -10168,11 +10168,11 @@
             <a:r>
               <a:rPr lang="en-US" sz="1000" b="1" spc="100" kern="0" dirty="0">
                 <a:solidFill>
-                  <a:srgbClr val="8C9188"/>
-                </a:solidFill>
-                <a:latin typeface="Arial" pitchFamily="34" charset="0"/>
-                <a:ea typeface="Arial" pitchFamily="34" charset="-122"/>
-                <a:cs typeface="Arial" pitchFamily="34" charset="-120"/>
+                  <a:srgbClr val="66756D"/>
+                </a:solidFill>
+                <a:latin typeface="Inter" pitchFamily="34" charset="0"/>
+                <a:ea typeface="Inter" pitchFamily="34" charset="-122"/>
+                <a:cs typeface="Inter" pitchFamily="34" charset="-120"/>
               </a:rPr>
               <a:t>NUMBER BADGES</a:t>
             </a:r>
@@ -10195,7 +10195,7 @@
             <a:avLst/>
           </a:prstGeom>
           <a:solidFill>
-            <a:srgbClr val="2F6B4F"/>
+            <a:srgbClr val="0D7043"/>
           </a:solidFill>
           <a:ln/>
         </p:spPr>
@@ -10229,9 +10229,9 @@
                 <a:solidFill>
                   <a:srgbClr val="FFFFFF"/>
                 </a:solidFill>
-                <a:latin typeface="Arial" pitchFamily="34" charset="0"/>
-                <a:ea typeface="Arial" pitchFamily="34" charset="-122"/>
-                <a:cs typeface="Arial" pitchFamily="34" charset="-120"/>
+                <a:latin typeface="Inter" pitchFamily="34" charset="0"/>
+                <a:ea typeface="Inter" pitchFamily="34" charset="-122"/>
+                <a:cs typeface="Inter" pitchFamily="34" charset="-120"/>
               </a:rPr>
               <a:t>01</a:t>
             </a:r>
@@ -10254,7 +10254,7 @@
             <a:avLst/>
           </a:prstGeom>
           <a:solidFill>
-            <a:srgbClr val="A8C9C0"/>
+            <a:srgbClr val="48B855"/>
           </a:solidFill>
           <a:ln/>
         </p:spPr>
@@ -10286,11 +10286,11 @@
             <a:r>
               <a:rPr lang="en-US" sz="1200" b="1" dirty="0">
                 <a:solidFill>
-                  <a:srgbClr val="1F4735"/>
-                </a:solidFill>
-                <a:latin typeface="Arial" pitchFamily="34" charset="0"/>
-                <a:ea typeface="Arial" pitchFamily="34" charset="-122"/>
-                <a:cs typeface="Arial" pitchFamily="34" charset="-120"/>
+                  <a:srgbClr val="0F5B37"/>
+                </a:solidFill>
+                <a:latin typeface="Inter" pitchFamily="34" charset="0"/>
+                <a:ea typeface="Inter" pitchFamily="34" charset="-122"/>
+                <a:cs typeface="Inter" pitchFamily="34" charset="-120"/>
               </a:rPr>
               <a:t>02</a:t>
             </a:r>
@@ -10313,7 +10313,7 @@
             <a:avLst/>
           </a:prstGeom>
           <a:solidFill>
-            <a:srgbClr val="C9A227"/>
+            <a:srgbClr val="B5D60C"/>
           </a:solidFill>
           <a:ln/>
         </p:spPr>
@@ -10347,9 +10347,9 @@
                 <a:solidFill>
                   <a:srgbClr val="FFFFFF"/>
                 </a:solidFill>
-                <a:latin typeface="Arial" pitchFamily="34" charset="0"/>
-                <a:ea typeface="Arial" pitchFamily="34" charset="-122"/>
-                <a:cs typeface="Arial" pitchFamily="34" charset="-120"/>
+                <a:latin typeface="Inter" pitchFamily="34" charset="0"/>
+                <a:ea typeface="Inter" pitchFamily="34" charset="-122"/>
+                <a:cs typeface="Inter" pitchFamily="34" charset="-120"/>
               </a:rPr>
               <a:t>03</a:t>
             </a:r>
@@ -10384,11 +10384,11 @@
             <a:r>
               <a:rPr lang="en-US" sz="1000" b="1" spc="100" kern="0" dirty="0">
                 <a:solidFill>
-                  <a:srgbClr val="2F6B4F"/>
-                </a:solidFill>
-                <a:latin typeface="Arial" pitchFamily="34" charset="0"/>
-                <a:ea typeface="Arial" pitchFamily="34" charset="-122"/>
-                <a:cs typeface="Arial" pitchFamily="34" charset="-120"/>
+                  <a:srgbClr val="0D7043"/>
+                </a:solidFill>
+                <a:latin typeface="Inter" pitchFamily="34" charset="0"/>
+                <a:ea typeface="Inter" pitchFamily="34" charset="-122"/>
+                <a:cs typeface="Inter" pitchFamily="34" charset="-120"/>
               </a:rPr>
               <a:t>DO'S</a:t>
             </a:r>
@@ -10423,11 +10423,11 @@
             <a:r>
               <a:rPr lang="en-US" sz="950" dirty="0">
                 <a:solidFill>
-                  <a:srgbClr val="333333"/>
-                </a:solidFill>
-                <a:latin typeface="Arial" pitchFamily="34" charset="0"/>
-                <a:ea typeface="Arial" pitchFamily="34" charset="-122"/>
-                <a:cs typeface="Arial" pitchFamily="34" charset="-120"/>
+                  <a:srgbClr val="18231E"/>
+                </a:solidFill>
+                <a:latin typeface="Inter" pitchFamily="34" charset="0"/>
+                <a:ea typeface="Inter" pitchFamily="34" charset="-122"/>
+                <a:cs typeface="Inter" pitchFamily="34" charset="-120"/>
               </a:rPr>
               <a:t>✓  Use green for authority &amp; trust</a:t>
             </a:r>
@@ -10462,11 +10462,11 @@
             <a:r>
               <a:rPr lang="en-US" sz="950" dirty="0">
                 <a:solidFill>
-                  <a:srgbClr val="333333"/>
-                </a:solidFill>
-                <a:latin typeface="Arial" pitchFamily="34" charset="0"/>
-                <a:ea typeface="Arial" pitchFamily="34" charset="-122"/>
-                <a:cs typeface="Arial" pitchFamily="34" charset="-120"/>
+                  <a:srgbClr val="18231E"/>
+                </a:solidFill>
+                <a:latin typeface="Inter" pitchFamily="34" charset="0"/>
+                <a:ea typeface="Inter" pitchFamily="34" charset="-122"/>
+                <a:cs typeface="Inter" pitchFamily="34" charset="-120"/>
               </a:rPr>
               <a:t>✓  Keep layouts clean &amp; spacious</a:t>
             </a:r>
@@ -10501,13 +10501,13 @@
             <a:r>
               <a:rPr lang="en-US" sz="950" dirty="0">
                 <a:solidFill>
-                  <a:srgbClr val="333333"/>
-                </a:solidFill>
-                <a:latin typeface="Arial" pitchFamily="34" charset="0"/>
-                <a:ea typeface="Arial" pitchFamily="34" charset="-122"/>
-                <a:cs typeface="Arial" pitchFamily="34" charset="-120"/>
-              </a:rPr>
-              <a:t>✓  Highlight with gold sparingly</a:t>
+                  <a:srgbClr val="18231E"/>
+                </a:solidFill>
+                <a:latin typeface="Inter" pitchFamily="34" charset="0"/>
+                <a:ea typeface="Inter" pitchFamily="34" charset="-122"/>
+                <a:cs typeface="Inter" pitchFamily="34" charset="-120"/>
+              </a:rPr>
+              <a:t>✓  Highlight with lime sparingly</a:t>
             </a:r>
             <a:endParaRPr lang="en-US" sz="950" dirty="0"/>
           </a:p>
@@ -10540,11 +10540,11 @@
             <a:r>
               <a:rPr lang="en-US" sz="950" dirty="0">
                 <a:solidFill>
-                  <a:srgbClr val="333333"/>
-                </a:solidFill>
-                <a:latin typeface="Arial" pitchFamily="34" charset="0"/>
-                <a:ea typeface="Arial" pitchFamily="34" charset="-122"/>
-                <a:cs typeface="Arial" pitchFamily="34" charset="-120"/>
+                  <a:srgbClr val="18231E"/>
+                </a:solidFill>
+                <a:latin typeface="Inter" pitchFamily="34" charset="0"/>
+                <a:ea typeface="Inter" pitchFamily="34" charset="-122"/>
+                <a:cs typeface="Inter" pitchFamily="34" charset="-120"/>
               </a:rPr>
               <a:t>✓  Maintain strong contrast</a:t>
             </a:r>
@@ -10581,9 +10581,9 @@
                 <a:solidFill>
                   <a:srgbClr val="B23A3A"/>
                 </a:solidFill>
-                <a:latin typeface="Arial" pitchFamily="34" charset="0"/>
-                <a:ea typeface="Arial" pitchFamily="34" charset="-122"/>
-                <a:cs typeface="Arial" pitchFamily="34" charset="-120"/>
+                <a:latin typeface="Inter" pitchFamily="34" charset="0"/>
+                <a:ea typeface="Inter" pitchFamily="34" charset="-122"/>
+                <a:cs typeface="Inter" pitchFamily="34" charset="-120"/>
               </a:rPr>
               <a:t>DON'TS</a:t>
             </a:r>
@@ -10618,13 +10618,13 @@
             <a:r>
               <a:rPr lang="en-US" sz="950" dirty="0">
                 <a:solidFill>
-                  <a:srgbClr val="333333"/>
-                </a:solidFill>
-                <a:latin typeface="Arial" pitchFamily="34" charset="0"/>
-                <a:ea typeface="Arial" pitchFamily="34" charset="-122"/>
-                <a:cs typeface="Arial" pitchFamily="34" charset="-120"/>
-              </a:rPr>
-              <a:t>✕  Don't overuse gold</a:t>
+                  <a:srgbClr val="18231E"/>
+                </a:solidFill>
+                <a:latin typeface="Inter" pitchFamily="34" charset="0"/>
+                <a:ea typeface="Inter" pitchFamily="34" charset="-122"/>
+                <a:cs typeface="Inter" pitchFamily="34" charset="-120"/>
+              </a:rPr>
+              <a:t>✕  Don't overuse lime</a:t>
             </a:r>
             <a:endParaRPr lang="en-US" sz="950" dirty="0"/>
           </a:p>
@@ -10657,11 +10657,11 @@
             <a:r>
               <a:rPr lang="en-US" sz="950" dirty="0">
                 <a:solidFill>
-                  <a:srgbClr val="333333"/>
-                </a:solidFill>
-                <a:latin typeface="Arial" pitchFamily="34" charset="0"/>
-                <a:ea typeface="Arial" pitchFamily="34" charset="-122"/>
-                <a:cs typeface="Arial" pitchFamily="34" charset="-120"/>
+                  <a:srgbClr val="18231E"/>
+                </a:solidFill>
+                <a:latin typeface="Inter" pitchFamily="34" charset="0"/>
+                <a:ea typeface="Inter" pitchFamily="34" charset="-122"/>
+                <a:cs typeface="Inter" pitchFamily="34" charset="-120"/>
               </a:rPr>
               <a:t>✕  Don't crowd the layout</a:t>
             </a:r>
@@ -10696,11 +10696,11 @@
             <a:r>
               <a:rPr lang="en-US" sz="950" dirty="0">
                 <a:solidFill>
-                  <a:srgbClr val="333333"/>
-                </a:solidFill>
-                <a:latin typeface="Arial" pitchFamily="34" charset="0"/>
-                <a:ea typeface="Arial" pitchFamily="34" charset="-122"/>
-                <a:cs typeface="Arial" pitchFamily="34" charset="-120"/>
+                  <a:srgbClr val="18231E"/>
+                </a:solidFill>
+                <a:latin typeface="Inter" pitchFamily="34" charset="0"/>
+                <a:ea typeface="Inter" pitchFamily="34" charset="-122"/>
+                <a:cs typeface="Inter" pitchFamily="34" charset="-120"/>
               </a:rPr>
               <a:t>✕  Don't use low-contrast text</a:t>
             </a:r>
@@ -10735,11 +10735,11 @@
             <a:r>
               <a:rPr lang="en-US" sz="850" spc="120" kern="0" dirty="0">
                 <a:solidFill>
-                  <a:srgbClr val="B7BEB6"/>
-                </a:solidFill>
-                <a:latin typeface="Arial" pitchFamily="34" charset="0"/>
-                <a:ea typeface="Arial" pitchFamily="34" charset="-122"/>
-                <a:cs typeface="Arial" pitchFamily="34" charset="-120"/>
+                  <a:srgbClr val="66756D"/>
+                </a:solidFill>
+                <a:latin typeface="Inter" pitchFamily="34" charset="0"/>
+                <a:ea typeface="Inter" pitchFamily="34" charset="-122"/>
+                <a:cs typeface="Inter" pitchFamily="34" charset="-120"/>
               </a:rPr>
               <a:t>ORENA SOLUTIONS — BRAND PLAYBOOK</a:t>
             </a:r>
@@ -10761,7 +10761,7 @@
     <p:bg>
       <p:bgPr>
         <a:solidFill>
-          <a:srgbClr val="FAFAF8"/>
+          <a:srgbClr val="FAFCF9"/>
         </a:solidFill>
       </p:bgPr>
     </p:bg>
@@ -10806,11 +10806,11 @@
             <a:r>
               <a:rPr lang="en-US" sz="1100" b="1" spc="100" kern="0" dirty="0">
                 <a:solidFill>
-                  <a:srgbClr val="6E7A70"/>
-                </a:solidFill>
-                <a:latin typeface="Arial" pitchFamily="34" charset="0"/>
-                <a:ea typeface="Arial" pitchFamily="34" charset="-122"/>
-                <a:cs typeface="Arial" pitchFamily="34" charset="-120"/>
+                  <a:srgbClr val="66756D"/>
+                </a:solidFill>
+                <a:latin typeface="Inter" pitchFamily="34" charset="0"/>
+                <a:ea typeface="Inter" pitchFamily="34" charset="-122"/>
+                <a:cs typeface="Inter" pitchFamily="34" charset="-120"/>
               </a:rPr>
               <a:t>Visual Devices</a:t>
             </a:r>
@@ -10845,11 +10845,11 @@
             <a:r>
               <a:rPr lang="en-US" sz="1100" spc="100" kern="0" dirty="0">
                 <a:solidFill>
-                  <a:srgbClr val="6E7A70"/>
-                </a:solidFill>
-                <a:latin typeface="Arial" pitchFamily="34" charset="0"/>
-                <a:ea typeface="Arial" pitchFamily="34" charset="-122"/>
-                <a:cs typeface="Arial" pitchFamily="34" charset="-120"/>
+                  <a:srgbClr val="66756D"/>
+                </a:solidFill>
+                <a:latin typeface="Inter" pitchFamily="34" charset="0"/>
+                <a:ea typeface="Inter" pitchFamily="34" charset="-122"/>
+                <a:cs typeface="Inter" pitchFamily="34" charset="-120"/>
               </a:rPr>
               <a:t>Application Examples</a:t>
             </a:r>
@@ -10887,11 +10887,11 @@
             <a:r>
               <a:rPr lang="en-US" sz="1200" dirty="0">
                 <a:solidFill>
-                  <a:srgbClr val="333333"/>
-                </a:solidFill>
-                <a:latin typeface="Arial" pitchFamily="34" charset="0"/>
-                <a:ea typeface="Arial" pitchFamily="34" charset="-122"/>
-                <a:cs typeface="Arial" pitchFamily="34" charset="-120"/>
+                  <a:srgbClr val="18231E"/>
+                </a:solidFill>
+                <a:latin typeface="Inter" pitchFamily="34" charset="0"/>
+                <a:ea typeface="Inter" pitchFamily="34" charset="-122"/>
+                <a:cs typeface="Inter" pitchFamily="34" charset="-120"/>
               </a:rPr>
               <a:t>How the identity comes together across real touchpoints — from business cards to social profiles.</a:t>
             </a:r>
@@ -10920,13 +10920,13 @@
           </a:solidFill>
           <a:ln w="12700">
             <a:solidFill>
-              <a:srgbClr val="E4E1D9"/>
+              <a:srgbClr val="E8F4EE"/>
             </a:solidFill>
             <a:prstDash val="solid"/>
           </a:ln>
           <a:effectLst>
             <a:outerShdw sx="100000" sy="100000" kx="0" ky="0" algn="bl" rotWithShape="0" blurRad="101600" dist="38100" dir="5400000">
-              <a:srgbClr val="000000">
+              <a:srgbClr val="18231E">
                 <a:alpha val="12000"/>
               </a:srgbClr>
             </a:outerShdw>
@@ -10949,8 +10949,8 @@
         </p:blipFill>
         <p:spPr>
           <a:xfrm>
-            <a:off x="3950208" y="1463040"/>
-            <a:ext cx="256032" cy="438912"/>
+            <a:off x="4001504" y="1463040"/>
+            <a:ext cx="153441" cy="438912"/>
           </a:xfrm>
           <a:prstGeom prst="rect">
             <a:avLst/>
@@ -10984,11 +10984,11 @@
             <a:r>
               <a:rPr lang="en-US" sz="1300" b="1" dirty="0">
                 <a:solidFill>
-                  <a:srgbClr val="2F6B4F"/>
-                </a:solidFill>
-                <a:latin typeface="Georgia" pitchFamily="34" charset="0"/>
-                <a:ea typeface="Georgia" pitchFamily="34" charset="-122"/>
-                <a:cs typeface="Georgia" pitchFamily="34" charset="-120"/>
+                  <a:srgbClr val="0D7043"/>
+                </a:solidFill>
+                <a:latin typeface="Poppins" pitchFamily="34" charset="0"/>
+                <a:ea typeface="Poppins" pitchFamily="34" charset="-122"/>
+                <a:cs typeface="Poppins" pitchFamily="34" charset="-120"/>
               </a:rPr>
               <a:t>John Doe</a:t>
             </a:r>
@@ -11023,11 +11023,11 @@
             <a:r>
               <a:rPr lang="en-US" sz="900" dirty="0">
                 <a:solidFill>
-                  <a:srgbClr val="8C9188"/>
-                </a:solidFill>
-                <a:latin typeface="Arial" pitchFamily="34" charset="0"/>
-                <a:ea typeface="Arial" pitchFamily="34" charset="-122"/>
-                <a:cs typeface="Arial" pitchFamily="34" charset="-120"/>
+                  <a:srgbClr val="66756D"/>
+                </a:solidFill>
+                <a:latin typeface="Inter" pitchFamily="34" charset="0"/>
+                <a:ea typeface="Inter" pitchFamily="34" charset="-122"/>
+                <a:cs typeface="Inter" pitchFamily="34" charset="-120"/>
               </a:rPr>
               <a:t>Senior Engineer</a:t>
             </a:r>
@@ -11065,11 +11065,11 @@
             <a:r>
               <a:rPr lang="en-US" sz="800" dirty="0">
                 <a:solidFill>
-                  <a:srgbClr val="333333"/>
-                </a:solidFill>
-                <a:latin typeface="Arial" pitchFamily="34" charset="0"/>
-                <a:ea typeface="Arial" pitchFamily="34" charset="-122"/>
-                <a:cs typeface="Arial" pitchFamily="34" charset="-120"/>
+                  <a:srgbClr val="18231E"/>
+                </a:solidFill>
+                <a:latin typeface="Inter" pitchFamily="34" charset="0"/>
+                <a:ea typeface="Inter" pitchFamily="34" charset="-122"/>
+                <a:cs typeface="Inter" pitchFamily="34" charset="-120"/>
               </a:rPr>
               <a:t>john.doe@orena.com</a:t>
             </a:r>
@@ -11085,11 +11085,11 @@
             <a:r>
               <a:rPr lang="en-US" sz="800" dirty="0">
                 <a:solidFill>
-                  <a:srgbClr val="333333"/>
-                </a:solidFill>
-                <a:latin typeface="Arial" pitchFamily="34" charset="0"/>
-                <a:ea typeface="Arial" pitchFamily="34" charset="-122"/>
-                <a:cs typeface="Arial" pitchFamily="34" charset="-120"/>
+                  <a:srgbClr val="18231E"/>
+                </a:solidFill>
+                <a:latin typeface="Inter" pitchFamily="34" charset="0"/>
+                <a:ea typeface="Inter" pitchFamily="34" charset="-122"/>
+                <a:cs typeface="Inter" pitchFamily="34" charset="-120"/>
               </a:rPr>
               <a:t>+91 98765 43210</a:t>
             </a:r>
@@ -11114,12 +11114,12 @@
             </a:avLst>
           </a:prstGeom>
           <a:solidFill>
-            <a:srgbClr val="2F6B4F"/>
+            <a:srgbClr val="0D7043"/>
           </a:solidFill>
           <a:ln/>
           <a:effectLst>
             <a:outerShdw sx="100000" sy="100000" kx="0" ky="0" algn="bl" rotWithShape="0" blurRad="101600" dist="38100" dir="5400000">
-              <a:srgbClr val="000000">
+              <a:srgbClr val="18231E">
                 <a:alpha val="12000"/>
               </a:srgbClr>
             </a:outerShdw>
@@ -11142,8 +11142,8 @@
         </p:blipFill>
         <p:spPr>
           <a:xfrm>
-            <a:off x="8001000" y="1760220"/>
-            <a:ext cx="2103120" cy="1051560"/>
+            <a:off x="8391128" y="1760220"/>
+            <a:ext cx="1322865" cy="1051560"/>
           </a:xfrm>
           <a:prstGeom prst="rect">
             <a:avLst/>
@@ -11177,11 +11177,11 @@
             <a:r>
               <a:rPr lang="en-US" sz="1000" b="1" spc="100" kern="0" dirty="0">
                 <a:solidFill>
-                  <a:srgbClr val="8C9188"/>
-                </a:solidFill>
-                <a:latin typeface="Arial" pitchFamily="34" charset="0"/>
-                <a:ea typeface="Arial" pitchFamily="34" charset="-122"/>
-                <a:cs typeface="Arial" pitchFamily="34" charset="-120"/>
+                  <a:srgbClr val="66756D"/>
+                </a:solidFill>
+                <a:latin typeface="Inter" pitchFamily="34" charset="0"/>
+                <a:ea typeface="Inter" pitchFamily="34" charset="-122"/>
+                <a:cs typeface="Inter" pitchFamily="34" charset="-120"/>
               </a:rPr>
               <a:t>SOCIAL &amp; APP ICON</a:t>
             </a:r>
@@ -11206,7 +11206,7 @@
             </a:avLst>
           </a:prstGeom>
           <a:solidFill>
-            <a:srgbClr val="2F6B4F"/>
+            <a:srgbClr val="0D7043"/>
           </a:solidFill>
           <a:ln/>
         </p:spPr>
@@ -11227,8 +11227,8 @@
         </p:blipFill>
         <p:spPr>
           <a:xfrm>
-            <a:off x="4041648" y="4206240"/>
-            <a:ext cx="603504" cy="731520"/>
+            <a:off x="4215532" y="4206240"/>
+            <a:ext cx="255735" cy="731520"/>
           </a:xfrm>
           <a:prstGeom prst="rect">
             <a:avLst/>
@@ -11262,11 +11262,11 @@
             <a:r>
               <a:rPr lang="en-US" sz="1000" b="1" spc="100" kern="0" dirty="0">
                 <a:solidFill>
-                  <a:srgbClr val="8C9188"/>
-                </a:solidFill>
-                <a:latin typeface="Arial" pitchFamily="34" charset="0"/>
-                <a:ea typeface="Arial" pitchFamily="34" charset="-122"/>
-                <a:cs typeface="Arial" pitchFamily="34" charset="-120"/>
+                  <a:srgbClr val="66756D"/>
+                </a:solidFill>
+                <a:latin typeface="Inter" pitchFamily="34" charset="0"/>
+                <a:ea typeface="Inter" pitchFamily="34" charset="-122"/>
+                <a:cs typeface="Inter" pitchFamily="34" charset="-120"/>
               </a:rPr>
               <a:t>DOCUMENT COVER</a:t>
             </a:r>
@@ -11291,7 +11291,7 @@
             </a:avLst>
           </a:prstGeom>
           <a:solidFill>
-            <a:srgbClr val="DDE3DC"/>
+            <a:srgbClr val="E8F4EE"/>
           </a:solidFill>
           <a:ln/>
         </p:spPr>
@@ -11312,8 +11312,8 @@
         </p:blipFill>
         <p:spPr>
           <a:xfrm>
-            <a:off x="5623560" y="4160520"/>
-            <a:ext cx="320040" cy="548640"/>
+            <a:off x="5687680" y="4160520"/>
+            <a:ext cx="191801" cy="548640"/>
           </a:xfrm>
           <a:prstGeom prst="rect">
             <a:avLst/>
@@ -11350,11 +11350,11 @@
             <a:r>
               <a:rPr lang="en-US" sz="1300" b="1" dirty="0">
                 <a:solidFill>
-                  <a:srgbClr val="2F6B4F"/>
-                </a:solidFill>
-                <a:latin typeface="Georgia" pitchFamily="34" charset="0"/>
-                <a:ea typeface="Georgia" pitchFamily="34" charset="-122"/>
-                <a:cs typeface="Georgia" pitchFamily="34" charset="-120"/>
+                  <a:srgbClr val="0D7043"/>
+                </a:solidFill>
+                <a:latin typeface="Poppins" pitchFamily="34" charset="0"/>
+                <a:ea typeface="Poppins" pitchFamily="34" charset="-122"/>
+                <a:cs typeface="Poppins" pitchFamily="34" charset="-120"/>
               </a:rPr>
               <a:t>Preferred</a:t>
             </a:r>
@@ -11370,11 +11370,11 @@
             <a:r>
               <a:rPr lang="en-US" sz="1300" b="1" dirty="0">
                 <a:solidFill>
-                  <a:srgbClr val="2F6B4F"/>
-                </a:solidFill>
-                <a:latin typeface="Georgia" pitchFamily="34" charset="0"/>
-                <a:ea typeface="Georgia" pitchFamily="34" charset="-122"/>
-                <a:cs typeface="Georgia" pitchFamily="34" charset="-120"/>
+                  <a:srgbClr val="0D7043"/>
+                </a:solidFill>
+                <a:latin typeface="Poppins" pitchFamily="34" charset="0"/>
+                <a:ea typeface="Poppins" pitchFamily="34" charset="-122"/>
+                <a:cs typeface="Poppins" pitchFamily="34" charset="-120"/>
               </a:rPr>
               <a:t>Engineers</a:t>
             </a:r>
@@ -11390,11 +11390,11 @@
             <a:r>
               <a:rPr lang="en-US" sz="1300" b="1" dirty="0">
                 <a:solidFill>
-                  <a:srgbClr val="2F6B4F"/>
-                </a:solidFill>
-                <a:latin typeface="Georgia" pitchFamily="34" charset="0"/>
-                <a:ea typeface="Georgia" pitchFamily="34" charset="-122"/>
-                <a:cs typeface="Georgia" pitchFamily="34" charset="-120"/>
+                  <a:srgbClr val="0D7043"/>
+                </a:solidFill>
+                <a:latin typeface="Poppins" pitchFamily="34" charset="0"/>
+                <a:ea typeface="Poppins" pitchFamily="34" charset="-122"/>
+                <a:cs typeface="Poppins" pitchFamily="34" charset="-120"/>
               </a:rPr>
               <a:t>Playbook</a:t>
             </a:r>
@@ -11429,11 +11429,11 @@
             <a:r>
               <a:rPr lang="en-US" sz="1000" b="1" spc="100" kern="0" dirty="0">
                 <a:solidFill>
-                  <a:srgbClr val="8C9188"/>
-                </a:solidFill>
-                <a:latin typeface="Arial" pitchFamily="34" charset="0"/>
-                <a:ea typeface="Arial" pitchFamily="34" charset="-122"/>
-                <a:cs typeface="Arial" pitchFamily="34" charset="-120"/>
+                  <a:srgbClr val="66756D"/>
+                </a:solidFill>
+                <a:latin typeface="Inter" pitchFamily="34" charset="0"/>
+                <a:ea typeface="Inter" pitchFamily="34" charset="-122"/>
+                <a:cs typeface="Inter" pitchFamily="34" charset="-120"/>
               </a:rPr>
               <a:t>SLIDE TEMPLATE</a:t>
             </a:r>
@@ -11462,7 +11462,7 @@
           </a:solidFill>
           <a:ln w="12700">
             <a:solidFill>
-              <a:srgbClr val="E4E1D9"/>
+              <a:srgbClr val="E8F4EE"/>
             </a:solidFill>
             <a:prstDash val="solid"/>
           </a:ln>
@@ -11483,7 +11483,7 @@
             <a:avLst/>
           </a:prstGeom>
           <a:solidFill>
-            <a:srgbClr val="2F6B4F"/>
+            <a:srgbClr val="0D7043"/>
           </a:solidFill>
           <a:ln/>
         </p:spPr>
@@ -11517,9 +11517,9 @@
                 <a:solidFill>
                   <a:srgbClr val="FFFFFF"/>
                 </a:solidFill>
-                <a:latin typeface="Georgia" pitchFamily="34" charset="0"/>
-                <a:ea typeface="Georgia" pitchFamily="34" charset="-122"/>
-                <a:cs typeface="Georgia" pitchFamily="34" charset="-120"/>
+                <a:latin typeface="Poppins" pitchFamily="34" charset="0"/>
+                <a:ea typeface="Poppins" pitchFamily="34" charset="-122"/>
+                <a:cs typeface="Poppins" pitchFamily="34" charset="-120"/>
               </a:rPr>
               <a:t>Crafting Preferred Engineers</a:t>
             </a:r>
@@ -11544,7 +11544,7 @@
             </a:avLst>
           </a:prstGeom>
           <a:solidFill>
-            <a:srgbClr val="A8C9C0"/>
+            <a:srgbClr val="48B855"/>
           </a:solidFill>
           <a:ln/>
         </p:spPr>
@@ -11566,7 +11566,7 @@
             </a:avLst>
           </a:prstGeom>
           <a:solidFill>
-            <a:srgbClr val="DDE3DC"/>
+            <a:srgbClr val="E8F4EE"/>
           </a:solidFill>
           <a:ln/>
         </p:spPr>
@@ -11588,7 +11588,7 @@
             </a:avLst>
           </a:prstGeom>
           <a:solidFill>
-            <a:srgbClr val="DDE3DC"/>
+            <a:srgbClr val="E8F4EE"/>
           </a:solidFill>
           <a:ln/>
         </p:spPr>
@@ -11620,11 +11620,11 @@
             <a:r>
               <a:rPr lang="en-US" sz="850" spc="120" kern="0" dirty="0">
                 <a:solidFill>
-                  <a:srgbClr val="B7BEB6"/>
-                </a:solidFill>
-                <a:latin typeface="Arial" pitchFamily="34" charset="0"/>
-                <a:ea typeface="Arial" pitchFamily="34" charset="-122"/>
-                <a:cs typeface="Arial" pitchFamily="34" charset="-120"/>
+                  <a:srgbClr val="66756D"/>
+                </a:solidFill>
+                <a:latin typeface="Inter" pitchFamily="34" charset="0"/>
+                <a:ea typeface="Inter" pitchFamily="34" charset="-122"/>
+                <a:cs typeface="Inter" pitchFamily="34" charset="-120"/>
               </a:rPr>
               <a:t>ORENA SOLUTIONS — BRAND PLAYBOOK</a:t>
             </a:r>
@@ -11646,7 +11646,7 @@
     <p:bg>
       <p:bgPr>
         <a:solidFill>
-          <a:srgbClr val="2F6B4F"/>
+          <a:srgbClr val="0D7043"/>
         </a:solidFill>
       </p:bgPr>
     </p:bg>
@@ -11681,7 +11681,7 @@
             </a:avLst>
           </a:prstGeom>
           <a:solidFill>
-            <a:srgbClr val="1F4735"/>
+            <a:srgbClr val="0F5B37"/>
           </a:solidFill>
           <a:ln/>
         </p:spPr>
@@ -11702,8 +11702,8 @@
         </p:blipFill>
         <p:spPr>
           <a:xfrm>
-            <a:off x="5848960" y="2194560"/>
-            <a:ext cx="493776" cy="850392"/>
+            <a:off x="5947202" y="2194560"/>
+            <a:ext cx="297292" cy="850392"/>
           </a:xfrm>
           <a:prstGeom prst="rect">
             <a:avLst/>
@@ -11739,9 +11739,9 @@
                 <a:solidFill>
                   <a:srgbClr val="FFFFFF"/>
                 </a:solidFill>
-                <a:latin typeface="Georgia" pitchFamily="34" charset="0"/>
-                <a:ea typeface="Georgia" pitchFamily="34" charset="-122"/>
-                <a:cs typeface="Georgia" pitchFamily="34" charset="-120"/>
+                <a:latin typeface="Poppins" pitchFamily="34" charset="0"/>
+                <a:ea typeface="Poppins" pitchFamily="34" charset="-122"/>
+                <a:cs typeface="Poppins" pitchFamily="34" charset="-120"/>
               </a:rPr>
               <a:t>Thank you.</a:t>
             </a:r>
@@ -11776,11 +11776,11 @@
             <a:r>
               <a:rPr lang="en-US" sz="1050" dirty="0">
                 <a:solidFill>
-                  <a:srgbClr val="9FBCAC"/>
-                </a:solidFill>
-                <a:latin typeface="Arial" pitchFamily="34" charset="0"/>
-                <a:ea typeface="Arial" pitchFamily="34" charset="-122"/>
-                <a:cs typeface="Arial" pitchFamily="34" charset="-120"/>
+                  <a:srgbClr val="00AF63"/>
+                </a:solidFill>
+                <a:latin typeface="Inter" pitchFamily="34" charset="0"/>
+                <a:ea typeface="Inter" pitchFamily="34" charset="-122"/>
+                <a:cs typeface="Inter" pitchFamily="34" charset="-120"/>
               </a:rPr>
               <a:t>Queries? Contact us at hello@orenasolutions.com</a:t>
             </a:r>
@@ -11802,7 +11802,7 @@
     <p:bg>
       <p:bgPr>
         <a:solidFill>
-          <a:srgbClr val="2F6B4F"/>
+          <a:srgbClr val="0D7043"/>
         </a:solidFill>
       </p:bgPr>
     </p:bg>
@@ -11847,11 +11847,11 @@
             <a:r>
               <a:rPr lang="en-US" sz="1100" b="1" spc="100" kern="0" dirty="0">
                 <a:solidFill>
-                  <a:srgbClr val="C9D6CE"/>
-                </a:solidFill>
-                <a:latin typeface="Arial" pitchFamily="34" charset="0"/>
-                <a:ea typeface="Arial" pitchFamily="34" charset="-122"/>
-                <a:cs typeface="Arial" pitchFamily="34" charset="-120"/>
+                  <a:srgbClr val="E8F4EE"/>
+                </a:solidFill>
+                <a:latin typeface="Inter" pitchFamily="34" charset="0"/>
+                <a:ea typeface="Inter" pitchFamily="34" charset="-122"/>
+                <a:cs typeface="Inter" pitchFamily="34" charset="-120"/>
               </a:rPr>
               <a:t>Contents</a:t>
             </a:r>
@@ -11876,7 +11876,7 @@
           <a:noFill/>
           <a:ln w="12700">
             <a:solidFill>
-              <a:srgbClr val="3C7259"/>
+              <a:srgbClr val="00AF63"/>
             </a:solidFill>
             <a:prstDash val="solid"/>
           </a:ln>
@@ -11899,7 +11899,7 @@
           <a:noFill/>
           <a:ln w="12700">
             <a:solidFill>
-              <a:srgbClr val="3C7259"/>
+              <a:srgbClr val="00AF63"/>
             </a:solidFill>
             <a:prstDash val="solid"/>
           </a:ln>
@@ -11934,9 +11934,9 @@
                 <a:solidFill>
                   <a:srgbClr val="FFFFFF"/>
                 </a:solidFill>
-                <a:latin typeface="Arial" pitchFamily="34" charset="0"/>
-                <a:ea typeface="Arial" pitchFamily="34" charset="-122"/>
-                <a:cs typeface="Arial" pitchFamily="34" charset="-120"/>
+                <a:latin typeface="Inter" pitchFamily="34" charset="0"/>
+                <a:ea typeface="Inter" pitchFamily="34" charset="-122"/>
+                <a:cs typeface="Inter" pitchFamily="34" charset="-120"/>
               </a:rPr>
               <a:t>About</a:t>
             </a:r>
@@ -11971,11 +11971,11 @@
             <a:r>
               <a:rPr lang="en-US" sz="1250" dirty="0">
                 <a:solidFill>
-                  <a:srgbClr val="A9C4B4"/>
-                </a:solidFill>
-                <a:latin typeface="Arial" pitchFamily="34" charset="0"/>
-                <a:ea typeface="Arial" pitchFamily="34" charset="-122"/>
-                <a:cs typeface="Arial" pitchFamily="34" charset="-120"/>
+                  <a:srgbClr val="48B855"/>
+                </a:solidFill>
+                <a:latin typeface="Inter" pitchFamily="34" charset="0"/>
+                <a:ea typeface="Inter" pitchFamily="34" charset="-122"/>
+                <a:cs typeface="Inter" pitchFamily="34" charset="-120"/>
               </a:rPr>
               <a:t>What is Orena</a:t>
             </a:r>
@@ -12010,11 +12010,11 @@
             <a:r>
               <a:rPr lang="en-US" sz="1250" dirty="0">
                 <a:solidFill>
-                  <a:srgbClr val="A9C4B4"/>
-                </a:solidFill>
-                <a:latin typeface="Arial" pitchFamily="34" charset="0"/>
-                <a:ea typeface="Arial" pitchFamily="34" charset="-122"/>
-                <a:cs typeface="Arial" pitchFamily="34" charset="-120"/>
+                  <a:srgbClr val="48B855"/>
+                </a:solidFill>
+                <a:latin typeface="Inter" pitchFamily="34" charset="0"/>
+                <a:ea typeface="Inter" pitchFamily="34" charset="-122"/>
+                <a:cs typeface="Inter" pitchFamily="34" charset="-120"/>
               </a:rPr>
               <a:t>Purpose &amp; Values</a:t>
             </a:r>
@@ -12049,11 +12049,11 @@
             <a:r>
               <a:rPr lang="en-US" sz="1250" dirty="0">
                 <a:solidFill>
-                  <a:srgbClr val="A9C4B4"/>
-                </a:solidFill>
-                <a:latin typeface="Arial" pitchFamily="34" charset="0"/>
-                <a:ea typeface="Arial" pitchFamily="34" charset="-122"/>
-                <a:cs typeface="Arial" pitchFamily="34" charset="-120"/>
+                  <a:srgbClr val="48B855"/>
+                </a:solidFill>
+                <a:latin typeface="Inter" pitchFamily="34" charset="0"/>
+                <a:ea typeface="Inter" pitchFamily="34" charset="-122"/>
+                <a:cs typeface="Inter" pitchFamily="34" charset="-120"/>
               </a:rPr>
               <a:t>Brand Voice</a:t>
             </a:r>
@@ -12090,9 +12090,9 @@
                 <a:solidFill>
                   <a:srgbClr val="FFFFFF"/>
                 </a:solidFill>
-                <a:latin typeface="Arial" pitchFamily="34" charset="0"/>
-                <a:ea typeface="Arial" pitchFamily="34" charset="-122"/>
-                <a:cs typeface="Arial" pitchFamily="34" charset="-120"/>
+                <a:latin typeface="Inter" pitchFamily="34" charset="0"/>
+                <a:ea typeface="Inter" pitchFamily="34" charset="-122"/>
+                <a:cs typeface="Inter" pitchFamily="34" charset="-120"/>
               </a:rPr>
               <a:t>Colors</a:t>
             </a:r>
@@ -12127,11 +12127,11 @@
             <a:r>
               <a:rPr lang="en-US" sz="1250" dirty="0">
                 <a:solidFill>
-                  <a:srgbClr val="A9C4B4"/>
-                </a:solidFill>
-                <a:latin typeface="Arial" pitchFamily="34" charset="0"/>
-                <a:ea typeface="Arial" pitchFamily="34" charset="-122"/>
-                <a:cs typeface="Arial" pitchFamily="34" charset="-120"/>
+                  <a:srgbClr val="48B855"/>
+                </a:solidFill>
+                <a:latin typeface="Inter" pitchFamily="34" charset="0"/>
+                <a:ea typeface="Inter" pitchFamily="34" charset="-122"/>
+                <a:cs typeface="Inter" pitchFamily="34" charset="-120"/>
               </a:rPr>
               <a:t>Core Palette</a:t>
             </a:r>
@@ -12166,11 +12166,11 @@
             <a:r>
               <a:rPr lang="en-US" sz="1250" dirty="0">
                 <a:solidFill>
-                  <a:srgbClr val="A9C4B4"/>
-                </a:solidFill>
-                <a:latin typeface="Arial" pitchFamily="34" charset="0"/>
-                <a:ea typeface="Arial" pitchFamily="34" charset="-122"/>
-                <a:cs typeface="Arial" pitchFamily="34" charset="-120"/>
+                  <a:srgbClr val="48B855"/>
+                </a:solidFill>
+                <a:latin typeface="Inter" pitchFamily="34" charset="0"/>
+                <a:ea typeface="Inter" pitchFamily="34" charset="-122"/>
+                <a:cs typeface="Inter" pitchFamily="34" charset="-120"/>
               </a:rPr>
               <a:t>Proportions &amp; Usage</a:t>
             </a:r>
@@ -12207,9 +12207,9 @@
                 <a:solidFill>
                   <a:srgbClr val="FFFFFF"/>
                 </a:solidFill>
-                <a:latin typeface="Arial" pitchFamily="34" charset="0"/>
-                <a:ea typeface="Arial" pitchFamily="34" charset="-122"/>
-                <a:cs typeface="Arial" pitchFamily="34" charset="-120"/>
+                <a:latin typeface="Inter" pitchFamily="34" charset="0"/>
+                <a:ea typeface="Inter" pitchFamily="34" charset="-122"/>
+                <a:cs typeface="Inter" pitchFamily="34" charset="-120"/>
               </a:rPr>
               <a:t>Logo &amp; Symbol</a:t>
             </a:r>
@@ -12244,11 +12244,11 @@
             <a:r>
               <a:rPr lang="en-US" sz="1250" dirty="0">
                 <a:solidFill>
-                  <a:srgbClr val="A9C4B4"/>
-                </a:solidFill>
-                <a:latin typeface="Arial" pitchFamily="34" charset="0"/>
-                <a:ea typeface="Arial" pitchFamily="34" charset="-122"/>
-                <a:cs typeface="Arial" pitchFamily="34" charset="-120"/>
+                  <a:srgbClr val="48B855"/>
+                </a:solidFill>
+                <a:latin typeface="Inter" pitchFamily="34" charset="0"/>
+                <a:ea typeface="Inter" pitchFamily="34" charset="-122"/>
+                <a:cs typeface="Inter" pitchFamily="34" charset="-120"/>
               </a:rPr>
               <a:t>Logo</a:t>
             </a:r>
@@ -12283,11 +12283,11 @@
             <a:r>
               <a:rPr lang="en-US" sz="1250" dirty="0">
                 <a:solidFill>
-                  <a:srgbClr val="A9C4B4"/>
-                </a:solidFill>
-                <a:latin typeface="Arial" pitchFamily="34" charset="0"/>
-                <a:ea typeface="Arial" pitchFamily="34" charset="-122"/>
-                <a:cs typeface="Arial" pitchFamily="34" charset="-120"/>
+                  <a:srgbClr val="48B855"/>
+                </a:solidFill>
+                <a:latin typeface="Inter" pitchFamily="34" charset="0"/>
+                <a:ea typeface="Inter" pitchFamily="34" charset="-122"/>
+                <a:cs typeface="Inter" pitchFamily="34" charset="-120"/>
               </a:rPr>
               <a:t>Symbol</a:t>
             </a:r>
@@ -12322,11 +12322,11 @@
             <a:r>
               <a:rPr lang="en-US" sz="1250" dirty="0">
                 <a:solidFill>
-                  <a:srgbClr val="A9C4B4"/>
-                </a:solidFill>
-                <a:latin typeface="Arial" pitchFamily="34" charset="0"/>
-                <a:ea typeface="Arial" pitchFamily="34" charset="-122"/>
-                <a:cs typeface="Arial" pitchFamily="34" charset="-120"/>
+                  <a:srgbClr val="48B855"/>
+                </a:solidFill>
+                <a:latin typeface="Inter" pitchFamily="34" charset="0"/>
+                <a:ea typeface="Inter" pitchFamily="34" charset="-122"/>
+                <a:cs typeface="Inter" pitchFamily="34" charset="-120"/>
               </a:rPr>
               <a:t>Guidelines</a:t>
             </a:r>
@@ -12363,9 +12363,9 @@
                 <a:solidFill>
                   <a:srgbClr val="FFFFFF"/>
                 </a:solidFill>
-                <a:latin typeface="Arial" pitchFamily="34" charset="0"/>
-                <a:ea typeface="Arial" pitchFamily="34" charset="-122"/>
-                <a:cs typeface="Arial" pitchFamily="34" charset="-120"/>
+                <a:latin typeface="Inter" pitchFamily="34" charset="0"/>
+                <a:ea typeface="Inter" pitchFamily="34" charset="-122"/>
+                <a:cs typeface="Inter" pitchFamily="34" charset="-120"/>
               </a:rPr>
               <a:t>Typography</a:t>
             </a:r>
@@ -12400,11 +12400,11 @@
             <a:r>
               <a:rPr lang="en-US" sz="1250" dirty="0">
                 <a:solidFill>
-                  <a:srgbClr val="A9C4B4"/>
-                </a:solidFill>
-                <a:latin typeface="Arial" pitchFamily="34" charset="0"/>
-                <a:ea typeface="Arial" pitchFamily="34" charset="-122"/>
-                <a:cs typeface="Arial" pitchFamily="34" charset="-120"/>
+                  <a:srgbClr val="48B855"/>
+                </a:solidFill>
+                <a:latin typeface="Inter" pitchFamily="34" charset="0"/>
+                <a:ea typeface="Inter" pitchFamily="34" charset="-122"/>
+                <a:cs typeface="Inter" pitchFamily="34" charset="-120"/>
               </a:rPr>
               <a:t>Typefaces</a:t>
             </a:r>
@@ -12439,11 +12439,11 @@
             <a:r>
               <a:rPr lang="en-US" sz="1250" dirty="0">
                 <a:solidFill>
-                  <a:srgbClr val="A9C4B4"/>
-                </a:solidFill>
-                <a:latin typeface="Arial" pitchFamily="34" charset="0"/>
-                <a:ea typeface="Arial" pitchFamily="34" charset="-122"/>
-                <a:cs typeface="Arial" pitchFamily="34" charset="-120"/>
+                  <a:srgbClr val="48B855"/>
+                </a:solidFill>
+                <a:latin typeface="Inter" pitchFamily="34" charset="0"/>
+                <a:ea typeface="Inter" pitchFamily="34" charset="-122"/>
+                <a:cs typeface="Inter" pitchFamily="34" charset="-120"/>
               </a:rPr>
               <a:t>Hierarchy</a:t>
             </a:r>
@@ -12480,9 +12480,9 @@
                 <a:solidFill>
                   <a:srgbClr val="FFFFFF"/>
                 </a:solidFill>
-                <a:latin typeface="Arial" pitchFamily="34" charset="0"/>
-                <a:ea typeface="Arial" pitchFamily="34" charset="-122"/>
-                <a:cs typeface="Arial" pitchFamily="34" charset="-120"/>
+                <a:latin typeface="Inter" pitchFamily="34" charset="0"/>
+                <a:ea typeface="Inter" pitchFamily="34" charset="-122"/>
+                <a:cs typeface="Inter" pitchFamily="34" charset="-120"/>
               </a:rPr>
               <a:t>Visual Devices</a:t>
             </a:r>
@@ -12517,11 +12517,11 @@
             <a:r>
               <a:rPr lang="en-US" sz="1250" dirty="0">
                 <a:solidFill>
-                  <a:srgbClr val="A9C4B4"/>
-                </a:solidFill>
-                <a:latin typeface="Arial" pitchFamily="34" charset="0"/>
-                <a:ea typeface="Arial" pitchFamily="34" charset="-122"/>
-                <a:cs typeface="Arial" pitchFamily="34" charset="-120"/>
+                  <a:srgbClr val="48B855"/>
+                </a:solidFill>
+                <a:latin typeface="Inter" pitchFamily="34" charset="0"/>
+                <a:ea typeface="Inter" pitchFamily="34" charset="-122"/>
+                <a:cs typeface="Inter" pitchFamily="34" charset="-120"/>
               </a:rPr>
               <a:t>Iconography &amp; Shapes</a:t>
             </a:r>
@@ -12556,11 +12556,11 @@
             <a:r>
               <a:rPr lang="en-US" sz="1250" dirty="0">
                 <a:solidFill>
-                  <a:srgbClr val="A9C4B4"/>
-                </a:solidFill>
-                <a:latin typeface="Arial" pitchFamily="34" charset="0"/>
-                <a:ea typeface="Arial" pitchFamily="34" charset="-122"/>
-                <a:cs typeface="Arial" pitchFamily="34" charset="-120"/>
+                  <a:srgbClr val="48B855"/>
+                </a:solidFill>
+                <a:latin typeface="Inter" pitchFamily="34" charset="0"/>
+                <a:ea typeface="Inter" pitchFamily="34" charset="-122"/>
+                <a:cs typeface="Inter" pitchFamily="34" charset="-120"/>
               </a:rPr>
               <a:t>Buttons &amp; UI</a:t>
             </a:r>
@@ -12595,11 +12595,11 @@
             <a:r>
               <a:rPr lang="en-US" sz="1250" dirty="0">
                 <a:solidFill>
-                  <a:srgbClr val="A9C4B4"/>
-                </a:solidFill>
-                <a:latin typeface="Arial" pitchFamily="34" charset="0"/>
-                <a:ea typeface="Arial" pitchFamily="34" charset="-122"/>
-                <a:cs typeface="Arial" pitchFamily="34" charset="-120"/>
+                  <a:srgbClr val="48B855"/>
+                </a:solidFill>
+                <a:latin typeface="Inter" pitchFamily="34" charset="0"/>
+                <a:ea typeface="Inter" pitchFamily="34" charset="-122"/>
+                <a:cs typeface="Inter" pitchFamily="34" charset="-120"/>
               </a:rPr>
               <a:t>Applications</a:t>
             </a:r>
@@ -12634,11 +12634,11 @@
             <a:r>
               <a:rPr lang="en-US" sz="850" spc="120" kern="0" dirty="0">
                 <a:solidFill>
-                  <a:srgbClr val="6E8577"/>
-                </a:solidFill>
-                <a:latin typeface="Arial" pitchFamily="34" charset="0"/>
-                <a:ea typeface="Arial" pitchFamily="34" charset="-122"/>
-                <a:cs typeface="Arial" pitchFamily="34" charset="-120"/>
+                  <a:srgbClr val="48B855"/>
+                </a:solidFill>
+                <a:latin typeface="Inter" pitchFamily="34" charset="0"/>
+                <a:ea typeface="Inter" pitchFamily="34" charset="-122"/>
+                <a:cs typeface="Inter" pitchFamily="34" charset="-120"/>
               </a:rPr>
               <a:t>ORENA SOLUTIONS — BRAND PLAYBOOK</a:t>
             </a:r>
@@ -12660,7 +12660,7 @@
     <p:bg>
       <p:bgPr>
         <a:solidFill>
-          <a:srgbClr val="2F6B4F"/>
+          <a:srgbClr val="0D7043"/>
         </a:solidFill>
       </p:bgPr>
     </p:bg>
@@ -12705,11 +12705,11 @@
             <a:r>
               <a:rPr lang="en-US" sz="1100" b="1" spc="100" kern="0" dirty="0">
                 <a:solidFill>
-                  <a:srgbClr val="C9D6CE"/>
-                </a:solidFill>
-                <a:latin typeface="Arial" pitchFamily="34" charset="0"/>
-                <a:ea typeface="Arial" pitchFamily="34" charset="-122"/>
-                <a:cs typeface="Arial" pitchFamily="34" charset="-120"/>
+                  <a:srgbClr val="E8F4EE"/>
+                </a:solidFill>
+                <a:latin typeface="Inter" pitchFamily="34" charset="0"/>
+                <a:ea typeface="Inter" pitchFamily="34" charset="-122"/>
+                <a:cs typeface="Inter" pitchFamily="34" charset="-120"/>
               </a:rPr>
               <a:t>Orena Solutions</a:t>
             </a:r>
@@ -12744,11 +12744,11 @@
             <a:r>
               <a:rPr lang="en-US" sz="1100" spc="100" kern="0" dirty="0">
                 <a:solidFill>
-                  <a:srgbClr val="C9D6CE"/>
-                </a:solidFill>
-                <a:latin typeface="Arial" pitchFamily="34" charset="0"/>
-                <a:ea typeface="Arial" pitchFamily="34" charset="-122"/>
-                <a:cs typeface="Arial" pitchFamily="34" charset="-120"/>
+                  <a:srgbClr val="E8F4EE"/>
+                </a:solidFill>
+                <a:latin typeface="Inter" pitchFamily="34" charset="0"/>
+                <a:ea typeface="Inter" pitchFamily="34" charset="-122"/>
+                <a:cs typeface="Inter" pitchFamily="34" charset="-120"/>
               </a:rPr>
               <a:t>Brand Playbook</a:t>
             </a:r>
@@ -12785,9 +12785,9 @@
                 <a:solidFill>
                   <a:srgbClr val="FFFFFF"/>
                 </a:solidFill>
-                <a:latin typeface="Georgia" pitchFamily="34" charset="0"/>
-                <a:ea typeface="Georgia" pitchFamily="34" charset="-122"/>
-                <a:cs typeface="Georgia" pitchFamily="34" charset="-120"/>
+                <a:latin typeface="Poppins" pitchFamily="34" charset="0"/>
+                <a:ea typeface="Poppins" pitchFamily="34" charset="-122"/>
+                <a:cs typeface="Poppins" pitchFamily="34" charset="-120"/>
               </a:rPr>
               <a:t>About Orena</a:t>
             </a:r>
@@ -12822,11 +12822,11 @@
             <a:r>
               <a:rPr lang="en-US" sz="1400" i="1" dirty="0">
                 <a:solidFill>
-                  <a:srgbClr val="A8C9C0"/>
-                </a:solidFill>
-                <a:latin typeface="Arial" pitchFamily="34" charset="0"/>
-                <a:ea typeface="Arial" pitchFamily="34" charset="-122"/>
-                <a:cs typeface="Arial" pitchFamily="34" charset="-120"/>
+                  <a:srgbClr val="48B855"/>
+                </a:solidFill>
+                <a:latin typeface="Inter" pitchFamily="34" charset="0"/>
+                <a:ea typeface="Inter" pitchFamily="34" charset="-122"/>
+                <a:cs typeface="Inter" pitchFamily="34" charset="-120"/>
               </a:rPr>
               <a:t>What customers know and trust us for.</a:t>
             </a:r>
@@ -12861,11 +12861,11 @@
             <a:r>
               <a:rPr lang="en-US" sz="850" spc="120" kern="0" dirty="0">
                 <a:solidFill>
-                  <a:srgbClr val="6E8577"/>
-                </a:solidFill>
-                <a:latin typeface="Arial" pitchFamily="34" charset="0"/>
-                <a:ea typeface="Arial" pitchFamily="34" charset="-122"/>
-                <a:cs typeface="Arial" pitchFamily="34" charset="-120"/>
+                  <a:srgbClr val="48B855"/>
+                </a:solidFill>
+                <a:latin typeface="Inter" pitchFamily="34" charset="0"/>
+                <a:ea typeface="Inter" pitchFamily="34" charset="-122"/>
+                <a:cs typeface="Inter" pitchFamily="34" charset="-120"/>
               </a:rPr>
               <a:t>ORENA SOLUTIONS — BRAND PLAYBOOK</a:t>
             </a:r>
@@ -12887,7 +12887,7 @@
     <p:bg>
       <p:bgPr>
         <a:solidFill>
-          <a:srgbClr val="2F6B4F"/>
+          <a:srgbClr val="0D7043"/>
         </a:solidFill>
       </p:bgPr>
     </p:bg>
@@ -12932,11 +12932,11 @@
             <a:r>
               <a:rPr lang="en-US" sz="1100" b="1" spc="100" kern="0" dirty="0">
                 <a:solidFill>
-                  <a:srgbClr val="C9D6CE"/>
-                </a:solidFill>
-                <a:latin typeface="Arial" pitchFamily="34" charset="0"/>
-                <a:ea typeface="Arial" pitchFamily="34" charset="-122"/>
-                <a:cs typeface="Arial" pitchFamily="34" charset="-120"/>
+                  <a:srgbClr val="E8F4EE"/>
+                </a:solidFill>
+                <a:latin typeface="Inter" pitchFamily="34" charset="0"/>
+                <a:ea typeface="Inter" pitchFamily="34" charset="-122"/>
+                <a:cs typeface="Inter" pitchFamily="34" charset="-120"/>
               </a:rPr>
               <a:t>About Orena</a:t>
             </a:r>
@@ -12971,11 +12971,11 @@
             <a:r>
               <a:rPr lang="en-US" sz="1100" spc="100" kern="0" dirty="0">
                 <a:solidFill>
-                  <a:srgbClr val="C9D6CE"/>
-                </a:solidFill>
-                <a:latin typeface="Arial" pitchFamily="34" charset="0"/>
-                <a:ea typeface="Arial" pitchFamily="34" charset="-122"/>
-                <a:cs typeface="Arial" pitchFamily="34" charset="-120"/>
+                  <a:srgbClr val="E8F4EE"/>
+                </a:solidFill>
+                <a:latin typeface="Inter" pitchFamily="34" charset="0"/>
+                <a:ea typeface="Inter" pitchFamily="34" charset="-122"/>
+                <a:cs typeface="Inter" pitchFamily="34" charset="-120"/>
               </a:rPr>
               <a:t>What is Orena</a:t>
             </a:r>
@@ -13015,9 +13015,9 @@
                 <a:solidFill>
                   <a:srgbClr val="FFFFFF"/>
                 </a:solidFill>
-                <a:latin typeface="Georgia" pitchFamily="34" charset="0"/>
-                <a:ea typeface="Georgia" pitchFamily="34" charset="-122"/>
-                <a:cs typeface="Georgia" pitchFamily="34" charset="-120"/>
+                <a:latin typeface="Poppins" pitchFamily="34" charset="0"/>
+                <a:ea typeface="Poppins" pitchFamily="34" charset="-122"/>
+                <a:cs typeface="Poppins" pitchFamily="34" charset="-120"/>
               </a:rPr>
               <a:t>Crafting Preferred</a:t>
             </a:r>
@@ -13035,9 +13035,9 @@
                 <a:solidFill>
                   <a:srgbClr val="FFFFFF"/>
                 </a:solidFill>
-                <a:latin typeface="Georgia" pitchFamily="34" charset="0"/>
-                <a:ea typeface="Georgia" pitchFamily="34" charset="-122"/>
-                <a:cs typeface="Georgia" pitchFamily="34" charset="-120"/>
+                <a:latin typeface="Poppins" pitchFamily="34" charset="0"/>
+                <a:ea typeface="Poppins" pitchFamily="34" charset="-122"/>
+                <a:cs typeface="Poppins" pitchFamily="34" charset="-120"/>
               </a:rPr>
               <a:t>Engineers.</a:t>
             </a:r>
@@ -13075,11 +13075,11 @@
             <a:r>
               <a:rPr lang="en-US" sz="1250" dirty="0">
                 <a:solidFill>
-                  <a:srgbClr val="D7E2DB"/>
-                </a:solidFill>
-                <a:latin typeface="Arial" pitchFamily="34" charset="0"/>
-                <a:ea typeface="Arial" pitchFamily="34" charset="-122"/>
-                <a:cs typeface="Arial" pitchFamily="34" charset="-120"/>
+                  <a:srgbClr val="D7E9DF"/>
+                </a:solidFill>
+                <a:latin typeface="Inter" pitchFamily="34" charset="0"/>
+                <a:ea typeface="Inter" pitchFamily="34" charset="-122"/>
+                <a:cs typeface="Inter" pitchFamily="34" charset="-120"/>
               </a:rPr>
               <a:t>Orena Solutions builds the pipeline between raw engineering talent and the organizations who need it most — hiring, training and culture transformation, delivered as one connected system. We are part of the Shakti Ecosystem, engineering solutions that respect people and planet alike.</a:t>
             </a:r>
@@ -13104,7 +13104,7 @@
             </a:avLst>
           </a:prstGeom>
           <a:solidFill>
-            <a:srgbClr val="295C43"/>
+            <a:srgbClr val="0F5B37"/>
           </a:solidFill>
           <a:ln/>
         </p:spPr>
@@ -13162,9 +13162,9 @@
                 <a:solidFill>
                   <a:srgbClr val="FFFFFF"/>
                 </a:solidFill>
-                <a:latin typeface="Arial" pitchFamily="34" charset="0"/>
-                <a:ea typeface="Arial" pitchFamily="34" charset="-122"/>
-                <a:cs typeface="Arial" pitchFamily="34" charset="-120"/>
+                <a:latin typeface="Inter" pitchFamily="34" charset="0"/>
+                <a:ea typeface="Inter" pitchFamily="34" charset="-122"/>
+                <a:cs typeface="Inter" pitchFamily="34" charset="-120"/>
               </a:rPr>
               <a:t>Quality</a:t>
             </a:r>
@@ -13202,11 +13202,11 @@
             <a:r>
               <a:rPr lang="en-US" sz="1050" dirty="0">
                 <a:solidFill>
-                  <a:srgbClr val="B9CBC0"/>
-                </a:solidFill>
-                <a:latin typeface="Arial" pitchFamily="34" charset="0"/>
-                <a:ea typeface="Arial" pitchFamily="34" charset="-122"/>
-                <a:cs typeface="Arial" pitchFamily="34" charset="-120"/>
+                  <a:srgbClr val="D7E9DF"/>
+                </a:solidFill>
+                <a:latin typeface="Inter" pitchFamily="34" charset="0"/>
+                <a:ea typeface="Inter" pitchFamily="34" charset="-122"/>
+                <a:cs typeface="Inter" pitchFamily="34" charset="-120"/>
               </a:rPr>
               <a:t>Committed to the highest standards in everything we do.</a:t>
             </a:r>
@@ -13231,7 +13231,7 @@
             </a:avLst>
           </a:prstGeom>
           <a:solidFill>
-            <a:srgbClr val="295C43"/>
+            <a:srgbClr val="0F5B37"/>
           </a:solidFill>
           <a:ln/>
         </p:spPr>
@@ -13289,9 +13289,9 @@
                 <a:solidFill>
                   <a:srgbClr val="FFFFFF"/>
                 </a:solidFill>
-                <a:latin typeface="Arial" pitchFamily="34" charset="0"/>
-                <a:ea typeface="Arial" pitchFamily="34" charset="-122"/>
-                <a:cs typeface="Arial" pitchFamily="34" charset="-120"/>
+                <a:latin typeface="Inter" pitchFamily="34" charset="0"/>
+                <a:ea typeface="Inter" pitchFamily="34" charset="-122"/>
+                <a:cs typeface="Inter" pitchFamily="34" charset="-120"/>
               </a:rPr>
               <a:t>People</a:t>
             </a:r>
@@ -13329,11 +13329,11 @@
             <a:r>
               <a:rPr lang="en-US" sz="1050" dirty="0">
                 <a:solidFill>
-                  <a:srgbClr val="B9CBC0"/>
-                </a:solidFill>
-                <a:latin typeface="Arial" pitchFamily="34" charset="0"/>
-                <a:ea typeface="Arial" pitchFamily="34" charset="-122"/>
-                <a:cs typeface="Arial" pitchFamily="34" charset="-120"/>
+                  <a:srgbClr val="D7E9DF"/>
+                </a:solidFill>
+                <a:latin typeface="Inter" pitchFamily="34" charset="0"/>
+                <a:ea typeface="Inter" pitchFamily="34" charset="-122"/>
+                <a:cs typeface="Inter" pitchFamily="34" charset="-120"/>
               </a:rPr>
               <a:t>Empowering minds and building futures.</a:t>
             </a:r>
@@ -13358,7 +13358,7 @@
             </a:avLst>
           </a:prstGeom>
           <a:solidFill>
-            <a:srgbClr val="295C43"/>
+            <a:srgbClr val="0F5B37"/>
           </a:solidFill>
           <a:ln/>
         </p:spPr>
@@ -13416,9 +13416,9 @@
                 <a:solidFill>
                   <a:srgbClr val="FFFFFF"/>
                 </a:solidFill>
-                <a:latin typeface="Arial" pitchFamily="34" charset="0"/>
-                <a:ea typeface="Arial" pitchFamily="34" charset="-122"/>
-                <a:cs typeface="Arial" pitchFamily="34" charset="-120"/>
+                <a:latin typeface="Inter" pitchFamily="34" charset="0"/>
+                <a:ea typeface="Inter" pitchFamily="34" charset="-122"/>
+                <a:cs typeface="Inter" pitchFamily="34" charset="-120"/>
               </a:rPr>
               <a:t>Sustainability</a:t>
             </a:r>
@@ -13456,11 +13456,11 @@
             <a:r>
               <a:rPr lang="en-US" sz="1050" dirty="0">
                 <a:solidFill>
-                  <a:srgbClr val="B9CBC0"/>
-                </a:solidFill>
-                <a:latin typeface="Arial" pitchFamily="34" charset="0"/>
-                <a:ea typeface="Arial" pitchFamily="34" charset="-122"/>
-                <a:cs typeface="Arial" pitchFamily="34" charset="-120"/>
+                  <a:srgbClr val="D7E9DF"/>
+                </a:solidFill>
+                <a:latin typeface="Inter" pitchFamily="34" charset="0"/>
+                <a:ea typeface="Inter" pitchFamily="34" charset="-122"/>
+                <a:cs typeface="Inter" pitchFamily="34" charset="-120"/>
               </a:rPr>
               <a:t>Engineering solutions that respect our planet.</a:t>
             </a:r>
@@ -13495,11 +13495,11 @@
             <a:r>
               <a:rPr lang="en-US" sz="850" spc="120" kern="0" dirty="0">
                 <a:solidFill>
-                  <a:srgbClr val="6E8577"/>
-                </a:solidFill>
-                <a:latin typeface="Arial" pitchFamily="34" charset="0"/>
-                <a:ea typeface="Arial" pitchFamily="34" charset="-122"/>
-                <a:cs typeface="Arial" pitchFamily="34" charset="-120"/>
+                  <a:srgbClr val="48B855"/>
+                </a:solidFill>
+                <a:latin typeface="Inter" pitchFamily="34" charset="0"/>
+                <a:ea typeface="Inter" pitchFamily="34" charset="-122"/>
+                <a:cs typeface="Inter" pitchFamily="34" charset="-120"/>
               </a:rPr>
               <a:t>ORENA SOLUTIONS — BRAND PLAYBOOK</a:t>
             </a:r>
@@ -13521,7 +13521,7 @@
     <p:bg>
       <p:bgPr>
         <a:solidFill>
-          <a:srgbClr val="2F6B4F"/>
+          <a:srgbClr val="0D7043"/>
         </a:solidFill>
       </p:bgPr>
     </p:bg>
@@ -13566,11 +13566,11 @@
             <a:r>
               <a:rPr lang="en-US" sz="1100" b="1" spc="100" kern="0" dirty="0">
                 <a:solidFill>
-                  <a:srgbClr val="C9D6CE"/>
-                </a:solidFill>
-                <a:latin typeface="Arial" pitchFamily="34" charset="0"/>
-                <a:ea typeface="Arial" pitchFamily="34" charset="-122"/>
-                <a:cs typeface="Arial" pitchFamily="34" charset="-120"/>
+                  <a:srgbClr val="E8F4EE"/>
+                </a:solidFill>
+                <a:latin typeface="Inter" pitchFamily="34" charset="0"/>
+                <a:ea typeface="Inter" pitchFamily="34" charset="-122"/>
+                <a:cs typeface="Inter" pitchFamily="34" charset="-120"/>
               </a:rPr>
               <a:t>About Orena</a:t>
             </a:r>
@@ -13605,11 +13605,11 @@
             <a:r>
               <a:rPr lang="en-US" sz="1100" spc="100" kern="0" dirty="0">
                 <a:solidFill>
-                  <a:srgbClr val="C9D6CE"/>
-                </a:solidFill>
-                <a:latin typeface="Arial" pitchFamily="34" charset="0"/>
-                <a:ea typeface="Arial" pitchFamily="34" charset="-122"/>
-                <a:cs typeface="Arial" pitchFamily="34" charset="-120"/>
+                  <a:srgbClr val="E8F4EE"/>
+                </a:solidFill>
+                <a:latin typeface="Inter" pitchFamily="34" charset="0"/>
+                <a:ea typeface="Inter" pitchFamily="34" charset="-122"/>
+                <a:cs typeface="Inter" pitchFamily="34" charset="-120"/>
               </a:rPr>
               <a:t>Purpose</a:t>
             </a:r>
@@ -13649,9 +13649,9 @@
                 <a:solidFill>
                   <a:srgbClr val="FFFFFF"/>
                 </a:solidFill>
-                <a:latin typeface="Georgia" pitchFamily="34" charset="0"/>
-                <a:ea typeface="Georgia" pitchFamily="34" charset="-122"/>
-                <a:cs typeface="Georgia" pitchFamily="34" charset="-120"/>
+                <a:latin typeface="Poppins" pitchFamily="34" charset="0"/>
+                <a:ea typeface="Poppins" pitchFamily="34" charset="-122"/>
+                <a:cs typeface="Poppins" pitchFamily="34" charset="-120"/>
               </a:rPr>
               <a:t>Power the pipeline of</a:t>
             </a:r>
@@ -13669,9 +13669,9 @@
                 <a:solidFill>
                   <a:srgbClr val="FFFFFF"/>
                 </a:solidFill>
-                <a:latin typeface="Georgia" pitchFamily="34" charset="0"/>
-                <a:ea typeface="Georgia" pitchFamily="34" charset="-122"/>
-                <a:cs typeface="Georgia" pitchFamily="34" charset="-120"/>
+                <a:latin typeface="Poppins" pitchFamily="34" charset="0"/>
+                <a:ea typeface="Poppins" pitchFamily="34" charset="-122"/>
+                <a:cs typeface="Poppins" pitchFamily="34" charset="-120"/>
               </a:rPr>
               <a:t>preferred engineers.</a:t>
             </a:r>
@@ -13709,11 +13709,11 @@
             <a:r>
               <a:rPr lang="en-US" sz="1150" dirty="0">
                 <a:solidFill>
-                  <a:srgbClr val="C7D8CD"/>
-                </a:solidFill>
-                <a:latin typeface="Arial" pitchFamily="34" charset="0"/>
-                <a:ea typeface="Arial" pitchFamily="34" charset="-122"/>
-                <a:cs typeface="Arial" pitchFamily="34" charset="-120"/>
+                  <a:srgbClr val="D7E9DF"/>
+                </a:solidFill>
+                <a:latin typeface="Inter" pitchFamily="34" charset="0"/>
+                <a:ea typeface="Inter" pitchFamily="34" charset="-122"/>
+                <a:cs typeface="Inter" pitchFamily="34" charset="-120"/>
               </a:rPr>
               <a:t>We're the engine that connects hiring, training and culture transformation into one system.</a:t>
             </a:r>
@@ -13738,7 +13738,7 @@
           <a:noFill/>
           <a:ln w="12700">
             <a:solidFill>
-              <a:srgbClr val="3C7259"/>
+              <a:srgbClr val="00AF63"/>
             </a:solidFill>
             <a:prstDash val="solid"/>
           </a:ln>
@@ -13774,11 +13774,11 @@
             <a:r>
               <a:rPr lang="en-US" sz="1150" dirty="0">
                 <a:solidFill>
-                  <a:srgbClr val="C7D8CD"/>
-                </a:solidFill>
-                <a:latin typeface="Arial" pitchFamily="34" charset="0"/>
-                <a:ea typeface="Arial" pitchFamily="34" charset="-122"/>
-                <a:cs typeface="Arial" pitchFamily="34" charset="-120"/>
+                  <a:srgbClr val="D7E9DF"/>
+                </a:solidFill>
+                <a:latin typeface="Inter" pitchFamily="34" charset="0"/>
+                <a:ea typeface="Inter" pitchFamily="34" charset="-122"/>
+                <a:cs typeface="Inter" pitchFamily="34" charset="-120"/>
               </a:rPr>
               <a:t>Tailored solutions for organizations who want engineering talent built for tomorrow, not just today.</a:t>
             </a:r>
@@ -13803,7 +13803,7 @@
           <a:noFill/>
           <a:ln w="12700">
             <a:solidFill>
-              <a:srgbClr val="3C7259"/>
+              <a:srgbClr val="00AF63"/>
             </a:solidFill>
             <a:prstDash val="solid"/>
           </a:ln>
@@ -13839,11 +13839,11 @@
             <a:r>
               <a:rPr lang="en-US" sz="1150" dirty="0">
                 <a:solidFill>
-                  <a:srgbClr val="C7D8CD"/>
-                </a:solidFill>
-                <a:latin typeface="Arial" pitchFamily="34" charset="0"/>
-                <a:ea typeface="Arial" pitchFamily="34" charset="-122"/>
-                <a:cs typeface="Arial" pitchFamily="34" charset="-120"/>
+                  <a:srgbClr val="D7E9DF"/>
+                </a:solidFill>
+                <a:latin typeface="Inter" pitchFamily="34" charset="0"/>
+                <a:ea typeface="Inter" pitchFamily="34" charset="-122"/>
+                <a:cs typeface="Inter" pitchFamily="34" charset="-120"/>
               </a:rPr>
               <a:t>Without friction or complexity. Quality, people and sustainability, in equal measure.</a:t>
             </a:r>
@@ -13878,11 +13878,11 @@
             <a:r>
               <a:rPr lang="en-US" sz="850" spc="120" kern="0" dirty="0">
                 <a:solidFill>
-                  <a:srgbClr val="6E8577"/>
-                </a:solidFill>
-                <a:latin typeface="Arial" pitchFamily="34" charset="0"/>
-                <a:ea typeface="Arial" pitchFamily="34" charset="-122"/>
-                <a:cs typeface="Arial" pitchFamily="34" charset="-120"/>
+                  <a:srgbClr val="48B855"/>
+                </a:solidFill>
+                <a:latin typeface="Inter" pitchFamily="34" charset="0"/>
+                <a:ea typeface="Inter" pitchFamily="34" charset="-122"/>
+                <a:cs typeface="Inter" pitchFamily="34" charset="-120"/>
               </a:rPr>
               <a:t>ORENA SOLUTIONS — BRAND PLAYBOOK</a:t>
             </a:r>
@@ -13904,7 +13904,7 @@
     <p:bg>
       <p:bgPr>
         <a:solidFill>
-          <a:srgbClr val="2F6B4F"/>
+          <a:srgbClr val="0D7043"/>
         </a:solidFill>
       </p:bgPr>
     </p:bg>
@@ -13949,11 +13949,11 @@
             <a:r>
               <a:rPr lang="en-US" sz="1100" b="1" spc="100" kern="0" dirty="0">
                 <a:solidFill>
-                  <a:srgbClr val="C9D6CE"/>
-                </a:solidFill>
-                <a:latin typeface="Arial" pitchFamily="34" charset="0"/>
-                <a:ea typeface="Arial" pitchFamily="34" charset="-122"/>
-                <a:cs typeface="Arial" pitchFamily="34" charset="-120"/>
+                  <a:srgbClr val="E8F4EE"/>
+                </a:solidFill>
+                <a:latin typeface="Inter" pitchFamily="34" charset="0"/>
+                <a:ea typeface="Inter" pitchFamily="34" charset="-122"/>
+                <a:cs typeface="Inter" pitchFamily="34" charset="-120"/>
               </a:rPr>
               <a:t>About Orena</a:t>
             </a:r>
@@ -13988,11 +13988,11 @@
             <a:r>
               <a:rPr lang="en-US" sz="1100" spc="100" kern="0" dirty="0">
                 <a:solidFill>
-                  <a:srgbClr val="C9D6CE"/>
-                </a:solidFill>
-                <a:latin typeface="Arial" pitchFamily="34" charset="0"/>
-                <a:ea typeface="Arial" pitchFamily="34" charset="-122"/>
-                <a:cs typeface="Arial" pitchFamily="34" charset="-120"/>
+                  <a:srgbClr val="E8F4EE"/>
+                </a:solidFill>
+                <a:latin typeface="Inter" pitchFamily="34" charset="0"/>
+                <a:ea typeface="Inter" pitchFamily="34" charset="-122"/>
+                <a:cs typeface="Inter" pitchFamily="34" charset="-120"/>
               </a:rPr>
               <a:t>Brand Voice</a:t>
             </a:r>
@@ -14029,9 +14029,9 @@
                 <a:solidFill>
                   <a:srgbClr val="FFFFFF"/>
                 </a:solidFill>
-                <a:latin typeface="Georgia" pitchFamily="34" charset="0"/>
-                <a:ea typeface="Georgia" pitchFamily="34" charset="-122"/>
-                <a:cs typeface="Georgia" pitchFamily="34" charset="-120"/>
+                <a:latin typeface="Poppins" pitchFamily="34" charset="0"/>
+                <a:ea typeface="Poppins" pitchFamily="34" charset="-122"/>
+                <a:cs typeface="Poppins" pitchFamily="34" charset="-120"/>
               </a:rPr>
               <a:t>Reliable</a:t>
             </a:r>
@@ -14069,11 +14069,11 @@
             <a:r>
               <a:rPr lang="en-US" sz="1200" dirty="0">
                 <a:solidFill>
-                  <a:srgbClr val="C7D8CD"/>
-                </a:solidFill>
-                <a:latin typeface="Arial" pitchFamily="34" charset="0"/>
-                <a:ea typeface="Arial" pitchFamily="34" charset="-122"/>
-                <a:cs typeface="Arial" pitchFamily="34" charset="-120"/>
+                  <a:srgbClr val="D7E9DF"/>
+                </a:solidFill>
+                <a:latin typeface="Inter" pitchFamily="34" charset="0"/>
+                <a:ea typeface="Inter" pitchFamily="34" charset="-122"/>
+                <a:cs typeface="Inter" pitchFamily="34" charset="-120"/>
               </a:rPr>
               <a:t>We deliver on our word. Every engagement is built on consistency organizations can plan around.</a:t>
             </a:r>
@@ -14098,7 +14098,7 @@
           <a:noFill/>
           <a:ln w="9525">
             <a:solidFill>
-              <a:srgbClr val="3C7259"/>
+              <a:srgbClr val="00AF63"/>
             </a:solidFill>
             <a:prstDash val="sysDot"/>
           </a:ln>
@@ -14133,9 +14133,9 @@
                 <a:solidFill>
                   <a:srgbClr val="FFFFFF"/>
                 </a:solidFill>
-                <a:latin typeface="Georgia" pitchFamily="34" charset="0"/>
-                <a:ea typeface="Georgia" pitchFamily="34" charset="-122"/>
-                <a:cs typeface="Georgia" pitchFamily="34" charset="-120"/>
+                <a:latin typeface="Poppins" pitchFamily="34" charset="0"/>
+                <a:ea typeface="Poppins" pitchFamily="34" charset="-122"/>
+                <a:cs typeface="Poppins" pitchFamily="34" charset="-120"/>
               </a:rPr>
               <a:t>Forward-thinking</a:t>
             </a:r>
@@ -14173,11 +14173,11 @@
             <a:r>
               <a:rPr lang="en-US" sz="1200" dirty="0">
                 <a:solidFill>
-                  <a:srgbClr val="C7D8CD"/>
-                </a:solidFill>
-                <a:latin typeface="Arial" pitchFamily="34" charset="0"/>
-                <a:ea typeface="Arial" pitchFamily="34" charset="-122"/>
-                <a:cs typeface="Arial" pitchFamily="34" charset="-120"/>
+                  <a:srgbClr val="D7E9DF"/>
+                </a:solidFill>
+                <a:latin typeface="Inter" pitchFamily="34" charset="0"/>
+                <a:ea typeface="Inter" pitchFamily="34" charset="-122"/>
+                <a:cs typeface="Inter" pitchFamily="34" charset="-120"/>
               </a:rPr>
               <a:t>We anticipate where talent and industry are headed, not just where they are today.</a:t>
             </a:r>
@@ -14202,7 +14202,7 @@
           <a:noFill/>
           <a:ln w="9525">
             <a:solidFill>
-              <a:srgbClr val="3C7259"/>
+              <a:srgbClr val="00AF63"/>
             </a:solidFill>
             <a:prstDash val="sysDot"/>
           </a:ln>
@@ -14237,9 +14237,9 @@
                 <a:solidFill>
                   <a:srgbClr val="FFFFFF"/>
                 </a:solidFill>
-                <a:latin typeface="Georgia" pitchFamily="34" charset="0"/>
-                <a:ea typeface="Georgia" pitchFamily="34" charset="-122"/>
-                <a:cs typeface="Georgia" pitchFamily="34" charset="-120"/>
+                <a:latin typeface="Poppins" pitchFamily="34" charset="0"/>
+                <a:ea typeface="Poppins" pitchFamily="34" charset="-122"/>
+                <a:cs typeface="Poppins" pitchFamily="34" charset="-120"/>
               </a:rPr>
               <a:t>People-focused</a:t>
             </a:r>
@@ -14277,11 +14277,11 @@
             <a:r>
               <a:rPr lang="en-US" sz="1200" dirty="0">
                 <a:solidFill>
-                  <a:srgbClr val="C7D8CD"/>
-                </a:solidFill>
-                <a:latin typeface="Arial" pitchFamily="34" charset="0"/>
-                <a:ea typeface="Arial" pitchFamily="34" charset="-122"/>
-                <a:cs typeface="Arial" pitchFamily="34" charset="-120"/>
+                  <a:srgbClr val="D7E9DF"/>
+                </a:solidFill>
+                <a:latin typeface="Inter" pitchFamily="34" charset="0"/>
+                <a:ea typeface="Inter" pitchFamily="34" charset="-122"/>
+                <a:cs typeface="Inter" pitchFamily="34" charset="-120"/>
               </a:rPr>
               <a:t>Every solution starts with the humans it serves — engineers, teams and leaders alike.</a:t>
             </a:r>
@@ -14306,7 +14306,7 @@
           <a:noFill/>
           <a:ln w="9525">
             <a:solidFill>
-              <a:srgbClr val="3C7259"/>
+              <a:srgbClr val="00AF63"/>
             </a:solidFill>
             <a:prstDash val="sysDot"/>
           </a:ln>
@@ -14341,9 +14341,9 @@
                 <a:solidFill>
                   <a:srgbClr val="FFFFFF"/>
                 </a:solidFill>
-                <a:latin typeface="Georgia" pitchFamily="34" charset="0"/>
-                <a:ea typeface="Georgia" pitchFamily="34" charset="-122"/>
-                <a:cs typeface="Georgia" pitchFamily="34" charset="-120"/>
+                <a:latin typeface="Poppins" pitchFamily="34" charset="0"/>
+                <a:ea typeface="Poppins" pitchFamily="34" charset="-122"/>
+                <a:cs typeface="Poppins" pitchFamily="34" charset="-120"/>
               </a:rPr>
               <a:t>Impact-driven</a:t>
             </a:r>
@@ -14381,11 +14381,11 @@
             <a:r>
               <a:rPr lang="en-US" sz="1200" dirty="0">
                 <a:solidFill>
-                  <a:srgbClr val="C7D8CD"/>
-                </a:solidFill>
-                <a:latin typeface="Arial" pitchFamily="34" charset="0"/>
-                <a:ea typeface="Arial" pitchFamily="34" charset="-122"/>
-                <a:cs typeface="Arial" pitchFamily="34" charset="-120"/>
+                  <a:srgbClr val="D7E9DF"/>
+                </a:solidFill>
+                <a:latin typeface="Inter" pitchFamily="34" charset="0"/>
+                <a:ea typeface="Inter" pitchFamily="34" charset="-122"/>
+                <a:cs typeface="Inter" pitchFamily="34" charset="-120"/>
               </a:rPr>
               <a:t>We engineer solutions that create lasting value, not just short-term output.</a:t>
             </a:r>
@@ -14420,11 +14420,11 @@
             <a:r>
               <a:rPr lang="en-US" sz="850" spc="120" kern="0" dirty="0">
                 <a:solidFill>
-                  <a:srgbClr val="6E8577"/>
-                </a:solidFill>
-                <a:latin typeface="Arial" pitchFamily="34" charset="0"/>
-                <a:ea typeface="Arial" pitchFamily="34" charset="-122"/>
-                <a:cs typeface="Arial" pitchFamily="34" charset="-120"/>
+                  <a:srgbClr val="48B855"/>
+                </a:solidFill>
+                <a:latin typeface="Inter" pitchFamily="34" charset="0"/>
+                <a:ea typeface="Inter" pitchFamily="34" charset="-122"/>
+                <a:cs typeface="Inter" pitchFamily="34" charset="-120"/>
               </a:rPr>
               <a:t>ORENA SOLUTIONS — BRAND PLAYBOOK</a:t>
             </a:r>
@@ -14446,7 +14446,7 @@
     <p:bg>
       <p:bgPr>
         <a:solidFill>
-          <a:srgbClr val="2F6B4F"/>
+          <a:srgbClr val="0D7043"/>
         </a:solidFill>
       </p:bgPr>
     </p:bg>
@@ -14491,11 +14491,11 @@
             <a:r>
               <a:rPr lang="en-US" sz="1100" b="1" spc="100" kern="0" dirty="0">
                 <a:solidFill>
-                  <a:srgbClr val="C9D6CE"/>
-                </a:solidFill>
-                <a:latin typeface="Arial" pitchFamily="34" charset="0"/>
-                <a:ea typeface="Arial" pitchFamily="34" charset="-122"/>
-                <a:cs typeface="Arial" pitchFamily="34" charset="-120"/>
+                  <a:srgbClr val="E8F4EE"/>
+                </a:solidFill>
+                <a:latin typeface="Inter" pitchFamily="34" charset="0"/>
+                <a:ea typeface="Inter" pitchFamily="34" charset="-122"/>
+                <a:cs typeface="Inter" pitchFamily="34" charset="-120"/>
               </a:rPr>
               <a:t>Orena Solutions</a:t>
             </a:r>
@@ -14530,11 +14530,11 @@
             <a:r>
               <a:rPr lang="en-US" sz="1100" spc="100" kern="0" dirty="0">
                 <a:solidFill>
-                  <a:srgbClr val="C9D6CE"/>
-                </a:solidFill>
-                <a:latin typeface="Arial" pitchFamily="34" charset="0"/>
-                <a:ea typeface="Arial" pitchFamily="34" charset="-122"/>
-                <a:cs typeface="Arial" pitchFamily="34" charset="-120"/>
+                  <a:srgbClr val="E8F4EE"/>
+                </a:solidFill>
+                <a:latin typeface="Inter" pitchFamily="34" charset="0"/>
+                <a:ea typeface="Inter" pitchFamily="34" charset="-122"/>
+                <a:cs typeface="Inter" pitchFamily="34" charset="-120"/>
               </a:rPr>
               <a:t>Brand Playbook</a:t>
             </a:r>
@@ -14571,9 +14571,9 @@
                 <a:solidFill>
                   <a:srgbClr val="FFFFFF"/>
                 </a:solidFill>
-                <a:latin typeface="Georgia" pitchFamily="34" charset="0"/>
-                <a:ea typeface="Georgia" pitchFamily="34" charset="-122"/>
-                <a:cs typeface="Georgia" pitchFamily="34" charset="-120"/>
+                <a:latin typeface="Poppins" pitchFamily="34" charset="0"/>
+                <a:ea typeface="Poppins" pitchFamily="34" charset="-122"/>
+                <a:cs typeface="Poppins" pitchFamily="34" charset="-120"/>
               </a:rPr>
               <a:t>Colors</a:t>
             </a:r>
@@ -14608,11 +14608,11 @@
             <a:r>
               <a:rPr lang="en-US" sz="1400" i="1" dirty="0">
                 <a:solidFill>
-                  <a:srgbClr val="A8C9C0"/>
-                </a:solidFill>
-                <a:latin typeface="Arial" pitchFamily="34" charset="0"/>
-                <a:ea typeface="Arial" pitchFamily="34" charset="-122"/>
-                <a:cs typeface="Arial" pitchFamily="34" charset="-120"/>
+                  <a:srgbClr val="48B855"/>
+                </a:solidFill>
+                <a:latin typeface="Inter" pitchFamily="34" charset="0"/>
+                <a:ea typeface="Inter" pitchFamily="34" charset="-122"/>
+                <a:cs typeface="Inter" pitchFamily="34" charset="-120"/>
               </a:rPr>
               <a:t>How we use color to denote our brand and signpost information.</a:t>
             </a:r>
@@ -14647,11 +14647,11 @@
             <a:r>
               <a:rPr lang="en-US" sz="850" spc="120" kern="0" dirty="0">
                 <a:solidFill>
-                  <a:srgbClr val="6E8577"/>
-                </a:solidFill>
-                <a:latin typeface="Arial" pitchFamily="34" charset="0"/>
-                <a:ea typeface="Arial" pitchFamily="34" charset="-122"/>
-                <a:cs typeface="Arial" pitchFamily="34" charset="-120"/>
+                  <a:srgbClr val="48B855"/>
+                </a:solidFill>
+                <a:latin typeface="Inter" pitchFamily="34" charset="0"/>
+                <a:ea typeface="Inter" pitchFamily="34" charset="-122"/>
+                <a:cs typeface="Inter" pitchFamily="34" charset="-120"/>
               </a:rPr>
               <a:t>ORENA SOLUTIONS — BRAND PLAYBOOK</a:t>
             </a:r>
@@ -14673,7 +14673,7 @@
     <p:bg>
       <p:bgPr>
         <a:solidFill>
-          <a:srgbClr val="FAFAF8"/>
+          <a:srgbClr val="FAFCF9"/>
         </a:solidFill>
       </p:bgPr>
     </p:bg>
@@ -14718,11 +14718,11 @@
             <a:r>
               <a:rPr lang="en-US" sz="1100" b="1" spc="100" kern="0" dirty="0">
                 <a:solidFill>
-                  <a:srgbClr val="6E7A70"/>
-                </a:solidFill>
-                <a:latin typeface="Arial" pitchFamily="34" charset="0"/>
-                <a:ea typeface="Arial" pitchFamily="34" charset="-122"/>
-                <a:cs typeface="Arial" pitchFamily="34" charset="-120"/>
+                  <a:srgbClr val="66756D"/>
+                </a:solidFill>
+                <a:latin typeface="Inter" pitchFamily="34" charset="0"/>
+                <a:ea typeface="Inter" pitchFamily="34" charset="-122"/>
+                <a:cs typeface="Inter" pitchFamily="34" charset="-120"/>
               </a:rPr>
               <a:t>Colors</a:t>
             </a:r>
@@ -14757,11 +14757,11 @@
             <a:r>
               <a:rPr lang="en-US" sz="1100" spc="100" kern="0" dirty="0">
                 <a:solidFill>
-                  <a:srgbClr val="6E7A70"/>
-                </a:solidFill>
-                <a:latin typeface="Arial" pitchFamily="34" charset="0"/>
-                <a:ea typeface="Arial" pitchFamily="34" charset="-122"/>
-                <a:cs typeface="Arial" pitchFamily="34" charset="-120"/>
+                  <a:srgbClr val="66756D"/>
+                </a:solidFill>
+                <a:latin typeface="Inter" pitchFamily="34" charset="0"/>
+                <a:ea typeface="Inter" pitchFamily="34" charset="-122"/>
+                <a:cs typeface="Inter" pitchFamily="34" charset="-120"/>
               </a:rPr>
               <a:t>Core Palette</a:t>
             </a:r>
@@ -14799,13 +14799,13 @@
             <a:r>
               <a:rPr lang="en-US" sz="1250" dirty="0">
                 <a:solidFill>
-                  <a:srgbClr val="333333"/>
-                </a:solidFill>
-                <a:latin typeface="Arial" pitchFamily="34" charset="0"/>
-                <a:ea typeface="Arial" pitchFamily="34" charset="-122"/>
-                <a:cs typeface="Arial" pitchFamily="34" charset="-120"/>
-              </a:rPr>
-              <a:t>Our colors reflect the reliability, growth, and human focus of Orena — grounded in green, framed in soft neutrals, and lifted with a touch of gold.</a:t>
+                  <a:srgbClr val="18231E"/>
+                </a:solidFill>
+                <a:latin typeface="Inter" pitchFamily="34" charset="0"/>
+                <a:ea typeface="Inter" pitchFamily="34" charset="-122"/>
+                <a:cs typeface="Inter" pitchFamily="34" charset="-120"/>
+              </a:rPr>
+              <a:t>Our colors reflect the reliability, growth, and human focus of Orena — grounded in green, framed in soft neutrals, and lifted with a touch of lime.</a:t>
             </a:r>
             <a:endParaRPr lang="en-US" sz="1250" dirty="0"/>
           </a:p>
@@ -14813,926 +14813,1151 @@
       </p:sp>
       <p:sp>
         <p:nvSpPr>
-          <p:cNvPr id="5" name="Shape 3"/>
-          <p:cNvSpPr/>
-          <p:nvPr/>
-        </p:nvSpPr>
-        <p:spPr>
-          <a:xfrm>
-            <a:off x="3611880" y="1005840"/>
-            <a:ext cx="1554480" cy="3749040"/>
+          <p:cNvPr id="100" name="Swatch 0"/>
+          <p:cNvSpPr/>
+          <p:nvPr/>
+        </p:nvSpPr>
+        <p:spPr>
+          <a:xfrm>
+            <a:off x="3611880" y="1220840"/>
+            <a:ext cx="420000" cy="420000"/>
           </a:xfrm>
           <a:prstGeom prst="roundRect">
             <a:avLst>
-              <a:gd name="adj" fmla="val 3529"/>
+              <a:gd name="adj" fmla="val 12000"/>
             </a:avLst>
           </a:prstGeom>
           <a:solidFill>
-            <a:srgbClr val="2F6B4F"/>
+            <a:srgbClr val="0D7043"/>
           </a:solidFill>
-          <a:ln/>
-        </p:spPr>
-      </p:sp>
-      <p:sp>
-        <p:nvSpPr>
-          <p:cNvPr id="6" name="Text 4"/>
-          <p:cNvSpPr/>
-          <p:nvPr/>
-        </p:nvSpPr>
-        <p:spPr>
-          <a:xfrm>
-            <a:off x="3730752" y="2880360"/>
-            <a:ext cx="1316736" cy="640080"/>
-          </a:xfrm>
-          <a:prstGeom prst="rect">
-            <a:avLst/>
-          </a:prstGeom>
-          <a:noFill/>
-          <a:ln/>
-        </p:spPr>
-        <p:txBody>
-          <a:bodyPr wrap="square" lIns="0" tIns="0" rIns="0" bIns="0" rtlCol="0" anchor="ctr"/>
-          <a:lstStyle/>
-          <a:p>
-            <a:pPr indent="0" marL="0">
-              <a:lnSpc>
-                <a:spcPct val="110000"/>
-              </a:lnSpc>
-              <a:buNone/>
-            </a:pPr>
-            <a:r>
-              <a:rPr lang="en-US" sz="1150" b="1" dirty="0">
-                <a:solidFill>
-                  <a:srgbClr val="FFFFFF"/>
-                </a:solidFill>
-                <a:latin typeface="Arial" pitchFamily="34" charset="0"/>
-                <a:ea typeface="Arial" pitchFamily="34" charset="-122"/>
-                <a:cs typeface="Arial" pitchFamily="34" charset="-120"/>
-              </a:rPr>
-              <a:t>Deep Forest Green</a:t>
-            </a:r>
-            <a:endParaRPr lang="en-US" sz="1150" dirty="0"/>
-          </a:p>
-        </p:txBody>
-      </p:sp>
-      <p:sp>
-        <p:nvSpPr>
-          <p:cNvPr id="7" name="Text 5"/>
-          <p:cNvSpPr/>
-          <p:nvPr/>
-        </p:nvSpPr>
-        <p:spPr>
-          <a:xfrm>
-            <a:off x="3730752" y="3474720"/>
-            <a:ext cx="1316736" cy="274320"/>
-          </a:xfrm>
-          <a:prstGeom prst="rect">
-            <a:avLst/>
-          </a:prstGeom>
-          <a:noFill/>
-          <a:ln/>
-        </p:spPr>
-        <p:txBody>
-          <a:bodyPr wrap="square" lIns="0" tIns="0" rIns="0" bIns="0" rtlCol="0" anchor="ctr"/>
-          <a:lstStyle/>
-          <a:p>
-            <a:pPr indent="0" marL="0">
-              <a:buNone/>
-            </a:pPr>
-            <a:r>
-              <a:rPr lang="en-US" sz="950" dirty="0">
-                <a:solidFill>
-                  <a:srgbClr val="FFFFFF"/>
+          <a:ln>
+            <a:solidFill>
+              <a:srgbClr val="D7E9DF"/>
+            </a:solidFill>
+          </a:ln>
+        </p:spPr>
+      </p:sp>
+      <p:sp>
+        <p:nvSpPr>
+          <p:cNvPr id="101" name="ColorName 0"/>
+          <p:cNvSpPr/>
+          <p:nvPr/>
+        </p:nvSpPr>
+        <p:spPr>
+          <a:xfrm>
+            <a:off x="4181880" y="1135840"/>
+            <a:ext cx="3170000" cy="320000"/>
+          </a:xfrm>
+          <a:prstGeom prst="rect">
+            <a:avLst/>
+          </a:prstGeom>
+          <a:noFill/>
+          <a:ln/>
+        </p:spPr>
+        <p:txBody>
+          <a:bodyPr wrap="square" lIns="0" tIns="0" rIns="0" bIns="0" rtlCol="0" anchor="ctr"/>
+          <a:lstStyle/>
+          <a:p>
+            <a:pPr indent="0" marL="0">
+              <a:buNone/>
+            </a:pPr>
+            <a:r>
+              <a:rPr lang="en-US" sz="1300" b="1" dirty="0">
+                <a:solidFill>
+                  <a:srgbClr val="18231E"/>
+                </a:solidFill>
+                <a:latin typeface="Inter" pitchFamily="34" charset="0"/>
+                <a:ea typeface="Inter" pitchFamily="34" charset="-122"/>
+                <a:cs typeface="Inter" pitchFamily="34" charset="-120"/>
+              </a:rPr>
+              <a:t>Orena Green</a:t>
+            </a:r>
+            <a:endParaRPr lang="en-US" sz="1300" dirty="0"/>
+          </a:p>
+        </p:txBody>
+      </p:sp>
+      <p:sp>
+        <p:nvSpPr>
+          <p:cNvPr id="102" name="ColorMeta 0"/>
+          <p:cNvSpPr/>
+          <p:nvPr/>
+        </p:nvSpPr>
+        <p:spPr>
+          <a:xfrm>
+            <a:off x="4181880" y="1475840"/>
+            <a:ext cx="3170000" cy="274320"/>
+          </a:xfrm>
+          <a:prstGeom prst="rect">
+            <a:avLst/>
+          </a:prstGeom>
+          <a:noFill/>
+          <a:ln/>
+        </p:spPr>
+        <p:txBody>
+          <a:bodyPr wrap="square" lIns="0" tIns="0" rIns="0" bIns="0" rtlCol="0" anchor="ctr"/>
+          <a:lstStyle/>
+          <a:p>
+            <a:pPr indent="0" marL="0">
+              <a:buNone/>
+            </a:pPr>
+            <a:r>
+              <a:rPr lang="en-US" sz="900" dirty="0">
+                <a:solidFill>
+                  <a:srgbClr val="66756D"/>
                 </a:solidFill>
                 <a:latin typeface="Consolas" pitchFamily="34" charset="0"/>
                 <a:ea typeface="Consolas" pitchFamily="34" charset="-122"/>
                 <a:cs typeface="Consolas" pitchFamily="34" charset="-120"/>
               </a:rPr>
-              <a:t>#2F6B4F</a:t>
-            </a:r>
-            <a:endParaRPr lang="en-US" sz="950" dirty="0"/>
-          </a:p>
-        </p:txBody>
-      </p:sp>
-      <p:sp>
-        <p:nvSpPr>
-          <p:cNvPr id="8" name="Text 6"/>
-          <p:cNvSpPr/>
-          <p:nvPr/>
-        </p:nvSpPr>
-        <p:spPr>
-          <a:xfrm>
-            <a:off x="3730752" y="3749040"/>
-            <a:ext cx="1316736" cy="411480"/>
-          </a:xfrm>
-          <a:prstGeom prst="rect">
-            <a:avLst/>
-          </a:prstGeom>
-          <a:noFill/>
-          <a:ln/>
-        </p:spPr>
-        <p:txBody>
-          <a:bodyPr wrap="square" lIns="0" tIns="0" rIns="0" bIns="0" rtlCol="0" anchor="ctr"/>
-          <a:lstStyle/>
-          <a:p>
-            <a:pPr indent="0" marL="0">
-              <a:lnSpc>
-                <a:spcPct val="115000"/>
-              </a:lnSpc>
-              <a:buNone/>
-            </a:pPr>
-            <a:r>
-              <a:rPr lang="en-US" sz="850" i="1" dirty="0">
-                <a:solidFill>
-                  <a:srgbClr val="FFFFFF"/>
-                </a:solidFill>
-                <a:latin typeface="Arial" pitchFamily="34" charset="0"/>
-                <a:ea typeface="Arial" pitchFamily="34" charset="-122"/>
-                <a:cs typeface="Arial" pitchFamily="34" charset="-120"/>
-              </a:rPr>
-              <a:t>Primary / Headlines</a:t>
-            </a:r>
-            <a:endParaRPr lang="en-US" sz="850" dirty="0"/>
-          </a:p>
-        </p:txBody>
-      </p:sp>
-      <p:sp>
-        <p:nvSpPr>
-          <p:cNvPr id="9" name="Text 7"/>
-          <p:cNvSpPr/>
-          <p:nvPr/>
-        </p:nvSpPr>
-        <p:spPr>
-          <a:xfrm>
-            <a:off x="3730752" y="4160520"/>
-            <a:ext cx="1316736" cy="274320"/>
-          </a:xfrm>
-          <a:prstGeom prst="rect">
-            <a:avLst/>
-          </a:prstGeom>
-          <a:noFill/>
-          <a:ln/>
-        </p:spPr>
-        <p:txBody>
-          <a:bodyPr wrap="square" lIns="0" tIns="0" rIns="0" bIns="0" rtlCol="0" anchor="ctr"/>
-          <a:lstStyle/>
-          <a:p>
-            <a:pPr indent="0" marL="0">
-              <a:buNone/>
-            </a:pPr>
-            <a:r>
-              <a:rPr lang="en-US" sz="850" b="1" dirty="0">
-                <a:solidFill>
-                  <a:srgbClr val="FFFFFF"/>
-                </a:solidFill>
-                <a:latin typeface="Arial" pitchFamily="34" charset="0"/>
-                <a:ea typeface="Arial" pitchFamily="34" charset="-122"/>
-                <a:cs typeface="Arial" pitchFamily="34" charset="-120"/>
-              </a:rPr>
-              <a:t>~50%</a:t>
-            </a:r>
-            <a:endParaRPr lang="en-US" sz="850" dirty="0"/>
-          </a:p>
-        </p:txBody>
-      </p:sp>
-      <p:sp>
-        <p:nvSpPr>
-          <p:cNvPr id="10" name="Shape 8"/>
-          <p:cNvSpPr/>
-          <p:nvPr/>
-        </p:nvSpPr>
-        <p:spPr>
-          <a:xfrm>
-            <a:off x="5239512" y="1005840"/>
-            <a:ext cx="1554480" cy="3749040"/>
+              <a:t>#0D7043  </a:t>
+            </a:r>
+            <a:r>
+              <a:rPr lang="en-US" sz="900" dirty="0">
+                <a:solidFill>
+                  <a:srgbClr val="66756D"/>
+                </a:solidFill>
+                <a:latin typeface="Inter" pitchFamily="34" charset="0"/>
+                <a:ea typeface="Inter" pitchFamily="34" charset="-122"/>
+                <a:cs typeface="Inter" pitchFamily="34" charset="-120"/>
+              </a:rPr>
+              <a:t>· Primary / Headings · ~60%</a:t>
+            </a:r>
+            <a:endParaRPr lang="en-US" sz="900" dirty="0"/>
+          </a:p>
+        </p:txBody>
+      </p:sp>
+      <p:sp>
+        <p:nvSpPr>
+          <p:cNvPr id="103" name="Swatch 1"/>
+          <p:cNvSpPr/>
+          <p:nvPr/>
+        </p:nvSpPr>
+        <p:spPr>
+          <a:xfrm>
+            <a:off x="3611880" y="2070840"/>
+            <a:ext cx="420000" cy="420000"/>
           </a:xfrm>
           <a:prstGeom prst="roundRect">
             <a:avLst>
-              <a:gd name="adj" fmla="val 3529"/>
+              <a:gd name="adj" fmla="val 12000"/>
             </a:avLst>
           </a:prstGeom>
           <a:solidFill>
-            <a:srgbClr val="DDE3DC"/>
+            <a:srgbClr val="00AF63"/>
           </a:solidFill>
-          <a:ln/>
-        </p:spPr>
-      </p:sp>
-      <p:sp>
-        <p:nvSpPr>
-          <p:cNvPr id="11" name="Text 9"/>
-          <p:cNvSpPr/>
-          <p:nvPr/>
-        </p:nvSpPr>
-        <p:spPr>
-          <a:xfrm>
-            <a:off x="5358384" y="2880360"/>
-            <a:ext cx="1316736" cy="640080"/>
-          </a:xfrm>
-          <a:prstGeom prst="rect">
-            <a:avLst/>
-          </a:prstGeom>
-          <a:noFill/>
-          <a:ln/>
-        </p:spPr>
-        <p:txBody>
-          <a:bodyPr wrap="square" lIns="0" tIns="0" rIns="0" bIns="0" rtlCol="0" anchor="ctr"/>
-          <a:lstStyle/>
-          <a:p>
-            <a:pPr indent="0" marL="0">
-              <a:lnSpc>
-                <a:spcPct val="110000"/>
-              </a:lnSpc>
-              <a:buNone/>
-            </a:pPr>
-            <a:r>
-              <a:rPr lang="en-US" sz="1150" b="1" dirty="0">
-                <a:solidFill>
-                  <a:srgbClr val="333333"/>
-                </a:solidFill>
-                <a:latin typeface="Arial" pitchFamily="34" charset="0"/>
-                <a:ea typeface="Arial" pitchFamily="34" charset="-122"/>
-                <a:cs typeface="Arial" pitchFamily="34" charset="-120"/>
-              </a:rPr>
-              <a:t>Soft Sage Grey</a:t>
-            </a:r>
-            <a:endParaRPr lang="en-US" sz="1150" dirty="0"/>
-          </a:p>
-        </p:txBody>
-      </p:sp>
-      <p:sp>
-        <p:nvSpPr>
-          <p:cNvPr id="12" name="Text 10"/>
-          <p:cNvSpPr/>
-          <p:nvPr/>
-        </p:nvSpPr>
-        <p:spPr>
-          <a:xfrm>
-            <a:off x="5358384" y="3474720"/>
-            <a:ext cx="1316736" cy="274320"/>
-          </a:xfrm>
-          <a:prstGeom prst="rect">
-            <a:avLst/>
-          </a:prstGeom>
-          <a:noFill/>
-          <a:ln/>
-        </p:spPr>
-        <p:txBody>
-          <a:bodyPr wrap="square" lIns="0" tIns="0" rIns="0" bIns="0" rtlCol="0" anchor="ctr"/>
-          <a:lstStyle/>
-          <a:p>
-            <a:pPr indent="0" marL="0">
-              <a:buNone/>
-            </a:pPr>
-            <a:r>
-              <a:rPr lang="en-US" sz="950" dirty="0">
-                <a:solidFill>
-                  <a:srgbClr val="333333"/>
+          <a:ln>
+            <a:solidFill>
+              <a:srgbClr val="D7E9DF"/>
+            </a:solidFill>
+          </a:ln>
+        </p:spPr>
+      </p:sp>
+      <p:sp>
+        <p:nvSpPr>
+          <p:cNvPr id="104" name="ColorName 1"/>
+          <p:cNvSpPr/>
+          <p:nvPr/>
+        </p:nvSpPr>
+        <p:spPr>
+          <a:xfrm>
+            <a:off x="4181880" y="1985840"/>
+            <a:ext cx="3170000" cy="320000"/>
+          </a:xfrm>
+          <a:prstGeom prst="rect">
+            <a:avLst/>
+          </a:prstGeom>
+          <a:noFill/>
+          <a:ln/>
+        </p:spPr>
+        <p:txBody>
+          <a:bodyPr wrap="square" lIns="0" tIns="0" rIns="0" bIns="0" rtlCol="0" anchor="ctr"/>
+          <a:lstStyle/>
+          <a:p>
+            <a:pPr indent="0" marL="0">
+              <a:buNone/>
+            </a:pPr>
+            <a:r>
+              <a:rPr lang="en-US" sz="1300" b="1" dirty="0">
+                <a:solidFill>
+                  <a:srgbClr val="18231E"/>
+                </a:solidFill>
+                <a:latin typeface="Inter" pitchFamily="34" charset="0"/>
+                <a:ea typeface="Inter" pitchFamily="34" charset="-122"/>
+                <a:cs typeface="Inter" pitchFamily="34" charset="-120"/>
+              </a:rPr>
+              <a:t>Emerald</a:t>
+            </a:r>
+            <a:endParaRPr lang="en-US" sz="1300" dirty="0"/>
+          </a:p>
+        </p:txBody>
+      </p:sp>
+      <p:sp>
+        <p:nvSpPr>
+          <p:cNvPr id="105" name="ColorMeta 1"/>
+          <p:cNvSpPr/>
+          <p:nvPr/>
+        </p:nvSpPr>
+        <p:spPr>
+          <a:xfrm>
+            <a:off x="4181880" y="2325840"/>
+            <a:ext cx="3170000" cy="274320"/>
+          </a:xfrm>
+          <a:prstGeom prst="rect">
+            <a:avLst/>
+          </a:prstGeom>
+          <a:noFill/>
+          <a:ln/>
+        </p:spPr>
+        <p:txBody>
+          <a:bodyPr wrap="square" lIns="0" tIns="0" rIns="0" bIns="0" rtlCol="0" anchor="ctr"/>
+          <a:lstStyle/>
+          <a:p>
+            <a:pPr indent="0" marL="0">
+              <a:buNone/>
+            </a:pPr>
+            <a:r>
+              <a:rPr lang="en-US" sz="900" dirty="0">
+                <a:solidFill>
+                  <a:srgbClr val="66756D"/>
                 </a:solidFill>
                 <a:latin typeface="Consolas" pitchFamily="34" charset="0"/>
                 <a:ea typeface="Consolas" pitchFamily="34" charset="-122"/>
                 <a:cs typeface="Consolas" pitchFamily="34" charset="-120"/>
               </a:rPr>
-              <a:t>#DDE3DC</a:t>
-            </a:r>
-            <a:endParaRPr lang="en-US" sz="950" dirty="0"/>
-          </a:p>
-        </p:txBody>
-      </p:sp>
-      <p:sp>
-        <p:nvSpPr>
-          <p:cNvPr id="13" name="Text 11"/>
-          <p:cNvSpPr/>
-          <p:nvPr/>
-        </p:nvSpPr>
-        <p:spPr>
-          <a:xfrm>
-            <a:off x="5358384" y="3749040"/>
-            <a:ext cx="1316736" cy="411480"/>
-          </a:xfrm>
-          <a:prstGeom prst="rect">
-            <a:avLst/>
-          </a:prstGeom>
-          <a:noFill/>
-          <a:ln/>
-        </p:spPr>
-        <p:txBody>
-          <a:bodyPr wrap="square" lIns="0" tIns="0" rIns="0" bIns="0" rtlCol="0" anchor="ctr"/>
-          <a:lstStyle/>
-          <a:p>
-            <a:pPr indent="0" marL="0">
-              <a:lnSpc>
-                <a:spcPct val="115000"/>
-              </a:lnSpc>
-              <a:buNone/>
-            </a:pPr>
-            <a:r>
-              <a:rPr lang="en-US" sz="850" i="1" dirty="0">
-                <a:solidFill>
-                  <a:srgbClr val="333333"/>
-                </a:solidFill>
-                <a:latin typeface="Arial" pitchFamily="34" charset="0"/>
-                <a:ea typeface="Arial" pitchFamily="34" charset="-122"/>
-                <a:cs typeface="Arial" pitchFamily="34" charset="-120"/>
-              </a:rPr>
-              <a:t>Backgrounds / Panels</a:t>
-            </a:r>
-            <a:endParaRPr lang="en-US" sz="850" dirty="0"/>
-          </a:p>
-        </p:txBody>
-      </p:sp>
-      <p:sp>
-        <p:nvSpPr>
-          <p:cNvPr id="14" name="Text 12"/>
-          <p:cNvSpPr/>
-          <p:nvPr/>
-        </p:nvSpPr>
-        <p:spPr>
-          <a:xfrm>
-            <a:off x="5358384" y="4160520"/>
-            <a:ext cx="1316736" cy="274320"/>
-          </a:xfrm>
-          <a:prstGeom prst="rect">
-            <a:avLst/>
-          </a:prstGeom>
-          <a:noFill/>
-          <a:ln/>
-        </p:spPr>
-        <p:txBody>
-          <a:bodyPr wrap="square" lIns="0" tIns="0" rIns="0" bIns="0" rtlCol="0" anchor="ctr"/>
-          <a:lstStyle/>
-          <a:p>
-            <a:pPr indent="0" marL="0">
-              <a:buNone/>
-            </a:pPr>
-            <a:r>
-              <a:rPr lang="en-US" sz="850" b="1" dirty="0">
-                <a:solidFill>
-                  <a:srgbClr val="333333"/>
-                </a:solidFill>
-                <a:latin typeface="Arial" pitchFamily="34" charset="0"/>
-                <a:ea typeface="Arial" pitchFamily="34" charset="-122"/>
-                <a:cs typeface="Arial" pitchFamily="34" charset="-120"/>
-              </a:rPr>
-              <a:t>~20%</a:t>
-            </a:r>
-            <a:endParaRPr lang="en-US" sz="850" dirty="0"/>
-          </a:p>
-        </p:txBody>
-      </p:sp>
-      <p:sp>
-        <p:nvSpPr>
-          <p:cNvPr id="15" name="Shape 13"/>
-          <p:cNvSpPr/>
-          <p:nvPr/>
-        </p:nvSpPr>
-        <p:spPr>
-          <a:xfrm>
-            <a:off x="6867144" y="1005840"/>
-            <a:ext cx="1554480" cy="3749040"/>
+              <a:t>#00AF63  </a:t>
+            </a:r>
+            <a:r>
+              <a:rPr lang="en-US" sz="900" dirty="0">
+                <a:solidFill>
+                  <a:srgbClr val="66756D"/>
+                </a:solidFill>
+                <a:latin typeface="Inter" pitchFamily="34" charset="0"/>
+                <a:ea typeface="Inter" pitchFamily="34" charset="-122"/>
+                <a:cs typeface="Inter" pitchFamily="34" charset="-120"/>
+              </a:rPr>
+              <a:t>· Buttons / CTAs / Links · ~20%</a:t>
+            </a:r>
+            <a:endParaRPr lang="en-US" sz="900" dirty="0"/>
+          </a:p>
+        </p:txBody>
+      </p:sp>
+      <p:sp>
+        <p:nvSpPr>
+          <p:cNvPr id="106" name="Swatch 2"/>
+          <p:cNvSpPr/>
+          <p:nvPr/>
+        </p:nvSpPr>
+        <p:spPr>
+          <a:xfrm>
+            <a:off x="3611880" y="2920840"/>
+            <a:ext cx="420000" cy="420000"/>
           </a:xfrm>
           <a:prstGeom prst="roundRect">
             <a:avLst>
-              <a:gd name="adj" fmla="val 3529"/>
+              <a:gd name="adj" fmla="val 12000"/>
             </a:avLst>
           </a:prstGeom>
           <a:solidFill>
-            <a:srgbClr val="A8C9C0"/>
+            <a:srgbClr val="48B855"/>
           </a:solidFill>
-          <a:ln/>
-        </p:spPr>
-      </p:sp>
-      <p:sp>
-        <p:nvSpPr>
-          <p:cNvPr id="16" name="Text 14"/>
-          <p:cNvSpPr/>
-          <p:nvPr/>
-        </p:nvSpPr>
-        <p:spPr>
-          <a:xfrm>
-            <a:off x="6986016" y="2880360"/>
-            <a:ext cx="1316736" cy="640080"/>
-          </a:xfrm>
-          <a:prstGeom prst="rect">
-            <a:avLst/>
-          </a:prstGeom>
-          <a:noFill/>
-          <a:ln/>
-        </p:spPr>
-        <p:txBody>
-          <a:bodyPr wrap="square" lIns="0" tIns="0" rIns="0" bIns="0" rtlCol="0" anchor="ctr"/>
-          <a:lstStyle/>
-          <a:p>
-            <a:pPr indent="0" marL="0">
-              <a:lnSpc>
-                <a:spcPct val="110000"/>
-              </a:lnSpc>
-              <a:buNone/>
-            </a:pPr>
-            <a:r>
-              <a:rPr lang="en-US" sz="1150" b="1" dirty="0">
-                <a:solidFill>
-                  <a:srgbClr val="333333"/>
-                </a:solidFill>
-                <a:latin typeface="Arial" pitchFamily="34" charset="0"/>
-                <a:ea typeface="Arial" pitchFamily="34" charset="-122"/>
-                <a:cs typeface="Arial" pitchFamily="34" charset="-120"/>
-              </a:rPr>
-              <a:t>Seafoam Mint</a:t>
-            </a:r>
-            <a:endParaRPr lang="en-US" sz="1150" dirty="0"/>
-          </a:p>
-        </p:txBody>
-      </p:sp>
-      <p:sp>
-        <p:nvSpPr>
-          <p:cNvPr id="17" name="Text 15"/>
-          <p:cNvSpPr/>
-          <p:nvPr/>
-        </p:nvSpPr>
-        <p:spPr>
-          <a:xfrm>
-            <a:off x="6986016" y="3474720"/>
-            <a:ext cx="1316736" cy="274320"/>
-          </a:xfrm>
-          <a:prstGeom prst="rect">
-            <a:avLst/>
-          </a:prstGeom>
-          <a:noFill/>
-          <a:ln/>
-        </p:spPr>
-        <p:txBody>
-          <a:bodyPr wrap="square" lIns="0" tIns="0" rIns="0" bIns="0" rtlCol="0" anchor="ctr"/>
-          <a:lstStyle/>
-          <a:p>
-            <a:pPr indent="0" marL="0">
-              <a:buNone/>
-            </a:pPr>
-            <a:r>
-              <a:rPr lang="en-US" sz="950" dirty="0">
-                <a:solidFill>
-                  <a:srgbClr val="333333"/>
+          <a:ln>
+            <a:solidFill>
+              <a:srgbClr val="D7E9DF"/>
+            </a:solidFill>
+          </a:ln>
+        </p:spPr>
+      </p:sp>
+      <p:sp>
+        <p:nvSpPr>
+          <p:cNvPr id="107" name="ColorName 2"/>
+          <p:cNvSpPr/>
+          <p:nvPr/>
+        </p:nvSpPr>
+        <p:spPr>
+          <a:xfrm>
+            <a:off x="4181880" y="2835840"/>
+            <a:ext cx="3170000" cy="320000"/>
+          </a:xfrm>
+          <a:prstGeom prst="rect">
+            <a:avLst/>
+          </a:prstGeom>
+          <a:noFill/>
+          <a:ln/>
+        </p:spPr>
+        <p:txBody>
+          <a:bodyPr wrap="square" lIns="0" tIns="0" rIns="0" bIns="0" rtlCol="0" anchor="ctr"/>
+          <a:lstStyle/>
+          <a:p>
+            <a:pPr indent="0" marL="0">
+              <a:buNone/>
+            </a:pPr>
+            <a:r>
+              <a:rPr lang="en-US" sz="1300" b="1" dirty="0">
+                <a:solidFill>
+                  <a:srgbClr val="18231E"/>
+                </a:solidFill>
+                <a:latin typeface="Inter" pitchFamily="34" charset="0"/>
+                <a:ea typeface="Inter" pitchFamily="34" charset="-122"/>
+                <a:cs typeface="Inter" pitchFamily="34" charset="-120"/>
+              </a:rPr>
+              <a:t>Fresh Leaf</a:t>
+            </a:r>
+            <a:endParaRPr lang="en-US" sz="1300" dirty="0"/>
+          </a:p>
+        </p:txBody>
+      </p:sp>
+      <p:sp>
+        <p:nvSpPr>
+          <p:cNvPr id="108" name="ColorMeta 2"/>
+          <p:cNvSpPr/>
+          <p:nvPr/>
+        </p:nvSpPr>
+        <p:spPr>
+          <a:xfrm>
+            <a:off x="4181880" y="3175840"/>
+            <a:ext cx="3170000" cy="274320"/>
+          </a:xfrm>
+          <a:prstGeom prst="rect">
+            <a:avLst/>
+          </a:prstGeom>
+          <a:noFill/>
+          <a:ln/>
+        </p:spPr>
+        <p:txBody>
+          <a:bodyPr wrap="square" lIns="0" tIns="0" rIns="0" bIns="0" rtlCol="0" anchor="ctr"/>
+          <a:lstStyle/>
+          <a:p>
+            <a:pPr indent="0" marL="0">
+              <a:buNone/>
+            </a:pPr>
+            <a:r>
+              <a:rPr lang="en-US" sz="900" dirty="0">
+                <a:solidFill>
+                  <a:srgbClr val="66756D"/>
                 </a:solidFill>
                 <a:latin typeface="Consolas" pitchFamily="34" charset="0"/>
                 <a:ea typeface="Consolas" pitchFamily="34" charset="-122"/>
                 <a:cs typeface="Consolas" pitchFamily="34" charset="-120"/>
               </a:rPr>
-              <a:t>#A8C9C0</a:t>
-            </a:r>
-            <a:endParaRPr lang="en-US" sz="950" dirty="0"/>
-          </a:p>
-        </p:txBody>
-      </p:sp>
-      <p:sp>
-        <p:nvSpPr>
-          <p:cNvPr id="18" name="Text 16"/>
-          <p:cNvSpPr/>
-          <p:nvPr/>
-        </p:nvSpPr>
-        <p:spPr>
-          <a:xfrm>
-            <a:off x="6986016" y="3749040"/>
-            <a:ext cx="1316736" cy="411480"/>
-          </a:xfrm>
-          <a:prstGeom prst="rect">
-            <a:avLst/>
-          </a:prstGeom>
-          <a:noFill/>
-          <a:ln/>
-        </p:spPr>
-        <p:txBody>
-          <a:bodyPr wrap="square" lIns="0" tIns="0" rIns="0" bIns="0" rtlCol="0" anchor="ctr"/>
-          <a:lstStyle/>
-          <a:p>
-            <a:pPr indent="0" marL="0">
-              <a:lnSpc>
-                <a:spcPct val="115000"/>
-              </a:lnSpc>
-              <a:buNone/>
-            </a:pPr>
-            <a:r>
-              <a:rPr lang="en-US" sz="850" i="1" dirty="0">
-                <a:solidFill>
-                  <a:srgbClr val="333333"/>
-                </a:solidFill>
-                <a:latin typeface="Arial" pitchFamily="34" charset="0"/>
-                <a:ea typeface="Arial" pitchFamily="34" charset="-122"/>
-                <a:cs typeface="Arial" pitchFamily="34" charset="-120"/>
-              </a:rPr>
-              <a:t>Accents / Imagery</a:t>
-            </a:r>
-            <a:endParaRPr lang="en-US" sz="850" dirty="0"/>
-          </a:p>
-        </p:txBody>
-      </p:sp>
-      <p:sp>
-        <p:nvSpPr>
-          <p:cNvPr id="19" name="Text 17"/>
-          <p:cNvSpPr/>
-          <p:nvPr/>
-        </p:nvSpPr>
-        <p:spPr>
-          <a:xfrm>
-            <a:off x="6986016" y="4160520"/>
-            <a:ext cx="1316736" cy="274320"/>
-          </a:xfrm>
-          <a:prstGeom prst="rect">
-            <a:avLst/>
-          </a:prstGeom>
-          <a:noFill/>
-          <a:ln/>
-        </p:spPr>
-        <p:txBody>
-          <a:bodyPr wrap="square" lIns="0" tIns="0" rIns="0" bIns="0" rtlCol="0" anchor="ctr"/>
-          <a:lstStyle/>
-          <a:p>
-            <a:pPr indent="0" marL="0">
-              <a:buNone/>
-            </a:pPr>
-            <a:r>
-              <a:rPr lang="en-US" sz="850" b="1" dirty="0">
-                <a:solidFill>
-                  <a:srgbClr val="333333"/>
-                </a:solidFill>
-                <a:latin typeface="Arial" pitchFamily="34" charset="0"/>
-                <a:ea typeface="Arial" pitchFamily="34" charset="-122"/>
-                <a:cs typeface="Arial" pitchFamily="34" charset="-120"/>
-              </a:rPr>
-              <a:t>~15%</a:t>
-            </a:r>
-            <a:endParaRPr lang="en-US" sz="850" dirty="0"/>
-          </a:p>
-        </p:txBody>
-      </p:sp>
-      <p:sp>
-        <p:nvSpPr>
-          <p:cNvPr id="20" name="Shape 18"/>
-          <p:cNvSpPr/>
-          <p:nvPr/>
-        </p:nvSpPr>
-        <p:spPr>
-          <a:xfrm>
-            <a:off x="8494776" y="1005840"/>
-            <a:ext cx="1554480" cy="3749040"/>
+              <a:t>#48B855  </a:t>
+            </a:r>
+            <a:r>
+              <a:rPr lang="en-US" sz="900" dirty="0">
+                <a:solidFill>
+                  <a:srgbClr val="66756D"/>
+                </a:solidFill>
+                <a:latin typeface="Inter" pitchFamily="34" charset="0"/>
+                <a:ea typeface="Inter" pitchFamily="34" charset="-122"/>
+                <a:cs typeface="Inter" pitchFamily="34" charset="-120"/>
+              </a:rPr>
+              <a:t>· Accents / Icons / Charts · ~10%</a:t>
+            </a:r>
+            <a:endParaRPr lang="en-US" sz="900" dirty="0"/>
+          </a:p>
+        </p:txBody>
+      </p:sp>
+      <p:sp>
+        <p:nvSpPr>
+          <p:cNvPr id="109" name="Swatch 3"/>
+          <p:cNvSpPr/>
+          <p:nvPr/>
+        </p:nvSpPr>
+        <p:spPr>
+          <a:xfrm>
+            <a:off x="3611880" y="3770840"/>
+            <a:ext cx="420000" cy="420000"/>
           </a:xfrm>
           <a:prstGeom prst="roundRect">
             <a:avLst>
-              <a:gd name="adj" fmla="val 3529"/>
+              <a:gd name="adj" fmla="val 12000"/>
             </a:avLst>
           </a:prstGeom>
           <a:solidFill>
-            <a:srgbClr val="C9A227"/>
+            <a:srgbClr val="B5D60C"/>
           </a:solidFill>
-          <a:ln/>
-        </p:spPr>
-      </p:sp>
-      <p:sp>
-        <p:nvSpPr>
-          <p:cNvPr id="21" name="Text 19"/>
-          <p:cNvSpPr/>
-          <p:nvPr/>
-        </p:nvSpPr>
-        <p:spPr>
-          <a:xfrm>
-            <a:off x="8613648" y="2880360"/>
-            <a:ext cx="1316736" cy="640080"/>
-          </a:xfrm>
-          <a:prstGeom prst="rect">
-            <a:avLst/>
-          </a:prstGeom>
-          <a:noFill/>
-          <a:ln/>
-        </p:spPr>
-        <p:txBody>
-          <a:bodyPr wrap="square" lIns="0" tIns="0" rIns="0" bIns="0" rtlCol="0" anchor="ctr"/>
-          <a:lstStyle/>
-          <a:p>
-            <a:pPr indent="0" marL="0">
-              <a:lnSpc>
-                <a:spcPct val="110000"/>
-              </a:lnSpc>
-              <a:buNone/>
-            </a:pPr>
-            <a:r>
-              <a:rPr lang="en-US" sz="1150" b="1" dirty="0">
-                <a:solidFill>
-                  <a:srgbClr val="FFFFFF"/>
-                </a:solidFill>
-                <a:latin typeface="Arial" pitchFamily="34" charset="0"/>
-                <a:ea typeface="Arial" pitchFamily="34" charset="-122"/>
-                <a:cs typeface="Arial" pitchFamily="34" charset="-120"/>
-              </a:rPr>
-              <a:t>Warm Gold</a:t>
-            </a:r>
-            <a:endParaRPr lang="en-US" sz="1150" dirty="0"/>
-          </a:p>
-        </p:txBody>
-      </p:sp>
-      <p:sp>
-        <p:nvSpPr>
-          <p:cNvPr id="22" name="Text 20"/>
-          <p:cNvSpPr/>
-          <p:nvPr/>
-        </p:nvSpPr>
-        <p:spPr>
-          <a:xfrm>
-            <a:off x="8613648" y="3474720"/>
-            <a:ext cx="1316736" cy="274320"/>
-          </a:xfrm>
-          <a:prstGeom prst="rect">
-            <a:avLst/>
-          </a:prstGeom>
-          <a:noFill/>
-          <a:ln/>
-        </p:spPr>
-        <p:txBody>
-          <a:bodyPr wrap="square" lIns="0" tIns="0" rIns="0" bIns="0" rtlCol="0" anchor="ctr"/>
-          <a:lstStyle/>
-          <a:p>
-            <a:pPr indent="0" marL="0">
-              <a:buNone/>
-            </a:pPr>
-            <a:r>
-              <a:rPr lang="en-US" sz="950" dirty="0">
-                <a:solidFill>
-                  <a:srgbClr val="FFFFFF"/>
+          <a:ln>
+            <a:solidFill>
+              <a:srgbClr val="D7E9DF"/>
+            </a:solidFill>
+          </a:ln>
+        </p:spPr>
+      </p:sp>
+      <p:sp>
+        <p:nvSpPr>
+          <p:cNvPr id="110" name="ColorName 3"/>
+          <p:cNvSpPr/>
+          <p:nvPr/>
+        </p:nvSpPr>
+        <p:spPr>
+          <a:xfrm>
+            <a:off x="4181880" y="3685840"/>
+            <a:ext cx="3170000" cy="320000"/>
+          </a:xfrm>
+          <a:prstGeom prst="rect">
+            <a:avLst/>
+          </a:prstGeom>
+          <a:noFill/>
+          <a:ln/>
+        </p:spPr>
+        <p:txBody>
+          <a:bodyPr wrap="square" lIns="0" tIns="0" rIns="0" bIns="0" rtlCol="0" anchor="ctr"/>
+          <a:lstStyle/>
+          <a:p>
+            <a:pPr indent="0" marL="0">
+              <a:buNone/>
+            </a:pPr>
+            <a:r>
+              <a:rPr lang="en-US" sz="1300" b="1" dirty="0">
+                <a:solidFill>
+                  <a:srgbClr val="18231E"/>
+                </a:solidFill>
+                <a:latin typeface="Inter" pitchFamily="34" charset="0"/>
+                <a:ea typeface="Inter" pitchFamily="34" charset="-122"/>
+                <a:cs typeface="Inter" pitchFamily="34" charset="-120"/>
+              </a:rPr>
+              <a:t>Lime Spark</a:t>
+            </a:r>
+            <a:endParaRPr lang="en-US" sz="1300" dirty="0"/>
+          </a:p>
+        </p:txBody>
+      </p:sp>
+      <p:sp>
+        <p:nvSpPr>
+          <p:cNvPr id="111" name="ColorMeta 3"/>
+          <p:cNvSpPr/>
+          <p:nvPr/>
+        </p:nvSpPr>
+        <p:spPr>
+          <a:xfrm>
+            <a:off x="4181880" y="4025840"/>
+            <a:ext cx="3170000" cy="274320"/>
+          </a:xfrm>
+          <a:prstGeom prst="rect">
+            <a:avLst/>
+          </a:prstGeom>
+          <a:noFill/>
+          <a:ln/>
+        </p:spPr>
+        <p:txBody>
+          <a:bodyPr wrap="square" lIns="0" tIns="0" rIns="0" bIns="0" rtlCol="0" anchor="ctr"/>
+          <a:lstStyle/>
+          <a:p>
+            <a:pPr indent="0" marL="0">
+              <a:buNone/>
+            </a:pPr>
+            <a:r>
+              <a:rPr lang="en-US" sz="900" dirty="0">
+                <a:solidFill>
+                  <a:srgbClr val="66756D"/>
                 </a:solidFill>
                 <a:latin typeface="Consolas" pitchFamily="34" charset="0"/>
                 <a:ea typeface="Consolas" pitchFamily="34" charset="-122"/>
                 <a:cs typeface="Consolas" pitchFamily="34" charset="-120"/>
               </a:rPr>
-              <a:t>#C9A227</a:t>
-            </a:r>
-            <a:endParaRPr lang="en-US" sz="950" dirty="0"/>
-          </a:p>
-        </p:txBody>
-      </p:sp>
-      <p:sp>
-        <p:nvSpPr>
-          <p:cNvPr id="23" name="Text 21"/>
-          <p:cNvSpPr/>
-          <p:nvPr/>
-        </p:nvSpPr>
-        <p:spPr>
-          <a:xfrm>
-            <a:off x="8613648" y="3749040"/>
-            <a:ext cx="1316736" cy="411480"/>
-          </a:xfrm>
-          <a:prstGeom prst="rect">
-            <a:avLst/>
-          </a:prstGeom>
-          <a:noFill/>
-          <a:ln/>
-        </p:spPr>
-        <p:txBody>
-          <a:bodyPr wrap="square" lIns="0" tIns="0" rIns="0" bIns="0" rtlCol="0" anchor="ctr"/>
-          <a:lstStyle/>
-          <a:p>
-            <a:pPr indent="0" marL="0">
-              <a:lnSpc>
-                <a:spcPct val="115000"/>
-              </a:lnSpc>
-              <a:buNone/>
-            </a:pPr>
-            <a:r>
-              <a:rPr lang="en-US" sz="850" i="1" dirty="0">
-                <a:solidFill>
-                  <a:srgbClr val="FFFFFF"/>
-                </a:solidFill>
-                <a:latin typeface="Arial" pitchFamily="34" charset="0"/>
-                <a:ea typeface="Arial" pitchFamily="34" charset="-122"/>
-                <a:cs typeface="Arial" pitchFamily="34" charset="-120"/>
-              </a:rPr>
-              <a:t>Highlights / Call-outs</a:t>
-            </a:r>
-            <a:endParaRPr lang="en-US" sz="850" dirty="0"/>
-          </a:p>
-        </p:txBody>
-      </p:sp>
-      <p:sp>
-        <p:nvSpPr>
-          <p:cNvPr id="24" name="Text 22"/>
-          <p:cNvSpPr/>
-          <p:nvPr/>
-        </p:nvSpPr>
-        <p:spPr>
-          <a:xfrm>
-            <a:off x="8613648" y="4160520"/>
-            <a:ext cx="1316736" cy="274320"/>
-          </a:xfrm>
-          <a:prstGeom prst="rect">
-            <a:avLst/>
-          </a:prstGeom>
-          <a:noFill/>
-          <a:ln/>
-        </p:spPr>
-        <p:txBody>
-          <a:bodyPr wrap="square" lIns="0" tIns="0" rIns="0" bIns="0" rtlCol="0" anchor="ctr"/>
-          <a:lstStyle/>
-          <a:p>
-            <a:pPr indent="0" marL="0">
-              <a:buNone/>
-            </a:pPr>
-            <a:r>
-              <a:rPr lang="en-US" sz="850" b="1" dirty="0">
-                <a:solidFill>
-                  <a:srgbClr val="FFFFFF"/>
-                </a:solidFill>
-                <a:latin typeface="Arial" pitchFamily="34" charset="0"/>
-                <a:ea typeface="Arial" pitchFamily="34" charset="-122"/>
-                <a:cs typeface="Arial" pitchFamily="34" charset="-120"/>
-              </a:rPr>
-              <a:t>~10%</a:t>
-            </a:r>
-            <a:endParaRPr lang="en-US" sz="850" dirty="0"/>
-          </a:p>
-        </p:txBody>
-      </p:sp>
-      <p:sp>
-        <p:nvSpPr>
-          <p:cNvPr id="25" name="Shape 23"/>
-          <p:cNvSpPr/>
-          <p:nvPr/>
-        </p:nvSpPr>
-        <p:spPr>
-          <a:xfrm>
-            <a:off x="10122408" y="1005840"/>
-            <a:ext cx="1554480" cy="3749040"/>
+              <a:t>#B5D60C  </a:t>
+            </a:r>
+            <a:r>
+              <a:rPr lang="en-US" sz="900" dirty="0">
+                <a:solidFill>
+                  <a:srgbClr val="66756D"/>
+                </a:solidFill>
+                <a:latin typeface="Inter" pitchFamily="34" charset="0"/>
+                <a:ea typeface="Inter" pitchFamily="34" charset="-122"/>
+                <a:cs typeface="Inter" pitchFamily="34" charset="-120"/>
+              </a:rPr>
+              <a:t>· Highlights / Call-outs · ~5%</a:t>
+            </a:r>
+            <a:endParaRPr lang="en-US" sz="900" dirty="0"/>
+          </a:p>
+        </p:txBody>
+      </p:sp>
+      <p:sp>
+        <p:nvSpPr>
+          <p:cNvPr id="112" name="Swatch 4"/>
+          <p:cNvSpPr/>
+          <p:nvPr/>
+        </p:nvSpPr>
+        <p:spPr>
+          <a:xfrm>
+            <a:off x="3611880" y="4620840"/>
+            <a:ext cx="420000" cy="420000"/>
           </a:xfrm>
           <a:prstGeom prst="roundRect">
             <a:avLst>
-              <a:gd name="adj" fmla="val 3529"/>
+              <a:gd name="adj" fmla="val 12000"/>
             </a:avLst>
           </a:prstGeom>
           <a:solidFill>
-            <a:srgbClr val="FAFAF8"/>
+            <a:srgbClr val="E8F4EE"/>
           </a:solidFill>
-          <a:ln w="12700">
+          <a:ln>
             <a:solidFill>
-              <a:srgbClr val="E4E1D9"/>
+              <a:srgbClr val="D7E9DF"/>
             </a:solidFill>
-            <a:prstDash val="solid"/>
           </a:ln>
         </p:spPr>
       </p:sp>
       <p:sp>
         <p:nvSpPr>
-          <p:cNvPr id="26" name="Text 24"/>
-          <p:cNvSpPr/>
-          <p:nvPr/>
-        </p:nvSpPr>
-        <p:spPr>
-          <a:xfrm>
-            <a:off x="10241280" y="2880360"/>
-            <a:ext cx="1316736" cy="640080"/>
-          </a:xfrm>
-          <a:prstGeom prst="rect">
-            <a:avLst/>
-          </a:prstGeom>
-          <a:noFill/>
-          <a:ln/>
-        </p:spPr>
-        <p:txBody>
-          <a:bodyPr wrap="square" lIns="0" tIns="0" rIns="0" bIns="0" rtlCol="0" anchor="ctr"/>
-          <a:lstStyle/>
-          <a:p>
-            <a:pPr indent="0" marL="0">
-              <a:lnSpc>
-                <a:spcPct val="110000"/>
-              </a:lnSpc>
-              <a:buNone/>
-            </a:pPr>
-            <a:r>
-              <a:rPr lang="en-US" sz="1150" b="1" dirty="0">
-                <a:solidFill>
-                  <a:srgbClr val="333333"/>
-                </a:solidFill>
-                <a:latin typeface="Arial" pitchFamily="34" charset="0"/>
-                <a:ea typeface="Arial" pitchFamily="34" charset="-122"/>
-                <a:cs typeface="Arial" pitchFamily="34" charset="-120"/>
-              </a:rPr>
-              <a:t>Off-White</a:t>
-            </a:r>
-            <a:endParaRPr lang="en-US" sz="1150" dirty="0"/>
-          </a:p>
-        </p:txBody>
-      </p:sp>
-      <p:sp>
-        <p:nvSpPr>
-          <p:cNvPr id="27" name="Text 25"/>
-          <p:cNvSpPr/>
-          <p:nvPr/>
-        </p:nvSpPr>
-        <p:spPr>
-          <a:xfrm>
-            <a:off x="10241280" y="3474720"/>
-            <a:ext cx="1316736" cy="274320"/>
-          </a:xfrm>
-          <a:prstGeom prst="rect">
-            <a:avLst/>
-          </a:prstGeom>
-          <a:noFill/>
-          <a:ln/>
-        </p:spPr>
-        <p:txBody>
-          <a:bodyPr wrap="square" lIns="0" tIns="0" rIns="0" bIns="0" rtlCol="0" anchor="ctr"/>
-          <a:lstStyle/>
-          <a:p>
-            <a:pPr indent="0" marL="0">
-              <a:buNone/>
-            </a:pPr>
-            <a:r>
-              <a:rPr lang="en-US" sz="950" dirty="0">
-                <a:solidFill>
-                  <a:srgbClr val="333333"/>
+          <p:cNvPr id="113" name="ColorName 4"/>
+          <p:cNvSpPr/>
+          <p:nvPr/>
+        </p:nvSpPr>
+        <p:spPr>
+          <a:xfrm>
+            <a:off x="4181880" y="4535840"/>
+            <a:ext cx="3170000" cy="320000"/>
+          </a:xfrm>
+          <a:prstGeom prst="rect">
+            <a:avLst/>
+          </a:prstGeom>
+          <a:noFill/>
+          <a:ln/>
+        </p:spPr>
+        <p:txBody>
+          <a:bodyPr wrap="square" lIns="0" tIns="0" rIns="0" bIns="0" rtlCol="0" anchor="ctr"/>
+          <a:lstStyle/>
+          <a:p>
+            <a:pPr indent="0" marL="0">
+              <a:buNone/>
+            </a:pPr>
+            <a:r>
+              <a:rPr lang="en-US" sz="1300" b="1" dirty="0">
+                <a:solidFill>
+                  <a:srgbClr val="18231E"/>
+                </a:solidFill>
+                <a:latin typeface="Inter" pitchFamily="34" charset="0"/>
+                <a:ea typeface="Inter" pitchFamily="34" charset="-122"/>
+                <a:cs typeface="Inter" pitchFamily="34" charset="-120"/>
+              </a:rPr>
+              <a:t>Pale Mint</a:t>
+            </a:r>
+            <a:endParaRPr lang="en-US" sz="1300" dirty="0"/>
+          </a:p>
+        </p:txBody>
+      </p:sp>
+      <p:sp>
+        <p:nvSpPr>
+          <p:cNvPr id="114" name="ColorMeta 4"/>
+          <p:cNvSpPr/>
+          <p:nvPr/>
+        </p:nvSpPr>
+        <p:spPr>
+          <a:xfrm>
+            <a:off x="4181880" y="4875840"/>
+            <a:ext cx="3170000" cy="274320"/>
+          </a:xfrm>
+          <a:prstGeom prst="rect">
+            <a:avLst/>
+          </a:prstGeom>
+          <a:noFill/>
+          <a:ln/>
+        </p:spPr>
+        <p:txBody>
+          <a:bodyPr wrap="square" lIns="0" tIns="0" rIns="0" bIns="0" rtlCol="0" anchor="ctr"/>
+          <a:lstStyle/>
+          <a:p>
+            <a:pPr indent="0" marL="0">
+              <a:buNone/>
+            </a:pPr>
+            <a:r>
+              <a:rPr lang="en-US" sz="900" dirty="0">
+                <a:solidFill>
+                  <a:srgbClr val="66756D"/>
                 </a:solidFill>
                 <a:latin typeface="Consolas" pitchFamily="34" charset="0"/>
                 <a:ea typeface="Consolas" pitchFamily="34" charset="-122"/>
                 <a:cs typeface="Consolas" pitchFamily="34" charset="-120"/>
               </a:rPr>
-              <a:t>#FAFAF8</a:t>
-            </a:r>
-            <a:endParaRPr lang="en-US" sz="950" dirty="0"/>
-          </a:p>
-        </p:txBody>
-      </p:sp>
-      <p:sp>
-        <p:nvSpPr>
-          <p:cNvPr id="28" name="Text 26"/>
-          <p:cNvSpPr/>
-          <p:nvPr/>
-        </p:nvSpPr>
-        <p:spPr>
-          <a:xfrm>
-            <a:off x="10241280" y="3749040"/>
-            <a:ext cx="1316736" cy="411480"/>
-          </a:xfrm>
-          <a:prstGeom prst="rect">
-            <a:avLst/>
-          </a:prstGeom>
-          <a:noFill/>
-          <a:ln/>
-        </p:spPr>
-        <p:txBody>
-          <a:bodyPr wrap="square" lIns="0" tIns="0" rIns="0" bIns="0" rtlCol="0" anchor="ctr"/>
-          <a:lstStyle/>
-          <a:p>
-            <a:pPr indent="0" marL="0">
-              <a:lnSpc>
-                <a:spcPct val="115000"/>
-              </a:lnSpc>
-              <a:buNone/>
-            </a:pPr>
-            <a:r>
-              <a:rPr lang="en-US" sz="850" i="1" dirty="0">
-                <a:solidFill>
-                  <a:srgbClr val="333333"/>
-                </a:solidFill>
-                <a:latin typeface="Arial" pitchFamily="34" charset="0"/>
-                <a:ea typeface="Arial" pitchFamily="34" charset="-122"/>
-                <a:cs typeface="Arial" pitchFamily="34" charset="-120"/>
-              </a:rPr>
-              <a:t>Base / Canvas</a:t>
-            </a:r>
-            <a:endParaRPr lang="en-US" sz="850" dirty="0"/>
-          </a:p>
-        </p:txBody>
-      </p:sp>
-      <p:sp>
-        <p:nvSpPr>
-          <p:cNvPr id="29" name="Text 27"/>
-          <p:cNvSpPr/>
-          <p:nvPr/>
-        </p:nvSpPr>
-        <p:spPr>
-          <a:xfrm>
-            <a:off x="10241280" y="4160520"/>
-            <a:ext cx="1316736" cy="274320"/>
-          </a:xfrm>
-          <a:prstGeom prst="rect">
-            <a:avLst/>
-          </a:prstGeom>
-          <a:noFill/>
-          <a:ln/>
-        </p:spPr>
-        <p:txBody>
-          <a:bodyPr wrap="square" lIns="0" tIns="0" rIns="0" bIns="0" rtlCol="0" anchor="ctr"/>
-          <a:lstStyle/>
-          <a:p>
-            <a:pPr indent="0" marL="0">
-              <a:buNone/>
-            </a:pPr>
-            <a:r>
-              <a:rPr lang="en-US" sz="850" b="1" dirty="0">
-                <a:solidFill>
-                  <a:srgbClr val="333333"/>
-                </a:solidFill>
-                <a:latin typeface="Arial" pitchFamily="34" charset="0"/>
-                <a:ea typeface="Arial" pitchFamily="34" charset="-122"/>
-                <a:cs typeface="Arial" pitchFamily="34" charset="-120"/>
-              </a:rPr>
-              <a:t>~5%</a:t>
-            </a:r>
-            <a:endParaRPr lang="en-US" sz="850" dirty="0"/>
+              <a:t>#E8F4EE  </a:t>
+            </a:r>
+            <a:r>
+              <a:rPr lang="en-US" sz="900" dirty="0">
+                <a:solidFill>
+                  <a:srgbClr val="66756D"/>
+                </a:solidFill>
+                <a:latin typeface="Inter" pitchFamily="34" charset="0"/>
+                <a:ea typeface="Inter" pitchFamily="34" charset="-122"/>
+                <a:cs typeface="Inter" pitchFamily="34" charset="-120"/>
+              </a:rPr>
+              <a:t>· Backgrounds / Panels · ~60%</a:t>
+            </a:r>
+            <a:endParaRPr lang="en-US" sz="900" dirty="0"/>
+          </a:p>
+        </p:txBody>
+      </p:sp>
+      <p:sp>
+        <p:nvSpPr>
+          <p:cNvPr id="115" name="Swatch 5"/>
+          <p:cNvSpPr/>
+          <p:nvPr/>
+        </p:nvSpPr>
+        <p:spPr>
+          <a:xfrm>
+            <a:off x="7661880" y="1220840"/>
+            <a:ext cx="420000" cy="420000"/>
+          </a:xfrm>
+          <a:prstGeom prst="roundRect">
+            <a:avLst>
+              <a:gd name="adj" fmla="val 12000"/>
+            </a:avLst>
+          </a:prstGeom>
+          <a:solidFill>
+            <a:srgbClr val="D7E9DF"/>
+          </a:solidFill>
+          <a:ln>
+            <a:solidFill>
+              <a:srgbClr val="D7E9DF"/>
+            </a:solidFill>
+          </a:ln>
+        </p:spPr>
+      </p:sp>
+      <p:sp>
+        <p:nvSpPr>
+          <p:cNvPr id="116" name="ColorName 5"/>
+          <p:cNvSpPr/>
+          <p:nvPr/>
+        </p:nvSpPr>
+        <p:spPr>
+          <a:xfrm>
+            <a:off x="8231880" y="1135840"/>
+            <a:ext cx="3170000" cy="320000"/>
+          </a:xfrm>
+          <a:prstGeom prst="rect">
+            <a:avLst/>
+          </a:prstGeom>
+          <a:noFill/>
+          <a:ln/>
+        </p:spPr>
+        <p:txBody>
+          <a:bodyPr wrap="square" lIns="0" tIns="0" rIns="0" bIns="0" rtlCol="0" anchor="ctr"/>
+          <a:lstStyle/>
+          <a:p>
+            <a:pPr indent="0" marL="0">
+              <a:buNone/>
+            </a:pPr>
+            <a:r>
+              <a:rPr lang="en-US" sz="1300" b="1" dirty="0">
+                <a:solidFill>
+                  <a:srgbClr val="18231E"/>
+                </a:solidFill>
+                <a:latin typeface="Inter" pitchFamily="34" charset="0"/>
+                <a:ea typeface="Inter" pitchFamily="34" charset="-122"/>
+                <a:cs typeface="Inter" pitchFamily="34" charset="-120"/>
+              </a:rPr>
+              <a:t>Mist Green</a:t>
+            </a:r>
+            <a:endParaRPr lang="en-US" sz="1300" dirty="0"/>
+          </a:p>
+        </p:txBody>
+      </p:sp>
+      <p:sp>
+        <p:nvSpPr>
+          <p:cNvPr id="117" name="ColorMeta 5"/>
+          <p:cNvSpPr/>
+          <p:nvPr/>
+        </p:nvSpPr>
+        <p:spPr>
+          <a:xfrm>
+            <a:off x="8231880" y="1475840"/>
+            <a:ext cx="3170000" cy="274320"/>
+          </a:xfrm>
+          <a:prstGeom prst="rect">
+            <a:avLst/>
+          </a:prstGeom>
+          <a:noFill/>
+          <a:ln/>
+        </p:spPr>
+        <p:txBody>
+          <a:bodyPr wrap="square" lIns="0" tIns="0" rIns="0" bIns="0" rtlCol="0" anchor="ctr"/>
+          <a:lstStyle/>
+          <a:p>
+            <a:pPr indent="0" marL="0">
+              <a:buNone/>
+            </a:pPr>
+            <a:r>
+              <a:rPr lang="en-US" sz="900" dirty="0">
+                <a:solidFill>
+                  <a:srgbClr val="66756D"/>
+                </a:solidFill>
+                <a:latin typeface="Consolas" pitchFamily="34" charset="0"/>
+                <a:ea typeface="Consolas" pitchFamily="34" charset="-122"/>
+                <a:cs typeface="Consolas" pitchFamily="34" charset="-120"/>
+              </a:rPr>
+              <a:t>#D7E9DF  </a:t>
+            </a:r>
+            <a:r>
+              <a:rPr lang="en-US" sz="900" dirty="0">
+                <a:solidFill>
+                  <a:srgbClr val="66756D"/>
+                </a:solidFill>
+                <a:latin typeface="Inter" pitchFamily="34" charset="0"/>
+                <a:ea typeface="Inter" pitchFamily="34" charset="-122"/>
+                <a:cs typeface="Inter" pitchFamily="34" charset="-120"/>
+              </a:rPr>
+              <a:t>· Borders / Subtle Dividers · ~20%</a:t>
+            </a:r>
+            <a:endParaRPr lang="en-US" sz="900" dirty="0"/>
+          </a:p>
+        </p:txBody>
+      </p:sp>
+      <p:sp>
+        <p:nvSpPr>
+          <p:cNvPr id="118" name="Swatch 6"/>
+          <p:cNvSpPr/>
+          <p:nvPr/>
+        </p:nvSpPr>
+        <p:spPr>
+          <a:xfrm>
+            <a:off x="7661880" y="2070840"/>
+            <a:ext cx="420000" cy="420000"/>
+          </a:xfrm>
+          <a:prstGeom prst="roundRect">
+            <a:avLst>
+              <a:gd name="adj" fmla="val 12000"/>
+            </a:avLst>
+          </a:prstGeom>
+          <a:solidFill>
+            <a:srgbClr val="0F5B37"/>
+          </a:solidFill>
+          <a:ln>
+            <a:solidFill>
+              <a:srgbClr val="D7E9DF"/>
+            </a:solidFill>
+          </a:ln>
+        </p:spPr>
+      </p:sp>
+      <p:sp>
+        <p:nvSpPr>
+          <p:cNvPr id="119" name="ColorName 6"/>
+          <p:cNvSpPr/>
+          <p:nvPr/>
+        </p:nvSpPr>
+        <p:spPr>
+          <a:xfrm>
+            <a:off x="8231880" y="1985840"/>
+            <a:ext cx="3170000" cy="320000"/>
+          </a:xfrm>
+          <a:prstGeom prst="rect">
+            <a:avLst/>
+          </a:prstGeom>
+          <a:noFill/>
+          <a:ln/>
+        </p:spPr>
+        <p:txBody>
+          <a:bodyPr wrap="square" lIns="0" tIns="0" rIns="0" bIns="0" rtlCol="0" anchor="ctr"/>
+          <a:lstStyle/>
+          <a:p>
+            <a:pPr indent="0" marL="0">
+              <a:buNone/>
+            </a:pPr>
+            <a:r>
+              <a:rPr lang="en-US" sz="1300" b="1" dirty="0">
+                <a:solidFill>
+                  <a:srgbClr val="18231E"/>
+                </a:solidFill>
+                <a:latin typeface="Inter" pitchFamily="34" charset="0"/>
+                <a:ea typeface="Inter" pitchFamily="34" charset="-122"/>
+                <a:cs typeface="Inter" pitchFamily="34" charset="-120"/>
+              </a:rPr>
+              <a:t>Deep Forest</a:t>
+            </a:r>
+            <a:endParaRPr lang="en-US" sz="1300" dirty="0"/>
+          </a:p>
+        </p:txBody>
+      </p:sp>
+      <p:sp>
+        <p:nvSpPr>
+          <p:cNvPr id="120" name="ColorMeta 6"/>
+          <p:cNvSpPr/>
+          <p:nvPr/>
+        </p:nvSpPr>
+        <p:spPr>
+          <a:xfrm>
+            <a:off x="8231880" y="2325840"/>
+            <a:ext cx="3170000" cy="274320"/>
+          </a:xfrm>
+          <a:prstGeom prst="rect">
+            <a:avLst/>
+          </a:prstGeom>
+          <a:noFill/>
+          <a:ln/>
+        </p:spPr>
+        <p:txBody>
+          <a:bodyPr wrap="square" lIns="0" tIns="0" rIns="0" bIns="0" rtlCol="0" anchor="ctr"/>
+          <a:lstStyle/>
+          <a:p>
+            <a:pPr indent="0" marL="0">
+              <a:buNone/>
+            </a:pPr>
+            <a:r>
+              <a:rPr lang="en-US" sz="900" dirty="0">
+                <a:solidFill>
+                  <a:srgbClr val="66756D"/>
+                </a:solidFill>
+                <a:latin typeface="Consolas" pitchFamily="34" charset="0"/>
+                <a:ea typeface="Consolas" pitchFamily="34" charset="-122"/>
+                <a:cs typeface="Consolas" pitchFamily="34" charset="-120"/>
+              </a:rPr>
+              <a:t>#0F5B37  </a:t>
+            </a:r>
+            <a:r>
+              <a:rPr lang="en-US" sz="900" dirty="0">
+                <a:solidFill>
+                  <a:srgbClr val="66756D"/>
+                </a:solidFill>
+                <a:latin typeface="Inter" pitchFamily="34" charset="0"/>
+                <a:ea typeface="Inter" pitchFamily="34" charset="-122"/>
+                <a:cs typeface="Inter" pitchFamily="34" charset="-120"/>
+              </a:rPr>
+              <a:t>· Dark Backgrounds / Footer · ~5%</a:t>
+            </a:r>
+            <a:endParaRPr lang="en-US" sz="900" dirty="0"/>
+          </a:p>
+        </p:txBody>
+      </p:sp>
+      <p:sp>
+        <p:nvSpPr>
+          <p:cNvPr id="121" name="Swatch 7"/>
+          <p:cNvSpPr/>
+          <p:nvPr/>
+        </p:nvSpPr>
+        <p:spPr>
+          <a:xfrm>
+            <a:off x="7661880" y="2920840"/>
+            <a:ext cx="420000" cy="420000"/>
+          </a:xfrm>
+          <a:prstGeom prst="roundRect">
+            <a:avLst>
+              <a:gd name="adj" fmla="val 12000"/>
+            </a:avLst>
+          </a:prstGeom>
+          <a:solidFill>
+            <a:srgbClr val="18231E"/>
+          </a:solidFill>
+          <a:ln>
+            <a:solidFill>
+              <a:srgbClr val="D7E9DF"/>
+            </a:solidFill>
+          </a:ln>
+        </p:spPr>
+      </p:sp>
+      <p:sp>
+        <p:nvSpPr>
+          <p:cNvPr id="122" name="ColorName 7"/>
+          <p:cNvSpPr/>
+          <p:nvPr/>
+        </p:nvSpPr>
+        <p:spPr>
+          <a:xfrm>
+            <a:off x="8231880" y="2835840"/>
+            <a:ext cx="3170000" cy="320000"/>
+          </a:xfrm>
+          <a:prstGeom prst="rect">
+            <a:avLst/>
+          </a:prstGeom>
+          <a:noFill/>
+          <a:ln/>
+        </p:spPr>
+        <p:txBody>
+          <a:bodyPr wrap="square" lIns="0" tIns="0" rIns="0" bIns="0" rtlCol="0" anchor="ctr"/>
+          <a:lstStyle/>
+          <a:p>
+            <a:pPr indent="0" marL="0">
+              <a:buNone/>
+            </a:pPr>
+            <a:r>
+              <a:rPr lang="en-US" sz="1300" b="1" dirty="0">
+                <a:solidFill>
+                  <a:srgbClr val="18231E"/>
+                </a:solidFill>
+                <a:latin typeface="Inter" pitchFamily="34" charset="0"/>
+                <a:ea typeface="Inter" pitchFamily="34" charset="-122"/>
+                <a:cs typeface="Inter" pitchFamily="34" charset="-120"/>
+              </a:rPr>
+              <a:t>Charcoal</a:t>
+            </a:r>
+            <a:endParaRPr lang="en-US" sz="1300" dirty="0"/>
+          </a:p>
+        </p:txBody>
+      </p:sp>
+      <p:sp>
+        <p:nvSpPr>
+          <p:cNvPr id="123" name="ColorMeta 7"/>
+          <p:cNvSpPr/>
+          <p:nvPr/>
+        </p:nvSpPr>
+        <p:spPr>
+          <a:xfrm>
+            <a:off x="8231880" y="3175840"/>
+            <a:ext cx="3170000" cy="274320"/>
+          </a:xfrm>
+          <a:prstGeom prst="rect">
+            <a:avLst/>
+          </a:prstGeom>
+          <a:noFill/>
+          <a:ln/>
+        </p:spPr>
+        <p:txBody>
+          <a:bodyPr wrap="square" lIns="0" tIns="0" rIns="0" bIns="0" rtlCol="0" anchor="ctr"/>
+          <a:lstStyle/>
+          <a:p>
+            <a:pPr indent="0" marL="0">
+              <a:buNone/>
+            </a:pPr>
+            <a:r>
+              <a:rPr lang="en-US" sz="900" dirty="0">
+                <a:solidFill>
+                  <a:srgbClr val="66756D"/>
+                </a:solidFill>
+                <a:latin typeface="Consolas" pitchFamily="34" charset="0"/>
+                <a:ea typeface="Consolas" pitchFamily="34" charset="-122"/>
+                <a:cs typeface="Consolas" pitchFamily="34" charset="-120"/>
+              </a:rPr>
+              <a:t>#18231E  </a:t>
+            </a:r>
+            <a:r>
+              <a:rPr lang="en-US" sz="900" dirty="0">
+                <a:solidFill>
+                  <a:srgbClr val="66756D"/>
+                </a:solidFill>
+                <a:latin typeface="Inter" pitchFamily="34" charset="0"/>
+                <a:ea typeface="Inter" pitchFamily="34" charset="-122"/>
+                <a:cs typeface="Inter" pitchFamily="34" charset="-120"/>
+              </a:rPr>
+              <a:t>· Body Text / Primary Text · ~90%</a:t>
+            </a:r>
+            <a:endParaRPr lang="en-US" sz="900" dirty="0"/>
+          </a:p>
+        </p:txBody>
+      </p:sp>
+      <p:sp>
+        <p:nvSpPr>
+          <p:cNvPr id="124" name="Swatch 8"/>
+          <p:cNvSpPr/>
+          <p:nvPr/>
+        </p:nvSpPr>
+        <p:spPr>
+          <a:xfrm>
+            <a:off x="7661880" y="3770840"/>
+            <a:ext cx="420000" cy="420000"/>
+          </a:xfrm>
+          <a:prstGeom prst="roundRect">
+            <a:avLst>
+              <a:gd name="adj" fmla="val 12000"/>
+            </a:avLst>
+          </a:prstGeom>
+          <a:solidFill>
+            <a:srgbClr val="66756D"/>
+          </a:solidFill>
+          <a:ln>
+            <a:solidFill>
+              <a:srgbClr val="D7E9DF"/>
+            </a:solidFill>
+          </a:ln>
+        </p:spPr>
+      </p:sp>
+      <p:sp>
+        <p:nvSpPr>
+          <p:cNvPr id="125" name="ColorName 8"/>
+          <p:cNvSpPr/>
+          <p:nvPr/>
+        </p:nvSpPr>
+        <p:spPr>
+          <a:xfrm>
+            <a:off x="8231880" y="3685840"/>
+            <a:ext cx="3170000" cy="320000"/>
+          </a:xfrm>
+          <a:prstGeom prst="rect">
+            <a:avLst/>
+          </a:prstGeom>
+          <a:noFill/>
+          <a:ln/>
+        </p:spPr>
+        <p:txBody>
+          <a:bodyPr wrap="square" lIns="0" tIns="0" rIns="0" bIns="0" rtlCol="0" anchor="ctr"/>
+          <a:lstStyle/>
+          <a:p>
+            <a:pPr indent="0" marL="0">
+              <a:buNone/>
+            </a:pPr>
+            <a:r>
+              <a:rPr lang="en-US" sz="1300" b="1" dirty="0">
+                <a:solidFill>
+                  <a:srgbClr val="18231E"/>
+                </a:solidFill>
+                <a:latin typeface="Inter" pitchFamily="34" charset="0"/>
+                <a:ea typeface="Inter" pitchFamily="34" charset="-122"/>
+                <a:cs typeface="Inter" pitchFamily="34" charset="-120"/>
+              </a:rPr>
+              <a:t>Muted Green Grey</a:t>
+            </a:r>
+            <a:endParaRPr lang="en-US" sz="1300" dirty="0"/>
+          </a:p>
+        </p:txBody>
+      </p:sp>
+      <p:sp>
+        <p:nvSpPr>
+          <p:cNvPr id="126" name="ColorMeta 8"/>
+          <p:cNvSpPr/>
+          <p:nvPr/>
+        </p:nvSpPr>
+        <p:spPr>
+          <a:xfrm>
+            <a:off x="8231880" y="4025840"/>
+            <a:ext cx="3170000" cy="274320"/>
+          </a:xfrm>
+          <a:prstGeom prst="rect">
+            <a:avLst/>
+          </a:prstGeom>
+          <a:noFill/>
+          <a:ln/>
+        </p:spPr>
+        <p:txBody>
+          <a:bodyPr wrap="square" lIns="0" tIns="0" rIns="0" bIns="0" rtlCol="0" anchor="ctr"/>
+          <a:lstStyle/>
+          <a:p>
+            <a:pPr indent="0" marL="0">
+              <a:buNone/>
+            </a:pPr>
+            <a:r>
+              <a:rPr lang="en-US" sz="900" dirty="0">
+                <a:solidFill>
+                  <a:srgbClr val="66756D"/>
+                </a:solidFill>
+                <a:latin typeface="Consolas" pitchFamily="34" charset="0"/>
+                <a:ea typeface="Consolas" pitchFamily="34" charset="-122"/>
+                <a:cs typeface="Consolas" pitchFamily="34" charset="-120"/>
+              </a:rPr>
+              <a:t>#66756D  </a:t>
+            </a:r>
+            <a:r>
+              <a:rPr lang="en-US" sz="900" dirty="0">
+                <a:solidFill>
+                  <a:srgbClr val="66756D"/>
+                </a:solidFill>
+                <a:latin typeface="Inter" pitchFamily="34" charset="0"/>
+                <a:ea typeface="Inter" pitchFamily="34" charset="-122"/>
+                <a:cs typeface="Inter" pitchFamily="34" charset="-120"/>
+              </a:rPr>
+              <a:t>· Secondary Text / Icons · ~10%</a:t>
+            </a:r>
+            <a:endParaRPr lang="en-US" sz="900" dirty="0"/>
+          </a:p>
+        </p:txBody>
+      </p:sp>
+      <p:sp>
+        <p:nvSpPr>
+          <p:cNvPr id="127" name="Swatch 9"/>
+          <p:cNvSpPr/>
+          <p:nvPr/>
+        </p:nvSpPr>
+        <p:spPr>
+          <a:xfrm>
+            <a:off x="7661880" y="4620840"/>
+            <a:ext cx="420000" cy="420000"/>
+          </a:xfrm>
+          <a:prstGeom prst="roundRect">
+            <a:avLst>
+              <a:gd name="adj" fmla="val 12000"/>
+            </a:avLst>
+          </a:prstGeom>
+          <a:solidFill>
+            <a:srgbClr val="FAFCF9"/>
+          </a:solidFill>
+          <a:ln>
+            <a:solidFill>
+              <a:srgbClr val="D7E9DF"/>
+            </a:solidFill>
+          </a:ln>
+        </p:spPr>
+      </p:sp>
+      <p:sp>
+        <p:nvSpPr>
+          <p:cNvPr id="128" name="ColorName 9"/>
+          <p:cNvSpPr/>
+          <p:nvPr/>
+        </p:nvSpPr>
+        <p:spPr>
+          <a:xfrm>
+            <a:off x="8231880" y="4535840"/>
+            <a:ext cx="3170000" cy="320000"/>
+          </a:xfrm>
+          <a:prstGeom prst="rect">
+            <a:avLst/>
+          </a:prstGeom>
+          <a:noFill/>
+          <a:ln/>
+        </p:spPr>
+        <p:txBody>
+          <a:bodyPr wrap="square" lIns="0" tIns="0" rIns="0" bIns="0" rtlCol="0" anchor="ctr"/>
+          <a:lstStyle/>
+          <a:p>
+            <a:pPr indent="0" marL="0">
+              <a:buNone/>
+            </a:pPr>
+            <a:r>
+              <a:rPr lang="en-US" sz="1300" b="1" dirty="0">
+                <a:solidFill>
+                  <a:srgbClr val="18231E"/>
+                </a:solidFill>
+                <a:latin typeface="Inter" pitchFamily="34" charset="0"/>
+                <a:ea typeface="Inter" pitchFamily="34" charset="-122"/>
+                <a:cs typeface="Inter" pitchFamily="34" charset="-120"/>
+              </a:rPr>
+              <a:t>Warm White</a:t>
+            </a:r>
+            <a:endParaRPr lang="en-US" sz="1300" dirty="0"/>
+          </a:p>
+        </p:txBody>
+      </p:sp>
+      <p:sp>
+        <p:nvSpPr>
+          <p:cNvPr id="129" name="ColorMeta 9"/>
+          <p:cNvSpPr/>
+          <p:nvPr/>
+        </p:nvSpPr>
+        <p:spPr>
+          <a:xfrm>
+            <a:off x="8231880" y="4875840"/>
+            <a:ext cx="3170000" cy="274320"/>
+          </a:xfrm>
+          <a:prstGeom prst="rect">
+            <a:avLst/>
+          </a:prstGeom>
+          <a:noFill/>
+          <a:ln/>
+        </p:spPr>
+        <p:txBody>
+          <a:bodyPr wrap="square" lIns="0" tIns="0" rIns="0" bIns="0" rtlCol="0" anchor="ctr"/>
+          <a:lstStyle/>
+          <a:p>
+            <a:pPr indent="0" marL="0">
+              <a:buNone/>
+            </a:pPr>
+            <a:r>
+              <a:rPr lang="en-US" sz="900" dirty="0">
+                <a:solidFill>
+                  <a:srgbClr val="66756D"/>
+                </a:solidFill>
+                <a:latin typeface="Consolas" pitchFamily="34" charset="0"/>
+                <a:ea typeface="Consolas" pitchFamily="34" charset="-122"/>
+                <a:cs typeface="Consolas" pitchFamily="34" charset="-120"/>
+              </a:rPr>
+              <a:t>#FAFCF9  </a:t>
+            </a:r>
+            <a:r>
+              <a:rPr lang="en-US" sz="900" dirty="0">
+                <a:solidFill>
+                  <a:srgbClr val="66756D"/>
+                </a:solidFill>
+                <a:latin typeface="Inter" pitchFamily="34" charset="0"/>
+                <a:ea typeface="Inter" pitchFamily="34" charset="-122"/>
+                <a:cs typeface="Inter" pitchFamily="34" charset="-120"/>
+              </a:rPr>
+              <a:t>· Main Canvas · ~100%</a:t>
+            </a:r>
+            <a:endParaRPr lang="en-US" sz="900" dirty="0"/>
           </a:p>
         </p:txBody>
       </p:sp>
@@ -15763,11 +15988,11 @@
             <a:r>
               <a:rPr lang="en-US" sz="850" spc="120" kern="0" dirty="0">
                 <a:solidFill>
-                  <a:srgbClr val="B7BEB6"/>
-                </a:solidFill>
-                <a:latin typeface="Arial" pitchFamily="34" charset="0"/>
-                <a:ea typeface="Arial" pitchFamily="34" charset="-122"/>
-                <a:cs typeface="Arial" pitchFamily="34" charset="-120"/>
+                  <a:srgbClr val="66756D"/>
+                </a:solidFill>
+                <a:latin typeface="Inter" pitchFamily="34" charset="0"/>
+                <a:ea typeface="Inter" pitchFamily="34" charset="-122"/>
+                <a:cs typeface="Inter" pitchFamily="34" charset="-120"/>
               </a:rPr>
               <a:t>ORENA SOLUTIONS — BRAND PLAYBOOK</a:t>
             </a:r>
@@ -15859,7 +16084,7 @@
         <a:font script="Viet" typeface="Times New Roman"/>
         <a:font script="Uigh" typeface="Microsoft Uighur"/>
         <a:font script="Geor" typeface="Sylfaen"/>
-        <a:font script="Armn" typeface="Arial"/>
+        <a:font script="Armn" typeface="Inter"/>
         <a:font script="Bugi" typeface="Leelawadee UI"/>
         <a:font script="Bopo" typeface="Microsoft JhengHei"/>
         <a:font script="Java" typeface="Javanese Text"/>
@@ -15885,8 +16110,8 @@
         <a:font script="Hang" typeface="맑은 고딕"/>
         <a:font script="Hans" typeface="等线"/>
         <a:font script="Hant" typeface="新細明體"/>
-        <a:font script="Arab" typeface="Arial"/>
-        <a:font script="Hebr" typeface="Arial"/>
+        <a:font script="Arab" typeface="Inter"/>
+        <a:font script="Hebr" typeface="Inter"/>
         <a:font script="Thai" typeface="Cordia New"/>
         <a:font script="Ethi" typeface="Nyala"/>
         <a:font script="Beng" typeface="Vrinda"/>
@@ -15908,10 +16133,10 @@
         <a:font script="Laoo" typeface="DokChampa"/>
         <a:font script="Sinh" typeface="Iskoola Pota"/>
         <a:font script="Mong" typeface="Mongolian Baiti"/>
-        <a:font script="Viet" typeface="Arial"/>
+        <a:font script="Viet" typeface="Inter"/>
         <a:font script="Uigh" typeface="Microsoft Uighur"/>
         <a:font script="Geor" typeface="Sylfaen"/>
-        <a:font script="Armn" typeface="Arial"/>
+        <a:font script="Armn" typeface="Inter"/>
         <a:font script="Bugi" typeface="Leelawadee UI"/>
         <a:font script="Bopo" typeface="Microsoft JhengHei"/>
         <a:font script="Java" typeface="Javanese Text"/>
@@ -16021,7 +16246,7 @@
         <a:effectStyle>
           <a:effectLst>
             <a:outerShdw blurRad="57150" dist="19050" dir="5400000" algn="ctr" rotWithShape="0">
-              <a:srgbClr val="000000">
+              <a:srgbClr val="18231E">
                 <a:alpha val="63000"/>
               </a:srgbClr>
             </a:outerShdw>
